--- a/presentations/02-raqamli-tibbiyot.pptx
+++ b/presentations/02-raqamli-tibbiyot.pptx
@@ -56,9 +56,12 @@
 <p:sldMaster xmlns:p="http://schemas.openxmlformats.org/presentationml/2006/main" xmlns:a="http://schemas.openxmlformats.org/drawingml/2006/main" xmlns:r="http://schemas.openxmlformats.org/officeDocument/2006/relationships">
   <p:cSld>
     <p:bg>
-      <p:bgRef idx="1001">
-        <a:schemeClr val="bg1"/>
-      </p:bgRef>
+      <p:bgPr>
+        <a:solidFill>
+          <a:srgbClr val="FFFFFF"/>
+        </a:solidFill>
+        <a:effectLst/>
+      </p:bgPr>
     </p:bg>
     <p:spTree>
       <p:nvGrpSpPr>
@@ -107,7 +110,7 @@
     </p:bg>
     <p:spTree>
       <p:nvGrpSpPr>
-        <p:cNvPr id="1" name=""/>
+        <p:cNvPr id="1" name="slide"/>
         <p:cNvGrpSpPr/>
         <p:nvPr/>
       </p:nvGrpSpPr>
@@ -121,7 +124,7 @@
       </p:grpSpPr>
       <p:sp>
         <p:nvSpPr>
-          <p:cNvPr id="352" name="r352"/>
+          <p:cNvPr id="2" name="r2"/>
           <p:cNvSpPr>
             <a:spLocks noGrp="1"/>
           </p:cNvSpPr>
@@ -150,7 +153,7 @@
       </p:sp>
       <p:sp>
         <p:nvSpPr>
-          <p:cNvPr id="353" name="r353"/>
+          <p:cNvPr id="3" name="r3"/>
           <p:cNvSpPr>
             <a:spLocks noGrp="1"/>
           </p:cNvSpPr>
@@ -179,7 +182,7 @@
       </p:sp>
       <p:sp>
         <p:nvSpPr>
-          <p:cNvPr id="354" name="r354"/>
+          <p:cNvPr id="4" name="r4"/>
           <p:cNvSpPr>
             <a:spLocks noGrp="1"/>
           </p:cNvSpPr>
@@ -208,14 +211,14 @@
       </p:sp>
       <p:sp>
         <p:nvSpPr>
-          <p:cNvPr id="355" name="t355"/>
+          <p:cNvPr id="5" name="t5"/>
           <p:cNvSpPr txBox="1"/>
           <p:nvPr/>
         </p:nvSpPr>
         <p:spPr>
           <a:xfrm>
             <a:off x="216000" y="251999"/>
-            <a:ext cx="9000000" cy="324000"/>
+            <a:ext cx="9360000" cy="324000"/>
           </a:xfrm>
           <a:prstGeom prst="rect">
             <a:avLst/>
@@ -235,7 +238,7 @@
                 <a:solidFill>
                   <a:srgbClr val="22E6FF"/>
                 </a:solidFill>
-                <a:latin typeface="+mj-lt"/>
+                <a:latin typeface="Calibri"/>
               </a:rPr>
               <a:t>RAQAMLI SOG'LIQNI SAQLASH  ·  DIGITAL HEALTH  ·  2026</a:t>
             </a:r>
@@ -244,7 +247,7 @@
       </p:sp>
       <p:sp>
         <p:nvSpPr>
-          <p:cNvPr id="356" name="t356"/>
+          <p:cNvPr id="6" name="t6"/>
           <p:cNvSpPr txBox="1"/>
           <p:nvPr/>
         </p:nvSpPr>
@@ -267,11 +270,11 @@
           <a:p>
             <a:pPr algn="l" indent="0" marL="0"/>
             <a:r>
-              <a:rPr lang="uz-UZ" sz="2600" b="1" dirty="0" smtClean="0">
+              <a:rPr lang="uz-UZ" sz="2500" b="1" dirty="0" smtClean="0">
                 <a:solidFill>
                   <a:srgbClr val="FFFFFF"/>
                 </a:solidFill>
-                <a:latin typeface="+mj-lt"/>
+                <a:latin typeface="Calibri"/>
               </a:rPr>
               <a:t>VR/AR, sun'iy intellekt (AI) va</a:t>
             </a:r>
@@ -279,11 +282,11 @@
           <a:p>
             <a:pPr algn="l" indent="0" marL="0"/>
             <a:r>
-              <a:rPr lang="uz-UZ" sz="2600" b="1" dirty="0" smtClean="0">
+              <a:rPr lang="uz-UZ" sz="2500" b="1" dirty="0" smtClean="0">
                 <a:solidFill>
                   <a:srgbClr val="FFFFFF"/>
                 </a:solidFill>
-                <a:latin typeface="+mj-lt"/>
+                <a:latin typeface="Calibri"/>
               </a:rPr>
               <a:t>telemeditsina-telereabilitatsiya</a:t>
             </a:r>
@@ -291,11 +294,11 @@
           <a:p>
             <a:pPr algn="l" indent="0" marL="0"/>
             <a:r>
-              <a:rPr lang="uz-UZ" sz="2600" b="1" dirty="0" smtClean="0">
+              <a:rPr lang="uz-UZ" sz="2500" b="1" dirty="0" smtClean="0">
                 <a:solidFill>
                   <a:srgbClr val="22E6FF"/>
                 </a:solidFill>
-                <a:latin typeface="+mj-lt"/>
+                <a:latin typeface="Calibri"/>
               </a:rPr>
               <a:t>texnologiyalarini klinik amaliyotga</a:t>
             </a:r>
@@ -303,11 +306,11 @@
           <a:p>
             <a:pPr algn="l" indent="0" marL="0"/>
             <a:r>
-              <a:rPr lang="uz-UZ" sz="2600" b="1" dirty="0" smtClean="0">
+              <a:rPr lang="uz-UZ" sz="2500" b="1" dirty="0" smtClean="0">
                 <a:solidFill>
                   <a:srgbClr val="22E6FF"/>
                 </a:solidFill>
-                <a:latin typeface="+mj-lt"/>
+                <a:latin typeface="Calibri"/>
               </a:rPr>
               <a:t>joriy etish</a:t>
             </a:r>
@@ -316,7 +319,7 @@
       </p:sp>
       <p:sp>
         <p:nvSpPr>
-          <p:cNvPr id="357" name="t357"/>
+          <p:cNvPr id="7" name="t7"/>
           <p:cNvSpPr txBox="1"/>
           <p:nvPr/>
         </p:nvSpPr>
@@ -343,9 +346,9 @@
                 <a:solidFill>
                   <a:srgbClr val="9AA6D6"/>
                 </a:solidFill>
-                <a:latin typeface="+mj-lt"/>
-              </a:rPr>
-              <a:t>Zamonaviy raqamli texnologiyalar tashxis, davolash va reabilitatsiyani</a:t>
+                <a:latin typeface="Calibri"/>
+              </a:rPr>
+              <a:t>Zamonaviy raqamli texnologiyalar tashxis, davolash va</a:t>
             </a:r>
           </a:p>
           <a:p>
@@ -355,16 +358,16 @@
                 <a:solidFill>
                   <a:srgbClr val="9AA6D6"/>
                 </a:solidFill>
-                <a:latin typeface="+mj-lt"/>
-              </a:rPr>
-              <a:t>qanday o'zgartirmoqda — imkoniyatlar, misollar va istiqbollar.</a:t>
-            </a:r>
-          </a:p>
-        </p:txBody>
-      </p:sp>
-      <p:sp>
-        <p:nvSpPr>
-          <p:cNvPr id="358" name="t358"/>
+                <a:latin typeface="Calibri"/>
+              </a:rPr>
+              <a:t>reabilitatsiyani qanday o'zgartirmoqda — imkoniyatlar va istiqbollar.</a:t>
+            </a:r>
+          </a:p>
+        </p:txBody>
+      </p:sp>
+      <p:sp>
+        <p:nvSpPr>
+          <p:cNvPr id="8" name="t8"/>
           <p:cNvSpPr txBox="1"/>
           <p:nvPr/>
         </p:nvSpPr>
@@ -391,7 +394,7 @@
                 <a:solidFill>
                   <a:srgbClr val="9AA6D6"/>
                 </a:solidFill>
-                <a:latin typeface="+mj-lt"/>
+                <a:latin typeface="Calibri"/>
               </a:rPr>
               <a:t>MedTech  ·  2026  ·  15 slayd</a:t>
             </a:r>
@@ -419,7 +422,7 @@
     </p:bg>
     <p:spTree>
       <p:nvGrpSpPr>
-        <p:cNvPr id="1" name=""/>
+        <p:cNvPr id="1" name="slide"/>
         <p:cNvGrpSpPr/>
         <p:nvPr/>
       </p:nvGrpSpPr>
@@ -433,7 +436,7 @@
       </p:grpSpPr>
       <p:sp>
         <p:nvSpPr>
-          <p:cNvPr id="520" name="r520"/>
+          <p:cNvPr id="2" name="r2"/>
           <p:cNvSpPr>
             <a:spLocks noGrp="1"/>
           </p:cNvSpPr>
@@ -462,7 +465,7 @@
       </p:sp>
       <p:sp>
         <p:nvSpPr>
-          <p:cNvPr id="521" name="t521"/>
+          <p:cNvPr id="3" name="t3"/>
           <p:cNvSpPr txBox="1"/>
           <p:nvPr/>
         </p:nvSpPr>
@@ -489,7 +492,7 @@
                 <a:solidFill>
                   <a:srgbClr val="FFFFFF"/>
                 </a:solidFill>
-                <a:latin typeface="+mj-lt"/>
+                <a:latin typeface="Calibri"/>
               </a:rPr>
               <a:t>08 · TEXNOLOGIYALAR INTEGRATSIYASI</a:t>
             </a:r>
@@ -498,7 +501,7 @@
       </p:sp>
       <p:sp>
         <p:nvSpPr>
-          <p:cNvPr id="522" name="r522"/>
+          <p:cNvPr id="4" name="r4"/>
           <p:cNvSpPr>
             <a:spLocks noGrp="1"/>
           </p:cNvSpPr>
@@ -507,7 +510,7 @@
         <p:spPr>
           <a:xfrm>
             <a:off x="180000" y="720000"/>
-            <a:ext cx="2520000" cy="468000"/>
+            <a:ext cx="2520000" cy="475200"/>
           </a:xfrm>
           <a:prstGeom prst="rect">
             <a:avLst/>
@@ -527,14 +530,14 @@
       </p:sp>
       <p:sp>
         <p:nvSpPr>
-          <p:cNvPr id="523" name="t523"/>
-          <p:cNvSpPr txBox="1"/>
-          <p:nvPr/>
-        </p:nvSpPr>
-        <p:spPr>
-          <a:xfrm>
-            <a:off x="288000" y="810000"/>
-            <a:ext cx="2340000" cy="288000"/>
+          <p:cNvPr id="5" name="t5"/>
+          <p:cNvSpPr txBox="1"/>
+          <p:nvPr/>
+        </p:nvSpPr>
+        <p:spPr>
+          <a:xfrm>
+            <a:off x="251999" y="810000"/>
+            <a:ext cx="2340000" cy="306000"/>
           </a:xfrm>
           <a:prstGeom prst="rect">
             <a:avLst/>
@@ -554,7 +557,7 @@
                 <a:solidFill>
                   <a:srgbClr val="22E6FF"/>
                 </a:solidFill>
-                <a:latin typeface="+mj-lt"/>
+                <a:latin typeface="Calibri"/>
               </a:rPr>
               <a:t>Tashxis</a:t>
             </a:r>
@@ -563,7 +566,7 @@
       </p:sp>
       <p:sp>
         <p:nvSpPr>
-          <p:cNvPr id="524" name="r524"/>
+          <p:cNvPr id="6" name="r6"/>
           <p:cNvSpPr>
             <a:spLocks noGrp="1"/>
           </p:cNvSpPr>
@@ -592,7 +595,7 @@
       </p:sp>
       <p:sp>
         <p:nvSpPr>
-          <p:cNvPr id="525" name="r525"/>
+          <p:cNvPr id="7" name="r7"/>
           <p:cNvSpPr>
             <a:spLocks noGrp="1"/>
           </p:cNvSpPr>
@@ -601,7 +604,7 @@
         <p:spPr>
           <a:xfrm>
             <a:off x="3960000" y="720000"/>
-            <a:ext cx="3240000" cy="468000"/>
+            <a:ext cx="3240000" cy="475200"/>
           </a:xfrm>
           <a:prstGeom prst="rect">
             <a:avLst/>
@@ -621,14 +624,14 @@
       </p:sp>
       <p:sp>
         <p:nvSpPr>
-          <p:cNvPr id="526" name="t526"/>
+          <p:cNvPr id="8" name="t8"/>
           <p:cNvSpPr txBox="1"/>
           <p:nvPr/>
         </p:nvSpPr>
         <p:spPr>
           <a:xfrm>
             <a:off x="4031999" y="810000"/>
-            <a:ext cx="3060000" cy="288000"/>
+            <a:ext cx="3060000" cy="306000"/>
           </a:xfrm>
           <a:prstGeom prst="rect">
             <a:avLst/>
@@ -648,7 +651,7 @@
                 <a:solidFill>
                   <a:srgbClr val="FF52D9"/>
                 </a:solidFill>
-                <a:latin typeface="+mj-lt"/>
+                <a:latin typeface="Calibri"/>
               </a:rPr>
               <a:t>AI + Telemeditsina</a:t>
             </a:r>
@@ -657,14 +660,14 @@
       </p:sp>
       <p:sp>
         <p:nvSpPr>
-          <p:cNvPr id="527" name="t527"/>
+          <p:cNvPr id="9" name="t9"/>
           <p:cNvSpPr txBox="1"/>
           <p:nvPr/>
         </p:nvSpPr>
         <p:spPr>
           <a:xfrm>
             <a:off x="7560000" y="756000"/>
-            <a:ext cx="4428000" cy="396000"/>
+            <a:ext cx="4392000" cy="403200"/>
           </a:xfrm>
           <a:prstGeom prst="rect">
             <a:avLst/>
@@ -684,7 +687,7 @@
                 <a:solidFill>
                   <a:srgbClr val="9AA6D6"/>
                 </a:solidFill>
-                <a:latin typeface="+mj-lt"/>
+                <a:latin typeface="Calibri"/>
               </a:rPr>
               <a:t>Masofadan yig'ilgan ma'lumotni AI tahlil qiladi, shifokor tasdiqlaydi.</a:t>
             </a:r>
@@ -693,16 +696,16 @@
       </p:sp>
       <p:sp>
         <p:nvSpPr>
-          <p:cNvPr id="528" name="r528"/>
-          <p:cNvSpPr>
-            <a:spLocks noGrp="1"/>
-          </p:cNvSpPr>
-          <p:nvPr/>
-        </p:nvSpPr>
-        <p:spPr>
-          <a:xfrm>
-            <a:off x="180000" y="1332000"/>
-            <a:ext cx="2520000" cy="468000"/>
+          <p:cNvPr id="10" name="r10"/>
+          <p:cNvSpPr>
+            <a:spLocks noGrp="1"/>
+          </p:cNvSpPr>
+          <p:nvPr/>
+        </p:nvSpPr>
+        <p:spPr>
+          <a:xfrm>
+            <a:off x="180000" y="1339200"/>
+            <a:ext cx="2520000" cy="475200"/>
           </a:xfrm>
           <a:prstGeom prst="rect">
             <a:avLst/>
@@ -722,14 +725,14 @@
       </p:sp>
       <p:sp>
         <p:nvSpPr>
-          <p:cNvPr id="529" name="t529"/>
-          <p:cNvSpPr txBox="1"/>
-          <p:nvPr/>
-        </p:nvSpPr>
-        <p:spPr>
-          <a:xfrm>
-            <a:off x="288000" y="1422000"/>
-            <a:ext cx="2340000" cy="288000"/>
+          <p:cNvPr id="11" name="t11"/>
+          <p:cNvSpPr txBox="1"/>
+          <p:nvPr/>
+        </p:nvSpPr>
+        <p:spPr>
+          <a:xfrm>
+            <a:off x="251999" y="1429200"/>
+            <a:ext cx="2340000" cy="306000"/>
           </a:xfrm>
           <a:prstGeom prst="rect">
             <a:avLst/>
@@ -749,7 +752,7 @@
                 <a:solidFill>
                   <a:srgbClr val="22E6FF"/>
                 </a:solidFill>
-                <a:latin typeface="+mj-lt"/>
+                <a:latin typeface="Calibri"/>
               </a:rPr>
               <a:t>Reja</a:t>
             </a:r>
@@ -758,15 +761,15 @@
       </p:sp>
       <p:sp>
         <p:nvSpPr>
-          <p:cNvPr id="530" name="r530"/>
-          <p:cNvSpPr>
-            <a:spLocks noGrp="1"/>
-          </p:cNvSpPr>
-          <p:nvPr/>
-        </p:nvSpPr>
-        <p:spPr>
-          <a:xfrm>
-            <a:off x="3060000" y="1548000"/>
+          <p:cNvPr id="12" name="r12"/>
+          <p:cNvSpPr>
+            <a:spLocks noGrp="1"/>
+          </p:cNvSpPr>
+          <p:nvPr/>
+        </p:nvSpPr>
+        <p:spPr>
+          <a:xfrm>
+            <a:off x="3060000" y="1555200"/>
             <a:ext cx="720000" cy="36000"/>
           </a:xfrm>
           <a:prstGeom prst="rect">
@@ -787,16 +790,16 @@
       </p:sp>
       <p:sp>
         <p:nvSpPr>
-          <p:cNvPr id="531" name="r531"/>
-          <p:cNvSpPr>
-            <a:spLocks noGrp="1"/>
-          </p:cNvSpPr>
-          <p:nvPr/>
-        </p:nvSpPr>
-        <p:spPr>
-          <a:xfrm>
-            <a:off x="3960000" y="1332000"/>
-            <a:ext cx="3240000" cy="468000"/>
+          <p:cNvPr id="13" name="r13"/>
+          <p:cNvSpPr>
+            <a:spLocks noGrp="1"/>
+          </p:cNvSpPr>
+          <p:nvPr/>
+        </p:nvSpPr>
+        <p:spPr>
+          <a:xfrm>
+            <a:off x="3960000" y="1339200"/>
+            <a:ext cx="3240000" cy="475200"/>
           </a:xfrm>
           <a:prstGeom prst="rect">
             <a:avLst/>
@@ -816,14 +819,14 @@
       </p:sp>
       <p:sp>
         <p:nvSpPr>
-          <p:cNvPr id="532" name="t532"/>
-          <p:cNvSpPr txBox="1"/>
-          <p:nvPr/>
-        </p:nvSpPr>
-        <p:spPr>
-          <a:xfrm>
-            <a:off x="4031999" y="1422000"/>
-            <a:ext cx="3060000" cy="288000"/>
+          <p:cNvPr id="14" name="t14"/>
+          <p:cNvSpPr txBox="1"/>
+          <p:nvPr/>
+        </p:nvSpPr>
+        <p:spPr>
+          <a:xfrm>
+            <a:off x="4031999" y="1429200"/>
+            <a:ext cx="3060000" cy="306000"/>
           </a:xfrm>
           <a:prstGeom prst="rect">
             <a:avLst/>
@@ -843,7 +846,7 @@
                 <a:solidFill>
                   <a:srgbClr val="FF52D9"/>
                 </a:solidFill>
-                <a:latin typeface="+mj-lt"/>
+                <a:latin typeface="Calibri"/>
               </a:rPr>
               <a:t>AI + VR/AR</a:t>
             </a:r>
@@ -852,14 +855,14 @@
       </p:sp>
       <p:sp>
         <p:nvSpPr>
-          <p:cNvPr id="533" name="t533"/>
-          <p:cNvSpPr txBox="1"/>
-          <p:nvPr/>
-        </p:nvSpPr>
-        <p:spPr>
-          <a:xfrm>
-            <a:off x="7560000" y="1368000"/>
-            <a:ext cx="4428000" cy="396000"/>
+          <p:cNvPr id="15" name="t15"/>
+          <p:cNvSpPr txBox="1"/>
+          <p:nvPr/>
+        </p:nvSpPr>
+        <p:spPr>
+          <a:xfrm>
+            <a:off x="7560000" y="1375200"/>
+            <a:ext cx="4392000" cy="403200"/>
           </a:xfrm>
           <a:prstGeom prst="rect">
             <a:avLst/>
@@ -879,7 +882,7 @@
                 <a:solidFill>
                   <a:srgbClr val="9AA6D6"/>
                 </a:solidFill>
-                <a:latin typeface="+mj-lt"/>
+                <a:latin typeface="Calibri"/>
               </a:rPr>
               <a:t>Shaxsiylashtirilgan davo rejasi va 3D operatsiya simulyatsiyasi.</a:t>
             </a:r>
@@ -888,16 +891,16 @@
       </p:sp>
       <p:sp>
         <p:nvSpPr>
-          <p:cNvPr id="534" name="r534"/>
-          <p:cNvSpPr>
-            <a:spLocks noGrp="1"/>
-          </p:cNvSpPr>
-          <p:nvPr/>
-        </p:nvSpPr>
-        <p:spPr>
-          <a:xfrm>
-            <a:off x="180000" y="1944000"/>
-            <a:ext cx="2520000" cy="468000"/>
+          <p:cNvPr id="16" name="r16"/>
+          <p:cNvSpPr>
+            <a:spLocks noGrp="1"/>
+          </p:cNvSpPr>
+          <p:nvPr/>
+        </p:nvSpPr>
+        <p:spPr>
+          <a:xfrm>
+            <a:off x="180000" y="1958400"/>
+            <a:ext cx="2520000" cy="475200"/>
           </a:xfrm>
           <a:prstGeom prst="rect">
             <a:avLst/>
@@ -917,14 +920,14 @@
       </p:sp>
       <p:sp>
         <p:nvSpPr>
-          <p:cNvPr id="535" name="t535"/>
-          <p:cNvSpPr txBox="1"/>
-          <p:nvPr/>
-        </p:nvSpPr>
-        <p:spPr>
-          <a:xfrm>
-            <a:off x="288000" y="2034000"/>
-            <a:ext cx="2340000" cy="288000"/>
+          <p:cNvPr id="17" name="t17"/>
+          <p:cNvSpPr txBox="1"/>
+          <p:nvPr/>
+        </p:nvSpPr>
+        <p:spPr>
+          <a:xfrm>
+            <a:off x="251999" y="2048400"/>
+            <a:ext cx="2340000" cy="306000"/>
           </a:xfrm>
           <a:prstGeom prst="rect">
             <a:avLst/>
@@ -944,7 +947,7 @@
                 <a:solidFill>
                   <a:srgbClr val="22E6FF"/>
                 </a:solidFill>
-                <a:latin typeface="+mj-lt"/>
+                <a:latin typeface="Calibri"/>
               </a:rPr>
               <a:t>Davolash</a:t>
             </a:r>
@@ -953,15 +956,15 @@
       </p:sp>
       <p:sp>
         <p:nvSpPr>
-          <p:cNvPr id="536" name="r536"/>
-          <p:cNvSpPr>
-            <a:spLocks noGrp="1"/>
-          </p:cNvSpPr>
-          <p:nvPr/>
-        </p:nvSpPr>
-        <p:spPr>
-          <a:xfrm>
-            <a:off x="3060000" y="2160000"/>
+          <p:cNvPr id="18" name="r18"/>
+          <p:cNvSpPr>
+            <a:spLocks noGrp="1"/>
+          </p:cNvSpPr>
+          <p:nvPr/>
+        </p:nvSpPr>
+        <p:spPr>
+          <a:xfrm>
+            <a:off x="3060000" y="2174400"/>
             <a:ext cx="720000" cy="36000"/>
           </a:xfrm>
           <a:prstGeom prst="rect">
@@ -982,16 +985,16 @@
       </p:sp>
       <p:sp>
         <p:nvSpPr>
-          <p:cNvPr id="537" name="r537"/>
-          <p:cNvSpPr>
-            <a:spLocks noGrp="1"/>
-          </p:cNvSpPr>
-          <p:nvPr/>
-        </p:nvSpPr>
-        <p:spPr>
-          <a:xfrm>
-            <a:off x="3960000" y="1944000"/>
-            <a:ext cx="3240000" cy="468000"/>
+          <p:cNvPr id="19" name="r19"/>
+          <p:cNvSpPr>
+            <a:spLocks noGrp="1"/>
+          </p:cNvSpPr>
+          <p:nvPr/>
+        </p:nvSpPr>
+        <p:spPr>
+          <a:xfrm>
+            <a:off x="3960000" y="1958400"/>
+            <a:ext cx="3240000" cy="475200"/>
           </a:xfrm>
           <a:prstGeom prst="rect">
             <a:avLst/>
@@ -1011,14 +1014,14 @@
       </p:sp>
       <p:sp>
         <p:nvSpPr>
-          <p:cNvPr id="538" name="t538"/>
-          <p:cNvSpPr txBox="1"/>
-          <p:nvPr/>
-        </p:nvSpPr>
-        <p:spPr>
-          <a:xfrm>
-            <a:off x="4031999" y="2034000"/>
-            <a:ext cx="3060000" cy="288000"/>
+          <p:cNvPr id="20" name="t20"/>
+          <p:cNvSpPr txBox="1"/>
+          <p:nvPr/>
+        </p:nvSpPr>
+        <p:spPr>
+          <a:xfrm>
+            <a:off x="4031999" y="2048400"/>
+            <a:ext cx="3060000" cy="306000"/>
           </a:xfrm>
           <a:prstGeom prst="rect">
             <a:avLst/>
@@ -1038,7 +1041,7 @@
                 <a:solidFill>
                   <a:srgbClr val="FF52D9"/>
                 </a:solidFill>
-                <a:latin typeface="+mj-lt"/>
+                <a:latin typeface="Calibri"/>
               </a:rPr>
               <a:t>AR navigatsiya</a:t>
             </a:r>
@@ -1047,14 +1050,14 @@
       </p:sp>
       <p:sp>
         <p:nvSpPr>
-          <p:cNvPr id="539" name="t539"/>
-          <p:cNvSpPr txBox="1"/>
-          <p:nvPr/>
-        </p:nvSpPr>
-        <p:spPr>
-          <a:xfrm>
-            <a:off x="7560000" y="1980000"/>
-            <a:ext cx="4428000" cy="396000"/>
+          <p:cNvPr id="21" name="t21"/>
+          <p:cNvSpPr txBox="1"/>
+          <p:nvPr/>
+        </p:nvSpPr>
+        <p:spPr>
+          <a:xfrm>
+            <a:off x="7560000" y="1994400"/>
+            <a:ext cx="4392000" cy="403200"/>
           </a:xfrm>
           <a:prstGeom prst="rect">
             <a:avLst/>
@@ -1074,7 +1077,7 @@
                 <a:solidFill>
                   <a:srgbClr val="9AA6D6"/>
                 </a:solidFill>
-                <a:latin typeface="+mj-lt"/>
+                <a:latin typeface="Calibri"/>
               </a:rPr>
               <a:t>Operatsiya va protseduralarda real vaqt yo'riqnoma.</a:t>
             </a:r>
@@ -1083,16 +1086,16 @@
       </p:sp>
       <p:sp>
         <p:nvSpPr>
-          <p:cNvPr id="540" name="r540"/>
-          <p:cNvSpPr>
-            <a:spLocks noGrp="1"/>
-          </p:cNvSpPr>
-          <p:nvPr/>
-        </p:nvSpPr>
-        <p:spPr>
-          <a:xfrm>
-            <a:off x="180000" y="2556000"/>
-            <a:ext cx="2520000" cy="468000"/>
+          <p:cNvPr id="22" name="r22"/>
+          <p:cNvSpPr>
+            <a:spLocks noGrp="1"/>
+          </p:cNvSpPr>
+          <p:nvPr/>
+        </p:nvSpPr>
+        <p:spPr>
+          <a:xfrm>
+            <a:off x="180000" y="2577600"/>
+            <a:ext cx="2520000" cy="475200"/>
           </a:xfrm>
           <a:prstGeom prst="rect">
             <a:avLst/>
@@ -1112,14 +1115,14 @@
       </p:sp>
       <p:sp>
         <p:nvSpPr>
-          <p:cNvPr id="541" name="t541"/>
-          <p:cNvSpPr txBox="1"/>
-          <p:nvPr/>
-        </p:nvSpPr>
-        <p:spPr>
-          <a:xfrm>
-            <a:off x="288000" y="2646000"/>
-            <a:ext cx="2340000" cy="288000"/>
+          <p:cNvPr id="23" name="t23"/>
+          <p:cNvSpPr txBox="1"/>
+          <p:nvPr/>
+        </p:nvSpPr>
+        <p:spPr>
+          <a:xfrm>
+            <a:off x="251999" y="2667600"/>
+            <a:ext cx="2340000" cy="306000"/>
           </a:xfrm>
           <a:prstGeom prst="rect">
             <a:avLst/>
@@ -1139,7 +1142,7 @@
                 <a:solidFill>
                   <a:srgbClr val="22E6FF"/>
                 </a:solidFill>
-                <a:latin typeface="+mj-lt"/>
+                <a:latin typeface="Calibri"/>
               </a:rPr>
               <a:t>Tiklanish</a:t>
             </a:r>
@@ -1148,15 +1151,15 @@
       </p:sp>
       <p:sp>
         <p:nvSpPr>
-          <p:cNvPr id="542" name="r542"/>
-          <p:cNvSpPr>
-            <a:spLocks noGrp="1"/>
-          </p:cNvSpPr>
-          <p:nvPr/>
-        </p:nvSpPr>
-        <p:spPr>
-          <a:xfrm>
-            <a:off x="3060000" y="2772000"/>
+          <p:cNvPr id="24" name="r24"/>
+          <p:cNvSpPr>
+            <a:spLocks noGrp="1"/>
+          </p:cNvSpPr>
+          <p:nvPr/>
+        </p:nvSpPr>
+        <p:spPr>
+          <a:xfrm>
+            <a:off x="3060000" y="2793600"/>
             <a:ext cx="720000" cy="36000"/>
           </a:xfrm>
           <a:prstGeom prst="rect">
@@ -1177,16 +1180,16 @@
       </p:sp>
       <p:sp>
         <p:nvSpPr>
-          <p:cNvPr id="543" name="r543"/>
-          <p:cNvSpPr>
-            <a:spLocks noGrp="1"/>
-          </p:cNvSpPr>
-          <p:nvPr/>
-        </p:nvSpPr>
-        <p:spPr>
-          <a:xfrm>
-            <a:off x="3960000" y="2556000"/>
-            <a:ext cx="3240000" cy="468000"/>
+          <p:cNvPr id="25" name="r25"/>
+          <p:cNvSpPr>
+            <a:spLocks noGrp="1"/>
+          </p:cNvSpPr>
+          <p:nvPr/>
+        </p:nvSpPr>
+        <p:spPr>
+          <a:xfrm>
+            <a:off x="3960000" y="2577600"/>
+            <a:ext cx="3240000" cy="475200"/>
           </a:xfrm>
           <a:prstGeom prst="rect">
             <a:avLst/>
@@ -1206,14 +1209,14 @@
       </p:sp>
       <p:sp>
         <p:nvSpPr>
-          <p:cNvPr id="544" name="t544"/>
-          <p:cNvSpPr txBox="1"/>
-          <p:nvPr/>
-        </p:nvSpPr>
-        <p:spPr>
-          <a:xfrm>
-            <a:off x="4031999" y="2646000"/>
-            <a:ext cx="3060000" cy="288000"/>
+          <p:cNvPr id="26" name="t26"/>
+          <p:cNvSpPr txBox="1"/>
+          <p:nvPr/>
+        </p:nvSpPr>
+        <p:spPr>
+          <a:xfrm>
+            <a:off x="4031999" y="2667600"/>
+            <a:ext cx="3060000" cy="306000"/>
           </a:xfrm>
           <a:prstGeom prst="rect">
             <a:avLst/>
@@ -1233,7 +1236,7 @@
                 <a:solidFill>
                   <a:srgbClr val="FF52D9"/>
                 </a:solidFill>
-                <a:latin typeface="+mj-lt"/>
+                <a:latin typeface="Calibri"/>
               </a:rPr>
               <a:t>Telereabilitatsiya</a:t>
             </a:r>
@@ -1242,14 +1245,14 @@
       </p:sp>
       <p:sp>
         <p:nvSpPr>
-          <p:cNvPr id="545" name="t545"/>
-          <p:cNvSpPr txBox="1"/>
-          <p:nvPr/>
-        </p:nvSpPr>
-        <p:spPr>
-          <a:xfrm>
-            <a:off x="7560000" y="2592000"/>
-            <a:ext cx="4428000" cy="396000"/>
+          <p:cNvPr id="27" name="t27"/>
+          <p:cNvSpPr txBox="1"/>
+          <p:nvPr/>
+        </p:nvSpPr>
+        <p:spPr>
+          <a:xfrm>
+            <a:off x="7560000" y="2613600"/>
+            <a:ext cx="4392000" cy="403200"/>
           </a:xfrm>
           <a:prstGeom prst="rect">
             <a:avLst/>
@@ -1269,7 +1272,7 @@
                 <a:solidFill>
                   <a:srgbClr val="9AA6D6"/>
                 </a:solidFill>
-                <a:latin typeface="+mj-lt"/>
+                <a:latin typeface="Calibri"/>
               </a:rPr>
               <a:t>Uyda VR-mashqlar, sensorlar va masofaviy nazorat.</a:t>
             </a:r>
@@ -1297,7 +1300,7 @@
     </p:bg>
     <p:spTree>
       <p:nvGrpSpPr>
-        <p:cNvPr id="1" name=""/>
+        <p:cNvPr id="1" name="slide"/>
         <p:cNvGrpSpPr/>
         <p:nvPr/>
       </p:nvGrpSpPr>
@@ -1311,7 +1314,7 @@
       </p:grpSpPr>
       <p:sp>
         <p:nvSpPr>
-          <p:cNvPr id="546" name="r546"/>
+          <p:cNvPr id="2" name="r2"/>
           <p:cNvSpPr>
             <a:spLocks noGrp="1"/>
           </p:cNvSpPr>
@@ -1340,7 +1343,7 @@
       </p:sp>
       <p:sp>
         <p:nvSpPr>
-          <p:cNvPr id="547" name="t547"/>
+          <p:cNvPr id="3" name="t3"/>
           <p:cNvSpPr txBox="1"/>
           <p:nvPr/>
         </p:nvSpPr>
@@ -1367,7 +1370,7 @@
                 <a:solidFill>
                   <a:srgbClr val="FFFFFF"/>
                 </a:solidFill>
-                <a:latin typeface="+mj-lt"/>
+                <a:latin typeface="Calibri"/>
               </a:rPr>
               <a:t>09 · ASOSIY AFZALLIKLAR</a:t>
             </a:r>
@@ -1376,7 +1379,7 @@
       </p:sp>
       <p:sp>
         <p:nvSpPr>
-          <p:cNvPr id="548" name="r548"/>
+          <p:cNvPr id="4" name="r4"/>
           <p:cNvSpPr>
             <a:spLocks noGrp="1"/>
           </p:cNvSpPr>
@@ -1405,7 +1408,7 @@
       </p:sp>
       <p:sp>
         <p:nvSpPr>
-          <p:cNvPr id="549" name="r549"/>
+          <p:cNvPr id="5" name="r5"/>
           <p:cNvSpPr>
             <a:spLocks noGrp="1"/>
           </p:cNvSpPr>
@@ -1434,7 +1437,7 @@
       </p:sp>
       <p:sp>
         <p:nvSpPr>
-          <p:cNvPr id="550" name="t550"/>
+          <p:cNvPr id="6" name="t6"/>
           <p:cNvSpPr txBox="1"/>
           <p:nvPr/>
         </p:nvSpPr>
@@ -1461,7 +1464,7 @@
                 <a:solidFill>
                   <a:srgbClr val="FFFFFF"/>
                 </a:solidFill>
-                <a:latin typeface="+mj-lt"/>
+                <a:latin typeface="Calibri"/>
               </a:rPr>
               <a:t>Aniqlik</a:t>
             </a:r>
@@ -1470,14 +1473,14 @@
       </p:sp>
       <p:sp>
         <p:nvSpPr>
-          <p:cNvPr id="551" name="t551"/>
-          <p:cNvSpPr txBox="1"/>
-          <p:nvPr/>
-        </p:nvSpPr>
-        <p:spPr>
-          <a:xfrm>
-            <a:off x="288000" y="1188000"/>
-            <a:ext cx="2628000" cy="558000"/>
+          <p:cNvPr id="7" name="t7"/>
+          <p:cNvSpPr txBox="1"/>
+          <p:nvPr/>
+        </p:nvSpPr>
+        <p:spPr>
+          <a:xfrm>
+            <a:off x="288000" y="1206000"/>
+            <a:ext cx="2628000" cy="540000"/>
           </a:xfrm>
           <a:prstGeom prst="rect">
             <a:avLst/>
@@ -1497,7 +1500,7 @@
                 <a:solidFill>
                   <a:srgbClr val="9AA6D6"/>
                 </a:solidFill>
-                <a:latin typeface="+mj-lt"/>
+                <a:latin typeface="Calibri"/>
               </a:rPr>
               <a:t>Tashxis va davo aniqligi oshadi.</a:t>
             </a:r>
@@ -1506,7 +1509,7 @@
       </p:sp>
       <p:sp>
         <p:nvSpPr>
-          <p:cNvPr id="552" name="r552"/>
+          <p:cNvPr id="8" name="r8"/>
           <p:cNvSpPr>
             <a:spLocks noGrp="1"/>
           </p:cNvSpPr>
@@ -1535,7 +1538,7 @@
       </p:sp>
       <p:sp>
         <p:nvSpPr>
-          <p:cNvPr id="553" name="r553"/>
+          <p:cNvPr id="9" name="r9"/>
           <p:cNvSpPr>
             <a:spLocks noGrp="1"/>
           </p:cNvSpPr>
@@ -1564,7 +1567,7 @@
       </p:sp>
       <p:sp>
         <p:nvSpPr>
-          <p:cNvPr id="554" name="t554"/>
+          <p:cNvPr id="10" name="t10"/>
           <p:cNvSpPr txBox="1"/>
           <p:nvPr/>
         </p:nvSpPr>
@@ -1591,7 +1594,7 @@
                 <a:solidFill>
                   <a:srgbClr val="FFFFFF"/>
                 </a:solidFill>
-                <a:latin typeface="+mj-lt"/>
+                <a:latin typeface="Calibri"/>
               </a:rPr>
               <a:t>Tezlik</a:t>
             </a:r>
@@ -1600,14 +1603,14 @@
       </p:sp>
       <p:sp>
         <p:nvSpPr>
-          <p:cNvPr id="555" name="t555"/>
-          <p:cNvSpPr txBox="1"/>
-          <p:nvPr/>
-        </p:nvSpPr>
-        <p:spPr>
-          <a:xfrm>
-            <a:off x="3312000" y="1188000"/>
-            <a:ext cx="2628000" cy="558000"/>
+          <p:cNvPr id="11" name="t11"/>
+          <p:cNvSpPr txBox="1"/>
+          <p:nvPr/>
+        </p:nvSpPr>
+        <p:spPr>
+          <a:xfrm>
+            <a:off x="3312000" y="1206000"/>
+            <a:ext cx="2628000" cy="540000"/>
           </a:xfrm>
           <a:prstGeom prst="rect">
             <a:avLst/>
@@ -1627,7 +1630,7 @@
                 <a:solidFill>
                   <a:srgbClr val="9AA6D6"/>
                 </a:solidFill>
-                <a:latin typeface="+mj-lt"/>
+                <a:latin typeface="Calibri"/>
               </a:rPr>
               <a:t>Qaror va xizmat tezlashadi.</a:t>
             </a:r>
@@ -1636,7 +1639,7 @@
       </p:sp>
       <p:sp>
         <p:nvSpPr>
-          <p:cNvPr id="556" name="r556"/>
+          <p:cNvPr id="12" name="r12"/>
           <p:cNvSpPr>
             <a:spLocks noGrp="1"/>
           </p:cNvSpPr>
@@ -1665,7 +1668,7 @@
       </p:sp>
       <p:sp>
         <p:nvSpPr>
-          <p:cNvPr id="557" name="r557"/>
+          <p:cNvPr id="13" name="r13"/>
           <p:cNvSpPr>
             <a:spLocks noGrp="1"/>
           </p:cNvSpPr>
@@ -1694,7 +1697,7 @@
       </p:sp>
       <p:sp>
         <p:nvSpPr>
-          <p:cNvPr id="558" name="t558"/>
+          <p:cNvPr id="14" name="t14"/>
           <p:cNvSpPr txBox="1"/>
           <p:nvPr/>
         </p:nvSpPr>
@@ -1721,7 +1724,7 @@
                 <a:solidFill>
                   <a:srgbClr val="FFFFFF"/>
                 </a:solidFill>
-                <a:latin typeface="+mj-lt"/>
+                <a:latin typeface="Calibri"/>
               </a:rPr>
               <a:t>Qulaylik</a:t>
             </a:r>
@@ -1730,14 +1733,14 @@
       </p:sp>
       <p:sp>
         <p:nvSpPr>
-          <p:cNvPr id="559" name="t559"/>
-          <p:cNvSpPr txBox="1"/>
-          <p:nvPr/>
-        </p:nvSpPr>
-        <p:spPr>
-          <a:xfrm>
-            <a:off x="6336000" y="1188000"/>
-            <a:ext cx="2628000" cy="558000"/>
+          <p:cNvPr id="15" name="t15"/>
+          <p:cNvSpPr txBox="1"/>
+          <p:nvPr/>
+        </p:nvSpPr>
+        <p:spPr>
+          <a:xfrm>
+            <a:off x="6336000" y="1206000"/>
+            <a:ext cx="2628000" cy="540000"/>
           </a:xfrm>
           <a:prstGeom prst="rect">
             <a:avLst/>
@@ -1757,7 +1760,7 @@
                 <a:solidFill>
                   <a:srgbClr val="9AA6D6"/>
                 </a:solidFill>
-                <a:latin typeface="+mj-lt"/>
+                <a:latin typeface="Calibri"/>
               </a:rPr>
               <a:t>Masofa to'siqlari yo'qoladi.</a:t>
             </a:r>
@@ -1766,7 +1769,7 @@
       </p:sp>
       <p:sp>
         <p:nvSpPr>
-          <p:cNvPr id="560" name="r560"/>
+          <p:cNvPr id="16" name="r16"/>
           <p:cNvSpPr>
             <a:spLocks noGrp="1"/>
           </p:cNvSpPr>
@@ -1795,7 +1798,7 @@
       </p:sp>
       <p:sp>
         <p:nvSpPr>
-          <p:cNvPr id="561" name="r561"/>
+          <p:cNvPr id="17" name="r17"/>
           <p:cNvSpPr>
             <a:spLocks noGrp="1"/>
           </p:cNvSpPr>
@@ -1824,7 +1827,7 @@
       </p:sp>
       <p:sp>
         <p:nvSpPr>
-          <p:cNvPr id="562" name="t562"/>
+          <p:cNvPr id="18" name="t18"/>
           <p:cNvSpPr txBox="1"/>
           <p:nvPr/>
         </p:nvSpPr>
@@ -1851,7 +1854,7 @@
                 <a:solidFill>
                   <a:srgbClr val="FFFFFF"/>
                 </a:solidFill>
-                <a:latin typeface="+mj-lt"/>
+                <a:latin typeface="Calibri"/>
               </a:rPr>
               <a:t>Tejamkorlik</a:t>
             </a:r>
@@ -1860,14 +1863,14 @@
       </p:sp>
       <p:sp>
         <p:nvSpPr>
-          <p:cNvPr id="563" name="t563"/>
-          <p:cNvSpPr txBox="1"/>
-          <p:nvPr/>
-        </p:nvSpPr>
-        <p:spPr>
-          <a:xfrm>
-            <a:off x="9360000" y="1188000"/>
-            <a:ext cx="2628000" cy="558000"/>
+          <p:cNvPr id="19" name="t19"/>
+          <p:cNvSpPr txBox="1"/>
+          <p:nvPr/>
+        </p:nvSpPr>
+        <p:spPr>
+          <a:xfrm>
+            <a:off x="9360000" y="1206000"/>
+            <a:ext cx="2628000" cy="540000"/>
           </a:xfrm>
           <a:prstGeom prst="rect">
             <a:avLst/>
@@ -1887,7 +1890,7 @@
                 <a:solidFill>
                   <a:srgbClr val="9AA6D6"/>
                 </a:solidFill>
-                <a:latin typeface="+mj-lt"/>
+                <a:latin typeface="Calibri"/>
               </a:rPr>
               <a:t>Uzoq muddatda xarajat kamayadi.</a:t>
             </a:r>
@@ -1896,7 +1899,7 @@
       </p:sp>
       <p:sp>
         <p:nvSpPr>
-          <p:cNvPr id="564" name="r564"/>
+          <p:cNvPr id="20" name="r20"/>
           <p:cNvSpPr>
             <a:spLocks noGrp="1"/>
           </p:cNvSpPr>
@@ -1925,7 +1928,7 @@
       </p:sp>
       <p:sp>
         <p:nvSpPr>
-          <p:cNvPr id="565" name="t565"/>
+          <p:cNvPr id="21" name="t21"/>
           <p:cNvSpPr txBox="1"/>
           <p:nvPr/>
         </p:nvSpPr>
@@ -1948,11 +1951,11 @@
           <a:p>
             <a:pPr algn="ctr" indent="0" marL="0"/>
             <a:r>
-              <a:rPr lang="uz-UZ" sz="2200" b="1" dirty="0" smtClean="0">
+              <a:rPr lang="uz-UZ" sz="2000" b="1" dirty="0" smtClean="0">
                 <a:solidFill>
                   <a:srgbClr val="22E6FF"/>
                 </a:solidFill>
-                <a:latin typeface="+mj-lt"/>
+                <a:latin typeface="Calibri"/>
               </a:rPr>
               <a:t>24/7</a:t>
             </a:r>
@@ -1961,7 +1964,7 @@
       </p:sp>
       <p:sp>
         <p:nvSpPr>
-          <p:cNvPr id="566" name="t566"/>
+          <p:cNvPr id="22" name="t22"/>
           <p:cNvSpPr txBox="1"/>
           <p:nvPr/>
         </p:nvSpPr>
@@ -1988,7 +1991,7 @@
                 <a:solidFill>
                   <a:srgbClr val="9AA6D6"/>
                 </a:solidFill>
-                <a:latin typeface="+mj-lt"/>
+                <a:latin typeface="Calibri"/>
               </a:rPr>
               <a:t>Uzluksiz monitoring</a:t>
             </a:r>
@@ -1997,7 +2000,7 @@
       </p:sp>
       <p:sp>
         <p:nvSpPr>
-          <p:cNvPr id="567" name="r567"/>
+          <p:cNvPr id="23" name="r23"/>
           <p:cNvSpPr>
             <a:spLocks noGrp="1"/>
           </p:cNvSpPr>
@@ -2026,7 +2029,7 @@
       </p:sp>
       <p:sp>
         <p:nvSpPr>
-          <p:cNvPr id="568" name="t568"/>
+          <p:cNvPr id="24" name="t24"/>
           <p:cNvSpPr txBox="1"/>
           <p:nvPr/>
         </p:nvSpPr>
@@ -2049,11 +2052,11 @@
           <a:p>
             <a:pPr algn="ctr" indent="0" marL="0"/>
             <a:r>
-              <a:rPr lang="uz-UZ" sz="2200" b="1" dirty="0" smtClean="0">
+              <a:rPr lang="uz-UZ" sz="2000" b="1" dirty="0" smtClean="0">
                 <a:solidFill>
                   <a:srgbClr val="22E6FF"/>
                 </a:solidFill>
-                <a:latin typeface="+mj-lt"/>
+                <a:latin typeface="Calibri"/>
               </a:rPr>
               <a:t>Qamrov</a:t>
             </a:r>
@@ -2062,7 +2065,7 @@
       </p:sp>
       <p:sp>
         <p:nvSpPr>
-          <p:cNvPr id="569" name="t569"/>
+          <p:cNvPr id="25" name="t25"/>
           <p:cNvSpPr txBox="1"/>
           <p:nvPr/>
         </p:nvSpPr>
@@ -2089,7 +2092,7 @@
                 <a:solidFill>
                   <a:srgbClr val="9AA6D6"/>
                 </a:solidFill>
-                <a:latin typeface="+mj-lt"/>
+                <a:latin typeface="Calibri"/>
               </a:rPr>
               <a:t>Olis hududlar</a:t>
             </a:r>
@@ -2098,7 +2101,7 @@
       </p:sp>
       <p:sp>
         <p:nvSpPr>
-          <p:cNvPr id="570" name="r570"/>
+          <p:cNvPr id="26" name="r26"/>
           <p:cNvSpPr>
             <a:spLocks noGrp="1"/>
           </p:cNvSpPr>
@@ -2127,7 +2130,7 @@
       </p:sp>
       <p:sp>
         <p:nvSpPr>
-          <p:cNvPr id="571" name="t571"/>
+          <p:cNvPr id="27" name="t27"/>
           <p:cNvSpPr txBox="1"/>
           <p:nvPr/>
         </p:nvSpPr>
@@ -2150,11 +2153,11 @@
           <a:p>
             <a:pPr algn="ctr" indent="0" marL="0"/>
             <a:r>
-              <a:rPr lang="uz-UZ" sz="2200" b="1" dirty="0" smtClean="0">
+              <a:rPr lang="uz-UZ" sz="2000" b="1" dirty="0" smtClean="0">
                 <a:solidFill>
                   <a:srgbClr val="22E6FF"/>
                 </a:solidFill>
-                <a:latin typeface="+mj-lt"/>
+                <a:latin typeface="Calibri"/>
               </a:rPr>
               <a:t>Ta'lim</a:t>
             </a:r>
@@ -2163,7 +2166,7 @@
       </p:sp>
       <p:sp>
         <p:nvSpPr>
-          <p:cNvPr id="572" name="t572"/>
+          <p:cNvPr id="28" name="t28"/>
           <p:cNvSpPr txBox="1"/>
           <p:nvPr/>
         </p:nvSpPr>
@@ -2190,7 +2193,7 @@
                 <a:solidFill>
                   <a:srgbClr val="9AA6D6"/>
                 </a:solidFill>
-                <a:latin typeface="+mj-lt"/>
+                <a:latin typeface="Calibri"/>
               </a:rPr>
               <a:t>Xavfsiz mashq</a:t>
             </a:r>
@@ -2218,7 +2221,7 @@
     </p:bg>
     <p:spTree>
       <p:nvGrpSpPr>
-        <p:cNvPr id="1" name=""/>
+        <p:cNvPr id="1" name="slide"/>
         <p:cNvGrpSpPr/>
         <p:nvPr/>
       </p:nvGrpSpPr>
@@ -2232,7 +2235,7 @@
       </p:grpSpPr>
       <p:sp>
         <p:nvSpPr>
-          <p:cNvPr id="573" name="r573"/>
+          <p:cNvPr id="2" name="r2"/>
           <p:cNvSpPr>
             <a:spLocks noGrp="1"/>
           </p:cNvSpPr>
@@ -2261,7 +2264,7 @@
       </p:sp>
       <p:sp>
         <p:nvSpPr>
-          <p:cNvPr id="574" name="t574"/>
+          <p:cNvPr id="3" name="t3"/>
           <p:cNvSpPr txBox="1"/>
           <p:nvPr/>
         </p:nvSpPr>
@@ -2288,7 +2291,7 @@
                 <a:solidFill>
                   <a:srgbClr val="FFFFFF"/>
                 </a:solidFill>
-                <a:latin typeface="+mj-lt"/>
+                <a:latin typeface="Calibri"/>
               </a:rPr>
               <a:t>10 · TO'SIQLAR VA YECHIMLAR</a:t>
             </a:r>
@@ -2297,7 +2300,7 @@
       </p:sp>
       <p:sp>
         <p:nvSpPr>
-          <p:cNvPr id="575" name="r575"/>
+          <p:cNvPr id="4" name="r4"/>
           <p:cNvSpPr>
             <a:spLocks noGrp="1"/>
           </p:cNvSpPr>
@@ -2326,7 +2329,7 @@
       </p:sp>
       <p:sp>
         <p:nvSpPr>
-          <p:cNvPr id="576" name="t576"/>
+          <p:cNvPr id="5" name="t5"/>
           <p:cNvSpPr txBox="1"/>
           <p:nvPr/>
         </p:nvSpPr>
@@ -2353,7 +2356,7 @@
                 <a:solidFill>
                   <a:srgbClr val="FF52D9"/>
                 </a:solidFill>
-                <a:latin typeface="+mj-lt"/>
+                <a:latin typeface="Calibri"/>
               </a:rPr>
               <a:t>MUAMMOLAR</a:t>
             </a:r>
@@ -2362,7 +2365,7 @@
       </p:sp>
       <p:sp>
         <p:nvSpPr>
-          <p:cNvPr id="577" name="r577"/>
+          <p:cNvPr id="6" name="r6"/>
           <p:cNvSpPr>
             <a:spLocks noGrp="1"/>
           </p:cNvSpPr>
@@ -2391,14 +2394,14 @@
       </p:sp>
       <p:sp>
         <p:nvSpPr>
-          <p:cNvPr id="578" name="t578"/>
+          <p:cNvPr id="7" name="t7"/>
           <p:cNvSpPr txBox="1"/>
           <p:nvPr/>
         </p:nvSpPr>
         <p:spPr>
           <a:xfrm>
             <a:off x="449999" y="1152000"/>
-            <a:ext cx="5094001" cy="270000"/>
+            <a:ext cx="5094001" cy="280800"/>
           </a:xfrm>
           <a:prstGeom prst="rect">
             <a:avLst/>
@@ -2418,7 +2421,7 @@
                 <a:solidFill>
                   <a:srgbClr val="EAF0FF"/>
                 </a:solidFill>
-                <a:latin typeface="+mj-lt"/>
+                <a:latin typeface="Calibri"/>
               </a:rPr>
               <a:t>Ma'lumotlar maxfiyligi va kiberxavfsizlik</a:t>
             </a:r>
@@ -2427,15 +2430,15 @@
       </p:sp>
       <p:sp>
         <p:nvSpPr>
-          <p:cNvPr id="579" name="r579"/>
-          <p:cNvSpPr>
-            <a:spLocks noGrp="1"/>
-          </p:cNvSpPr>
-          <p:nvPr/>
-        </p:nvSpPr>
-        <p:spPr>
-          <a:xfrm>
-            <a:off x="324000" y="1526400"/>
+          <p:cNvPr id="8" name="r8"/>
+          <p:cNvSpPr>
+            <a:spLocks noGrp="1"/>
+          </p:cNvSpPr>
+          <p:nvPr/>
+        </p:nvSpPr>
+        <p:spPr>
+          <a:xfrm>
+            <a:off x="324000" y="1533600"/>
             <a:ext cx="57600" cy="57600"/>
           </a:xfrm>
           <a:prstGeom prst="rect">
@@ -2456,14 +2459,14 @@
       </p:sp>
       <p:sp>
         <p:nvSpPr>
-          <p:cNvPr id="580" name="t580"/>
-          <p:cNvSpPr txBox="1"/>
-          <p:nvPr/>
-        </p:nvSpPr>
-        <p:spPr>
-          <a:xfrm>
-            <a:off x="449999" y="1447200"/>
-            <a:ext cx="5094001" cy="270000"/>
+          <p:cNvPr id="9" name="t9"/>
+          <p:cNvSpPr txBox="1"/>
+          <p:nvPr/>
+        </p:nvSpPr>
+        <p:spPr>
+          <a:xfrm>
+            <a:off x="449999" y="1454400"/>
+            <a:ext cx="5094001" cy="280800"/>
           </a:xfrm>
           <a:prstGeom prst="rect">
             <a:avLst/>
@@ -2483,7 +2486,7 @@
                 <a:solidFill>
                   <a:srgbClr val="EAF0FF"/>
                 </a:solidFill>
-                <a:latin typeface="+mj-lt"/>
+                <a:latin typeface="Calibri"/>
               </a:rPr>
               <a:t>Yuqori boshlang'ich xarajat va infratuzilma</a:t>
             </a:r>
@@ -2492,15 +2495,15 @@
       </p:sp>
       <p:sp>
         <p:nvSpPr>
-          <p:cNvPr id="581" name="r581"/>
-          <p:cNvSpPr>
-            <a:spLocks noGrp="1"/>
-          </p:cNvSpPr>
-          <p:nvPr/>
-        </p:nvSpPr>
-        <p:spPr>
-          <a:xfrm>
-            <a:off x="324000" y="1821600"/>
+          <p:cNvPr id="10" name="r10"/>
+          <p:cNvSpPr>
+            <a:spLocks noGrp="1"/>
+          </p:cNvSpPr>
+          <p:nvPr/>
+        </p:nvSpPr>
+        <p:spPr>
+          <a:xfrm>
+            <a:off x="324000" y="1836000"/>
             <a:ext cx="57600" cy="57600"/>
           </a:xfrm>
           <a:prstGeom prst="rect">
@@ -2521,14 +2524,14 @@
       </p:sp>
       <p:sp>
         <p:nvSpPr>
-          <p:cNvPr id="582" name="t582"/>
-          <p:cNvSpPr txBox="1"/>
-          <p:nvPr/>
-        </p:nvSpPr>
-        <p:spPr>
-          <a:xfrm>
-            <a:off x="449999" y="1742400"/>
-            <a:ext cx="5094001" cy="270000"/>
+          <p:cNvPr id="11" name="t11"/>
+          <p:cNvSpPr txBox="1"/>
+          <p:nvPr/>
+        </p:nvSpPr>
+        <p:spPr>
+          <a:xfrm>
+            <a:off x="449999" y="1756800"/>
+            <a:ext cx="5094001" cy="280800"/>
           </a:xfrm>
           <a:prstGeom prst="rect">
             <a:avLst/>
@@ -2548,7 +2551,7 @@
                 <a:solidFill>
                   <a:srgbClr val="EAF0FF"/>
                 </a:solidFill>
-                <a:latin typeface="+mj-lt"/>
+                <a:latin typeface="Calibri"/>
               </a:rPr>
               <a:t>Huquqiy-etik baza va javobgarlik</a:t>
             </a:r>
@@ -2557,15 +2560,15 @@
       </p:sp>
       <p:sp>
         <p:nvSpPr>
-          <p:cNvPr id="583" name="r583"/>
-          <p:cNvSpPr>
-            <a:spLocks noGrp="1"/>
-          </p:cNvSpPr>
-          <p:nvPr/>
-        </p:nvSpPr>
-        <p:spPr>
-          <a:xfrm>
-            <a:off x="324000" y="2116800"/>
+          <p:cNvPr id="12" name="r12"/>
+          <p:cNvSpPr>
+            <a:spLocks noGrp="1"/>
+          </p:cNvSpPr>
+          <p:nvPr/>
+        </p:nvSpPr>
+        <p:spPr>
+          <a:xfrm>
+            <a:off x="324000" y="2138400"/>
             <a:ext cx="57600" cy="57600"/>
           </a:xfrm>
           <a:prstGeom prst="rect">
@@ -2586,14 +2589,14 @@
       </p:sp>
       <p:sp>
         <p:nvSpPr>
-          <p:cNvPr id="584" name="t584"/>
-          <p:cNvSpPr txBox="1"/>
-          <p:nvPr/>
-        </p:nvSpPr>
-        <p:spPr>
-          <a:xfrm>
-            <a:off x="449999" y="2037600"/>
-            <a:ext cx="5094001" cy="270000"/>
+          <p:cNvPr id="13" name="t13"/>
+          <p:cNvSpPr txBox="1"/>
+          <p:nvPr/>
+        </p:nvSpPr>
+        <p:spPr>
+          <a:xfrm>
+            <a:off x="449999" y="2059200"/>
+            <a:ext cx="5094001" cy="280800"/>
           </a:xfrm>
           <a:prstGeom prst="rect">
             <a:avLst/>
@@ -2613,7 +2616,7 @@
                 <a:solidFill>
                   <a:srgbClr val="EAF0FF"/>
                 </a:solidFill>
-                <a:latin typeface="+mj-lt"/>
+                <a:latin typeface="Calibri"/>
               </a:rPr>
               <a:t>Raqamli tengsizlik (internet / qurilma)</a:t>
             </a:r>
@@ -2622,15 +2625,15 @@
       </p:sp>
       <p:sp>
         <p:nvSpPr>
-          <p:cNvPr id="585" name="r585"/>
-          <p:cNvSpPr>
-            <a:spLocks noGrp="1"/>
-          </p:cNvSpPr>
-          <p:nvPr/>
-        </p:nvSpPr>
-        <p:spPr>
-          <a:xfrm>
-            <a:off x="324000" y="2412000"/>
+          <p:cNvPr id="14" name="r14"/>
+          <p:cNvSpPr>
+            <a:spLocks noGrp="1"/>
+          </p:cNvSpPr>
+          <p:nvPr/>
+        </p:nvSpPr>
+        <p:spPr>
+          <a:xfrm>
+            <a:off x="324000" y="2440800"/>
             <a:ext cx="57600" cy="57600"/>
           </a:xfrm>
           <a:prstGeom prst="rect">
@@ -2651,14 +2654,14 @@
       </p:sp>
       <p:sp>
         <p:nvSpPr>
-          <p:cNvPr id="586" name="t586"/>
-          <p:cNvSpPr txBox="1"/>
-          <p:nvPr/>
-        </p:nvSpPr>
-        <p:spPr>
-          <a:xfrm>
-            <a:off x="449999" y="2332800"/>
-            <a:ext cx="5094001" cy="270000"/>
+          <p:cNvPr id="15" name="t15"/>
+          <p:cNvSpPr txBox="1"/>
+          <p:nvPr/>
+        </p:nvSpPr>
+        <p:spPr>
+          <a:xfrm>
+            <a:off x="449999" y="2361600"/>
+            <a:ext cx="5094001" cy="280800"/>
           </a:xfrm>
           <a:prstGeom prst="rect">
             <a:avLst/>
@@ -2678,7 +2681,7 @@
                 <a:solidFill>
                   <a:srgbClr val="EAF0FF"/>
                 </a:solidFill>
-                <a:latin typeface="+mj-lt"/>
+                <a:latin typeface="Calibri"/>
               </a:rPr>
               <a:t>Kadrlar malakasi va qarshilik</a:t>
             </a:r>
@@ -2687,7 +2690,7 @@
       </p:sp>
       <p:sp>
         <p:nvSpPr>
-          <p:cNvPr id="587" name="r587"/>
+          <p:cNvPr id="16" name="r16"/>
           <p:cNvSpPr>
             <a:spLocks noGrp="1"/>
           </p:cNvSpPr>
@@ -2716,7 +2719,7 @@
       </p:sp>
       <p:sp>
         <p:nvSpPr>
-          <p:cNvPr id="588" name="t588"/>
+          <p:cNvPr id="17" name="t17"/>
           <p:cNvSpPr txBox="1"/>
           <p:nvPr/>
         </p:nvSpPr>
@@ -2743,7 +2746,7 @@
                 <a:solidFill>
                   <a:srgbClr val="22E6FF"/>
                 </a:solidFill>
-                <a:latin typeface="+mj-lt"/>
+                <a:latin typeface="Calibri"/>
               </a:rPr>
               <a:t>YECHIMLAR</a:t>
             </a:r>
@@ -2752,7 +2755,7 @@
       </p:sp>
       <p:sp>
         <p:nvSpPr>
-          <p:cNvPr id="589" name="r589"/>
+          <p:cNvPr id="18" name="r18"/>
           <p:cNvSpPr>
             <a:spLocks noGrp="1"/>
           </p:cNvSpPr>
@@ -2781,14 +2784,14 @@
       </p:sp>
       <p:sp>
         <p:nvSpPr>
-          <p:cNvPr id="590" name="t590"/>
+          <p:cNvPr id="19" name="t19"/>
           <p:cNvSpPr txBox="1"/>
           <p:nvPr/>
         </p:nvSpPr>
         <p:spPr>
           <a:xfrm>
             <a:off x="6497999" y="1152000"/>
-            <a:ext cx="5094001" cy="270000"/>
+            <a:ext cx="5094001" cy="280800"/>
           </a:xfrm>
           <a:prstGeom prst="rect">
             <a:avLst/>
@@ -2808,7 +2811,7 @@
                 <a:solidFill>
                   <a:srgbClr val="EAF0FF"/>
                 </a:solidFill>
-                <a:latin typeface="+mj-lt"/>
+                <a:latin typeface="Calibri"/>
               </a:rPr>
               <a:t>Shifrlash va standartlar (HL7/FHIR, GDPR)</a:t>
             </a:r>
@@ -2817,15 +2820,15 @@
       </p:sp>
       <p:sp>
         <p:nvSpPr>
-          <p:cNvPr id="591" name="r591"/>
-          <p:cNvSpPr>
-            <a:spLocks noGrp="1"/>
-          </p:cNvSpPr>
-          <p:nvPr/>
-        </p:nvSpPr>
-        <p:spPr>
-          <a:xfrm>
-            <a:off x="6372000" y="1526400"/>
+          <p:cNvPr id="20" name="r20"/>
+          <p:cNvSpPr>
+            <a:spLocks noGrp="1"/>
+          </p:cNvSpPr>
+          <p:nvPr/>
+        </p:nvSpPr>
+        <p:spPr>
+          <a:xfrm>
+            <a:off x="6372000" y="1533600"/>
             <a:ext cx="57600" cy="57600"/>
           </a:xfrm>
           <a:prstGeom prst="rect">
@@ -2846,14 +2849,14 @@
       </p:sp>
       <p:sp>
         <p:nvSpPr>
-          <p:cNvPr id="592" name="t592"/>
-          <p:cNvSpPr txBox="1"/>
-          <p:nvPr/>
-        </p:nvSpPr>
-        <p:spPr>
-          <a:xfrm>
-            <a:off x="6497999" y="1447200"/>
-            <a:ext cx="5094001" cy="270000"/>
+          <p:cNvPr id="21" name="t21"/>
+          <p:cNvSpPr txBox="1"/>
+          <p:nvPr/>
+        </p:nvSpPr>
+        <p:spPr>
+          <a:xfrm>
+            <a:off x="6497999" y="1454400"/>
+            <a:ext cx="5094001" cy="280800"/>
           </a:xfrm>
           <a:prstGeom prst="rect">
             <a:avLst/>
@@ -2873,7 +2876,7 @@
                 <a:solidFill>
                   <a:srgbClr val="EAF0FF"/>
                 </a:solidFill>
-                <a:latin typeface="+mj-lt"/>
+                <a:latin typeface="Calibri"/>
               </a:rPr>
               <a:t>Bosqichma-bosqich joriy etish va pilotlar</a:t>
             </a:r>
@@ -2882,15 +2885,15 @@
       </p:sp>
       <p:sp>
         <p:nvSpPr>
-          <p:cNvPr id="593" name="r593"/>
-          <p:cNvSpPr>
-            <a:spLocks noGrp="1"/>
-          </p:cNvSpPr>
-          <p:nvPr/>
-        </p:nvSpPr>
-        <p:spPr>
-          <a:xfrm>
-            <a:off x="6372000" y="1821600"/>
+          <p:cNvPr id="22" name="r22"/>
+          <p:cNvSpPr>
+            <a:spLocks noGrp="1"/>
+          </p:cNvSpPr>
+          <p:nvPr/>
+        </p:nvSpPr>
+        <p:spPr>
+          <a:xfrm>
+            <a:off x="6372000" y="1836000"/>
             <a:ext cx="57600" cy="57600"/>
           </a:xfrm>
           <a:prstGeom prst="rect">
@@ -2911,14 +2914,14 @@
       </p:sp>
       <p:sp>
         <p:nvSpPr>
-          <p:cNvPr id="594" name="t594"/>
-          <p:cNvSpPr txBox="1"/>
-          <p:nvPr/>
-        </p:nvSpPr>
-        <p:spPr>
-          <a:xfrm>
-            <a:off x="6497999" y="1742400"/>
-            <a:ext cx="5094001" cy="270000"/>
+          <p:cNvPr id="23" name="t23"/>
+          <p:cNvSpPr txBox="1"/>
+          <p:nvPr/>
+        </p:nvSpPr>
+        <p:spPr>
+          <a:xfrm>
+            <a:off x="6497999" y="1756800"/>
+            <a:ext cx="5094001" cy="280800"/>
           </a:xfrm>
           <a:prstGeom prst="rect">
             <a:avLst/>
@@ -2938,7 +2941,7 @@
                 <a:solidFill>
                   <a:srgbClr val="EAF0FF"/>
                 </a:solidFill>
-                <a:latin typeface="+mj-lt"/>
+                <a:latin typeface="Calibri"/>
               </a:rPr>
               <a:t>Aniq normativ-huquqiy hujjatlar</a:t>
             </a:r>
@@ -2947,15 +2950,15 @@
       </p:sp>
       <p:sp>
         <p:nvSpPr>
-          <p:cNvPr id="595" name="r595"/>
-          <p:cNvSpPr>
-            <a:spLocks noGrp="1"/>
-          </p:cNvSpPr>
-          <p:nvPr/>
-        </p:nvSpPr>
-        <p:spPr>
-          <a:xfrm>
-            <a:off x="6372000" y="2116800"/>
+          <p:cNvPr id="24" name="r24"/>
+          <p:cNvSpPr>
+            <a:spLocks noGrp="1"/>
+          </p:cNvSpPr>
+          <p:nvPr/>
+        </p:nvSpPr>
+        <p:spPr>
+          <a:xfrm>
+            <a:off x="6372000" y="2138400"/>
             <a:ext cx="57600" cy="57600"/>
           </a:xfrm>
           <a:prstGeom prst="rect">
@@ -2976,14 +2979,14 @@
       </p:sp>
       <p:sp>
         <p:nvSpPr>
-          <p:cNvPr id="596" name="t596"/>
-          <p:cNvSpPr txBox="1"/>
-          <p:nvPr/>
-        </p:nvSpPr>
-        <p:spPr>
-          <a:xfrm>
-            <a:off x="6497999" y="2037600"/>
-            <a:ext cx="5094001" cy="270000"/>
+          <p:cNvPr id="25" name="t25"/>
+          <p:cNvSpPr txBox="1"/>
+          <p:nvPr/>
+        </p:nvSpPr>
+        <p:spPr>
+          <a:xfrm>
+            <a:off x="6497999" y="2059200"/>
+            <a:ext cx="5094001" cy="280800"/>
           </a:xfrm>
           <a:prstGeom prst="rect">
             <a:avLst/>
@@ -3003,7 +3006,7 @@
                 <a:solidFill>
                   <a:srgbClr val="EAF0FF"/>
                 </a:solidFill>
-                <a:latin typeface="+mj-lt"/>
+                <a:latin typeface="Calibri"/>
               </a:rPr>
               <a:t>Davlat dasturlari va internet qamrovi</a:t>
             </a:r>
@@ -3012,15 +3015,15 @@
       </p:sp>
       <p:sp>
         <p:nvSpPr>
-          <p:cNvPr id="597" name="r597"/>
-          <p:cNvSpPr>
-            <a:spLocks noGrp="1"/>
-          </p:cNvSpPr>
-          <p:nvPr/>
-        </p:nvSpPr>
-        <p:spPr>
-          <a:xfrm>
-            <a:off x="6372000" y="2412000"/>
+          <p:cNvPr id="26" name="r26"/>
+          <p:cNvSpPr>
+            <a:spLocks noGrp="1"/>
+          </p:cNvSpPr>
+          <p:nvPr/>
+        </p:nvSpPr>
+        <p:spPr>
+          <a:xfrm>
+            <a:off x="6372000" y="2440800"/>
             <a:ext cx="57600" cy="57600"/>
           </a:xfrm>
           <a:prstGeom prst="rect">
@@ -3041,14 +3044,14 @@
       </p:sp>
       <p:sp>
         <p:nvSpPr>
-          <p:cNvPr id="598" name="t598"/>
-          <p:cNvSpPr txBox="1"/>
-          <p:nvPr/>
-        </p:nvSpPr>
-        <p:spPr>
-          <a:xfrm>
-            <a:off x="6497999" y="2332800"/>
-            <a:ext cx="5094001" cy="270000"/>
+          <p:cNvPr id="27" name="t27"/>
+          <p:cNvSpPr txBox="1"/>
+          <p:nvPr/>
+        </p:nvSpPr>
+        <p:spPr>
+          <a:xfrm>
+            <a:off x="6497999" y="2361600"/>
+            <a:ext cx="5094001" cy="280800"/>
           </a:xfrm>
           <a:prstGeom prst="rect">
             <a:avLst/>
@@ -3068,7 +3071,7 @@
                 <a:solidFill>
                   <a:srgbClr val="EAF0FF"/>
                 </a:solidFill>
-                <a:latin typeface="+mj-lt"/>
+                <a:latin typeface="Calibri"/>
               </a:rPr>
               <a:t>Uzluksiz o'qitish va sertifikatsiya</a:t>
             </a:r>
@@ -3096,7 +3099,7 @@
     </p:bg>
     <p:spTree>
       <p:nvGrpSpPr>
-        <p:cNvPr id="1" name=""/>
+        <p:cNvPr id="1" name="slide"/>
         <p:cNvGrpSpPr/>
         <p:nvPr/>
       </p:nvGrpSpPr>
@@ -3110,7 +3113,7 @@
       </p:grpSpPr>
       <p:sp>
         <p:nvSpPr>
-          <p:cNvPr id="599" name="r599"/>
+          <p:cNvPr id="2" name="r2"/>
           <p:cNvSpPr>
             <a:spLocks noGrp="1"/>
           </p:cNvSpPr>
@@ -3139,7 +3142,7 @@
       </p:sp>
       <p:sp>
         <p:nvSpPr>
-          <p:cNvPr id="600" name="t600"/>
+          <p:cNvPr id="3" name="t3"/>
           <p:cNvSpPr txBox="1"/>
           <p:nvPr/>
         </p:nvSpPr>
@@ -3166,7 +3169,7 @@
                 <a:solidFill>
                   <a:srgbClr val="FFFFFF"/>
                 </a:solidFill>
-                <a:latin typeface="+mj-lt"/>
+                <a:latin typeface="Calibri"/>
               </a:rPr>
               <a:t>11 · ISTIQBOL YO'NALISHLARI</a:t>
             </a:r>
@@ -3175,7 +3178,7 @@
       </p:sp>
       <p:sp>
         <p:nvSpPr>
-          <p:cNvPr id="601" name="r601"/>
+          <p:cNvPr id="4" name="r4"/>
           <p:cNvSpPr>
             <a:spLocks noGrp="1"/>
           </p:cNvSpPr>
@@ -3204,7 +3207,7 @@
       </p:sp>
       <p:sp>
         <p:nvSpPr>
-          <p:cNvPr id="602" name="r602"/>
+          <p:cNvPr id="5" name="r5"/>
           <p:cNvSpPr>
             <a:spLocks noGrp="1"/>
           </p:cNvSpPr>
@@ -3233,7 +3236,7 @@
       </p:sp>
       <p:sp>
         <p:nvSpPr>
-          <p:cNvPr id="603" name="t603"/>
+          <p:cNvPr id="6" name="t6"/>
           <p:cNvSpPr txBox="1"/>
           <p:nvPr/>
         </p:nvSpPr>
@@ -3260,7 +3263,7 @@
                 <a:solidFill>
                   <a:srgbClr val="FFFFFF"/>
                 </a:solidFill>
-                <a:latin typeface="+mj-lt"/>
+                <a:latin typeface="Calibri"/>
               </a:rPr>
               <a:t>Raqamli egizak</a:t>
             </a:r>
@@ -3269,14 +3272,14 @@
       </p:sp>
       <p:sp>
         <p:nvSpPr>
-          <p:cNvPr id="604" name="t604"/>
-          <p:cNvSpPr txBox="1"/>
-          <p:nvPr/>
-        </p:nvSpPr>
-        <p:spPr>
-          <a:xfrm>
-            <a:off x="288000" y="1188000"/>
-            <a:ext cx="3600000" cy="558000"/>
+          <p:cNvPr id="7" name="t7"/>
+          <p:cNvSpPr txBox="1"/>
+          <p:nvPr/>
+        </p:nvSpPr>
+        <p:spPr>
+          <a:xfrm>
+            <a:off x="288000" y="1206000"/>
+            <a:ext cx="3600000" cy="540000"/>
           </a:xfrm>
           <a:prstGeom prst="rect">
             <a:avLst/>
@@ -3296,7 +3299,7 @@
                 <a:solidFill>
                   <a:srgbClr val="9AA6D6"/>
                 </a:solidFill>
-                <a:latin typeface="+mj-lt"/>
+                <a:latin typeface="Calibri"/>
               </a:rPr>
               <a:t>Bemorning virtual modeli orqali davoni oldindan sinash.</a:t>
             </a:r>
@@ -3305,7 +3308,7 @@
       </p:sp>
       <p:sp>
         <p:nvSpPr>
-          <p:cNvPr id="605" name="r605"/>
+          <p:cNvPr id="8" name="r8"/>
           <p:cNvSpPr>
             <a:spLocks noGrp="1"/>
           </p:cNvSpPr>
@@ -3334,7 +3337,7 @@
       </p:sp>
       <p:sp>
         <p:nvSpPr>
-          <p:cNvPr id="606" name="r606"/>
+          <p:cNvPr id="9" name="r9"/>
           <p:cNvSpPr>
             <a:spLocks noGrp="1"/>
           </p:cNvSpPr>
@@ -3363,7 +3366,7 @@
       </p:sp>
       <p:sp>
         <p:nvSpPr>
-          <p:cNvPr id="607" name="t607"/>
+          <p:cNvPr id="10" name="t10"/>
           <p:cNvSpPr txBox="1"/>
           <p:nvPr/>
         </p:nvSpPr>
@@ -3390,7 +3393,7 @@
                 <a:solidFill>
                   <a:srgbClr val="FFFFFF"/>
                 </a:solidFill>
-                <a:latin typeface="+mj-lt"/>
+                <a:latin typeface="Calibri"/>
               </a:rPr>
               <a:t>Generativ AI</a:t>
             </a:r>
@@ -3399,14 +3402,14 @@
       </p:sp>
       <p:sp>
         <p:nvSpPr>
-          <p:cNvPr id="608" name="t608"/>
-          <p:cNvSpPr txBox="1"/>
-          <p:nvPr/>
-        </p:nvSpPr>
-        <p:spPr>
-          <a:xfrm>
-            <a:off x="4284000" y="1188000"/>
-            <a:ext cx="3600000" cy="558000"/>
+          <p:cNvPr id="11" name="t11"/>
+          <p:cNvSpPr txBox="1"/>
+          <p:nvPr/>
+        </p:nvSpPr>
+        <p:spPr>
+          <a:xfrm>
+            <a:off x="4284000" y="1206000"/>
+            <a:ext cx="3600000" cy="540000"/>
           </a:xfrm>
           <a:prstGeom prst="rect">
             <a:avLst/>
@@ -3426,7 +3429,7 @@
                 <a:solidFill>
                   <a:srgbClr val="9AA6D6"/>
                 </a:solidFill>
-                <a:latin typeface="+mj-lt"/>
+                <a:latin typeface="Calibri"/>
               </a:rPr>
               <a:t>Hujjat, tavsiya va ta'limda yangi avlod yordamchilari.</a:t>
             </a:r>
@@ -3435,7 +3438,7 @@
       </p:sp>
       <p:sp>
         <p:nvSpPr>
-          <p:cNvPr id="609" name="r609"/>
+          <p:cNvPr id="12" name="r12"/>
           <p:cNvSpPr>
             <a:spLocks noGrp="1"/>
           </p:cNvSpPr>
@@ -3464,7 +3467,7 @@
       </p:sp>
       <p:sp>
         <p:nvSpPr>
-          <p:cNvPr id="610" name="r610"/>
+          <p:cNvPr id="13" name="r13"/>
           <p:cNvSpPr>
             <a:spLocks noGrp="1"/>
           </p:cNvSpPr>
@@ -3493,7 +3496,7 @@
       </p:sp>
       <p:sp>
         <p:nvSpPr>
-          <p:cNvPr id="611" name="t611"/>
+          <p:cNvPr id="14" name="t14"/>
           <p:cNvSpPr txBox="1"/>
           <p:nvPr/>
         </p:nvSpPr>
@@ -3520,7 +3523,7 @@
                 <a:solidFill>
                   <a:srgbClr val="FFFFFF"/>
                 </a:solidFill>
-                <a:latin typeface="+mj-lt"/>
+                <a:latin typeface="Calibri"/>
               </a:rPr>
               <a:t>Metaverse-klinika</a:t>
             </a:r>
@@ -3529,14 +3532,14 @@
       </p:sp>
       <p:sp>
         <p:nvSpPr>
-          <p:cNvPr id="612" name="t612"/>
-          <p:cNvSpPr txBox="1"/>
-          <p:nvPr/>
-        </p:nvSpPr>
-        <p:spPr>
-          <a:xfrm>
-            <a:off x="8280000" y="1188000"/>
-            <a:ext cx="3600000" cy="558000"/>
+          <p:cNvPr id="15" name="t15"/>
+          <p:cNvSpPr txBox="1"/>
+          <p:nvPr/>
+        </p:nvSpPr>
+        <p:spPr>
+          <a:xfrm>
+            <a:off x="8280000" y="1206000"/>
+            <a:ext cx="3600000" cy="540000"/>
           </a:xfrm>
           <a:prstGeom prst="rect">
             <a:avLst/>
@@ -3556,7 +3559,7 @@
                 <a:solidFill>
                   <a:srgbClr val="9AA6D6"/>
                 </a:solidFill>
-                <a:latin typeface="+mj-lt"/>
+                <a:latin typeface="Calibri"/>
               </a:rPr>
               <a:t>Immersiv virtual qabulxonalar va jamoaviy operatsiya.</a:t>
             </a:r>
@@ -3565,7 +3568,7 @@
       </p:sp>
       <p:sp>
         <p:nvSpPr>
-          <p:cNvPr id="613" name="t613"/>
+          <p:cNvPr id="16" name="t16"/>
           <p:cNvSpPr txBox="1"/>
           <p:nvPr/>
         </p:nvSpPr>
@@ -3592,7 +3595,7 @@
                 <a:solidFill>
                   <a:srgbClr val="22E6FF"/>
                 </a:solidFill>
-                <a:latin typeface="+mj-lt"/>
+                <a:latin typeface="Calibri"/>
               </a:rPr>
               <a:t>Texnologiyalar shifokorni ALMASHTIRMAYDI — imkoniyatlarini kuchaytiradi.</a:t>
             </a:r>
@@ -3604,7 +3607,7 @@
                 <a:solidFill>
                   <a:srgbClr val="9AA6D6"/>
                 </a:solidFill>
-                <a:latin typeface="+mj-lt"/>
+                <a:latin typeface="Calibri"/>
               </a:rPr>
               <a:t>Qaror baribir inson zimmasida qoladi.</a:t>
             </a:r>
@@ -3632,7 +3635,7 @@
     </p:bg>
     <p:spTree>
       <p:nvGrpSpPr>
-        <p:cNvPr id="1" name=""/>
+        <p:cNvPr id="1" name="slide"/>
         <p:cNvGrpSpPr/>
         <p:nvPr/>
       </p:nvGrpSpPr>
@@ -3646,7 +3649,7 @@
       </p:grpSpPr>
       <p:sp>
         <p:nvSpPr>
-          <p:cNvPr id="614" name="r614"/>
+          <p:cNvPr id="2" name="r2"/>
           <p:cNvSpPr>
             <a:spLocks noGrp="1"/>
           </p:cNvSpPr>
@@ -3675,7 +3678,7 @@
       </p:sp>
       <p:sp>
         <p:nvSpPr>
-          <p:cNvPr id="615" name="t615"/>
+          <p:cNvPr id="3" name="t3"/>
           <p:cNvSpPr txBox="1"/>
           <p:nvPr/>
         </p:nvSpPr>
@@ -3702,7 +3705,7 @@
                 <a:solidFill>
                   <a:srgbClr val="FFFFFF"/>
                 </a:solidFill>
-                <a:latin typeface="+mj-lt"/>
+                <a:latin typeface="Calibri"/>
               </a:rPr>
               <a:t>ASOSIY XULOSALAR</a:t>
             </a:r>
@@ -3711,7 +3714,7 @@
       </p:sp>
       <p:sp>
         <p:nvSpPr>
-          <p:cNvPr id="616" name="r616"/>
+          <p:cNvPr id="4" name="r4"/>
           <p:cNvSpPr>
             <a:spLocks noGrp="1"/>
           </p:cNvSpPr>
@@ -3740,14 +3743,14 @@
       </p:sp>
       <p:sp>
         <p:nvSpPr>
-          <p:cNvPr id="617" name="t617"/>
+          <p:cNvPr id="5" name="t5"/>
           <p:cNvSpPr txBox="1"/>
           <p:nvPr/>
         </p:nvSpPr>
         <p:spPr>
           <a:xfrm>
             <a:off x="485999" y="792000"/>
-            <a:ext cx="11034001" cy="270000"/>
+            <a:ext cx="11034001" cy="280800"/>
           </a:xfrm>
           <a:prstGeom prst="rect">
             <a:avLst/>
@@ -3767,7 +3770,7 @@
                 <a:solidFill>
                   <a:srgbClr val="EAF0FF"/>
                 </a:solidFill>
-                <a:latin typeface="+mj-lt"/>
+                <a:latin typeface="Calibri"/>
               </a:rPr>
               <a:t>VR/AR, AI va telemeditsina tashxis, davolash va reabilitatsiyani sifat jihatdan yangilaydi.</a:t>
             </a:r>
@@ -3776,15 +3779,15 @@
       </p:sp>
       <p:sp>
         <p:nvSpPr>
-          <p:cNvPr id="618" name="r618"/>
-          <p:cNvSpPr>
-            <a:spLocks noGrp="1"/>
-          </p:cNvSpPr>
-          <p:nvPr/>
-        </p:nvSpPr>
-        <p:spPr>
-          <a:xfrm>
-            <a:off x="360000" y="1166400"/>
+          <p:cNvPr id="6" name="r6"/>
+          <p:cNvSpPr>
+            <a:spLocks noGrp="1"/>
+          </p:cNvSpPr>
+          <p:nvPr/>
+        </p:nvSpPr>
+        <p:spPr>
+          <a:xfrm>
+            <a:off x="360000" y="1173600"/>
             <a:ext cx="57600" cy="57600"/>
           </a:xfrm>
           <a:prstGeom prst="rect">
@@ -3805,14 +3808,14 @@
       </p:sp>
       <p:sp>
         <p:nvSpPr>
-          <p:cNvPr id="619" name="t619"/>
-          <p:cNvSpPr txBox="1"/>
-          <p:nvPr/>
-        </p:nvSpPr>
-        <p:spPr>
-          <a:xfrm>
-            <a:off x="485999" y="1087200"/>
-            <a:ext cx="11034001" cy="270000"/>
+          <p:cNvPr id="7" name="t7"/>
+          <p:cNvSpPr txBox="1"/>
+          <p:nvPr/>
+        </p:nvSpPr>
+        <p:spPr>
+          <a:xfrm>
+            <a:off x="485999" y="1094400"/>
+            <a:ext cx="11034001" cy="280800"/>
           </a:xfrm>
           <a:prstGeom prst="rect">
             <a:avLst/>
@@ -3832,24 +3835,24 @@
                 <a:solidFill>
                   <a:srgbClr val="EAF0FF"/>
                 </a:solidFill>
-                <a:latin typeface="+mj-lt"/>
-              </a:rPr>
-              <a:t>Ularning integratsiyasi uzluksiz bemor yo'lini (tashxis → davo → tiklanish) yaratadi.</a:t>
-            </a:r>
-          </a:p>
-        </p:txBody>
-      </p:sp>
-      <p:sp>
-        <p:nvSpPr>
-          <p:cNvPr id="620" name="r620"/>
-          <p:cNvSpPr>
-            <a:spLocks noGrp="1"/>
-          </p:cNvSpPr>
-          <p:nvPr/>
-        </p:nvSpPr>
-        <p:spPr>
-          <a:xfrm>
-            <a:off x="360000" y="1461600"/>
+                <a:latin typeface="Calibri"/>
+              </a:rPr>
+              <a:t>Ularning integratsiyasi uzluksiz bemor yo'lini (tashxis -&gt; davo -&gt; tiklanish) yaratadi.</a:t>
+            </a:r>
+          </a:p>
+        </p:txBody>
+      </p:sp>
+      <p:sp>
+        <p:nvSpPr>
+          <p:cNvPr id="8" name="r8"/>
+          <p:cNvSpPr>
+            <a:spLocks noGrp="1"/>
+          </p:cNvSpPr>
+          <p:nvPr/>
+        </p:nvSpPr>
+        <p:spPr>
+          <a:xfrm>
+            <a:off x="360000" y="1476000"/>
             <a:ext cx="57600" cy="57600"/>
           </a:xfrm>
           <a:prstGeom prst="rect">
@@ -3870,14 +3873,14 @@
       </p:sp>
       <p:sp>
         <p:nvSpPr>
-          <p:cNvPr id="621" name="t621"/>
-          <p:cNvSpPr txBox="1"/>
-          <p:nvPr/>
-        </p:nvSpPr>
-        <p:spPr>
-          <a:xfrm>
-            <a:off x="485999" y="1382400"/>
-            <a:ext cx="11034001" cy="270000"/>
+          <p:cNvPr id="9" name="t9"/>
+          <p:cNvSpPr txBox="1"/>
+          <p:nvPr/>
+        </p:nvSpPr>
+        <p:spPr>
+          <a:xfrm>
+            <a:off x="485999" y="1396800"/>
+            <a:ext cx="11034001" cy="280800"/>
           </a:xfrm>
           <a:prstGeom prst="rect">
             <a:avLst/>
@@ -3897,7 +3900,7 @@
                 <a:solidFill>
                   <a:srgbClr val="EAF0FF"/>
                 </a:solidFill>
-                <a:latin typeface="+mj-lt"/>
+                <a:latin typeface="Calibri"/>
               </a:rPr>
               <a:t>Maxfiylik, etika va kadrlar tayyorgarligi — muvaffaqiyatning asosiy sharti.</a:t>
             </a:r>
@@ -3906,15 +3909,15 @@
       </p:sp>
       <p:sp>
         <p:nvSpPr>
-          <p:cNvPr id="622" name="r622"/>
-          <p:cNvSpPr>
-            <a:spLocks noGrp="1"/>
-          </p:cNvSpPr>
-          <p:nvPr/>
-        </p:nvSpPr>
-        <p:spPr>
-          <a:xfrm>
-            <a:off x="360000" y="1756800"/>
+          <p:cNvPr id="10" name="r10"/>
+          <p:cNvSpPr>
+            <a:spLocks noGrp="1"/>
+          </p:cNvSpPr>
+          <p:nvPr/>
+        </p:nvSpPr>
+        <p:spPr>
+          <a:xfrm>
+            <a:off x="360000" y="1778400"/>
             <a:ext cx="57600" cy="57600"/>
           </a:xfrm>
           <a:prstGeom prst="rect">
@@ -3935,14 +3938,14 @@
       </p:sp>
       <p:sp>
         <p:nvSpPr>
-          <p:cNvPr id="623" name="t623"/>
-          <p:cNvSpPr txBox="1"/>
-          <p:nvPr/>
-        </p:nvSpPr>
-        <p:spPr>
-          <a:xfrm>
-            <a:off x="485999" y="1677600"/>
-            <a:ext cx="11034001" cy="270000"/>
+          <p:cNvPr id="11" name="t11"/>
+          <p:cNvSpPr txBox="1"/>
+          <p:nvPr/>
+        </p:nvSpPr>
+        <p:spPr>
+          <a:xfrm>
+            <a:off x="485999" y="1699200"/>
+            <a:ext cx="11034001" cy="280800"/>
           </a:xfrm>
           <a:prstGeom prst="rect">
             <a:avLst/>
@@ -3962,7 +3965,7 @@
                 <a:solidFill>
                   <a:srgbClr val="EAF0FF"/>
                 </a:solidFill>
-                <a:latin typeface="+mj-lt"/>
+                <a:latin typeface="Calibri"/>
               </a:rPr>
               <a:t>Bosqichma-bosqich va inson nazorati ostida joriy etish eng samarali yondashuv.</a:t>
             </a:r>
@@ -3990,7 +3993,7 @@
     </p:bg>
     <p:spTree>
       <p:nvGrpSpPr>
-        <p:cNvPr id="1" name=""/>
+        <p:cNvPr id="1" name="slide"/>
         <p:cNvGrpSpPr/>
         <p:nvPr/>
       </p:nvGrpSpPr>
@@ -4004,7 +4007,7 @@
       </p:grpSpPr>
       <p:sp>
         <p:nvSpPr>
-          <p:cNvPr id="624" name="r624"/>
+          <p:cNvPr id="2" name="r2"/>
           <p:cNvSpPr>
             <a:spLocks noGrp="1"/>
           </p:cNvSpPr>
@@ -4033,7 +4036,7 @@
       </p:sp>
       <p:sp>
         <p:nvSpPr>
-          <p:cNvPr id="625" name="r625"/>
+          <p:cNvPr id="3" name="r3"/>
           <p:cNvSpPr>
             <a:spLocks noGrp="1"/>
           </p:cNvSpPr>
@@ -4062,7 +4065,7 @@
       </p:sp>
       <p:sp>
         <p:nvSpPr>
-          <p:cNvPr id="626" name="r626"/>
+          <p:cNvPr id="4" name="r4"/>
           <p:cNvSpPr>
             <a:spLocks noGrp="1"/>
           </p:cNvSpPr>
@@ -4091,7 +4094,7 @@
       </p:sp>
       <p:sp>
         <p:nvSpPr>
-          <p:cNvPr id="627" name="t627"/>
+          <p:cNvPr id="5" name="t5"/>
           <p:cNvSpPr txBox="1"/>
           <p:nvPr/>
         </p:nvSpPr>
@@ -4118,7 +4121,7 @@
                 <a:solidFill>
                   <a:srgbClr val="FFFFFF"/>
                 </a:solidFill>
-                <a:latin typeface="+mj-lt"/>
+                <a:latin typeface="Calibri"/>
               </a:rPr>
               <a:t>E'tiboringiz uchun rahmat!</a:t>
             </a:r>
@@ -4127,7 +4130,7 @@
       </p:sp>
       <p:sp>
         <p:nvSpPr>
-          <p:cNvPr id="628" name="t628"/>
+          <p:cNvPr id="6" name="t6"/>
           <p:cNvSpPr txBox="1"/>
           <p:nvPr/>
         </p:nvSpPr>
@@ -4154,7 +4157,7 @@
                 <a:solidFill>
                   <a:srgbClr val="22E6FF"/>
                 </a:solidFill>
-                <a:latin typeface="+mj-lt"/>
+                <a:latin typeface="Calibri"/>
               </a:rPr>
               <a:t>Kelajak tibbiyoti — texnologiya va insoniylikning uyg'unligi.</a:t>
             </a:r>
@@ -4163,7 +4166,7 @@
       </p:sp>
       <p:sp>
         <p:nvSpPr>
-          <p:cNvPr id="629" name="t629"/>
+          <p:cNvPr id="7" name="t7"/>
           <p:cNvSpPr txBox="1"/>
           <p:nvPr/>
         </p:nvSpPr>
@@ -4190,7 +4193,7 @@
                 <a:solidFill>
                   <a:srgbClr val="9AA6D6"/>
                 </a:solidFill>
-                <a:latin typeface="+mj-lt"/>
+                <a:latin typeface="Calibri"/>
               </a:rPr>
               <a:t>MedTech  ·  2026</a:t>
             </a:r>
@@ -4218,7 +4221,7 @@
     </p:bg>
     <p:spTree>
       <p:nvGrpSpPr>
-        <p:cNvPr id="1" name=""/>
+        <p:cNvPr id="1" name="slide"/>
         <p:cNvGrpSpPr/>
         <p:nvPr/>
       </p:nvGrpSpPr>
@@ -4232,7 +4235,7 @@
       </p:grpSpPr>
       <p:sp>
         <p:nvSpPr>
-          <p:cNvPr id="359" name="r359"/>
+          <p:cNvPr id="2" name="r2"/>
           <p:cNvSpPr>
             <a:spLocks noGrp="1"/>
           </p:cNvSpPr>
@@ -4261,7 +4264,7 @@
       </p:sp>
       <p:sp>
         <p:nvSpPr>
-          <p:cNvPr id="360" name="t360"/>
+          <p:cNvPr id="3" name="t3"/>
           <p:cNvSpPr txBox="1"/>
           <p:nvPr/>
         </p:nvSpPr>
@@ -4288,7 +4291,7 @@
                 <a:solidFill>
                   <a:srgbClr val="FFFFFF"/>
                 </a:solidFill>
-                <a:latin typeface="+mj-lt"/>
+                <a:latin typeface="Calibri"/>
               </a:rPr>
               <a:t>TAQDIMOT REJASI</a:t>
             </a:r>
@@ -4297,7 +4300,7 @@
       </p:sp>
       <p:sp>
         <p:nvSpPr>
-          <p:cNvPr id="361" name="r361"/>
+          <p:cNvPr id="4" name="r4"/>
           <p:cNvSpPr>
             <a:spLocks noGrp="1"/>
           </p:cNvSpPr>
@@ -4326,14 +4329,14 @@
       </p:sp>
       <p:sp>
         <p:nvSpPr>
-          <p:cNvPr id="362" name="t362"/>
+          <p:cNvPr id="5" name="t5"/>
           <p:cNvSpPr txBox="1"/>
           <p:nvPr/>
         </p:nvSpPr>
         <p:spPr>
           <a:xfrm>
             <a:off x="341999" y="720000"/>
-            <a:ext cx="5274001" cy="270000"/>
+            <a:ext cx="5274001" cy="280800"/>
           </a:xfrm>
           <a:prstGeom prst="rect">
             <a:avLst/>
@@ -4353,7 +4356,7 @@
                 <a:solidFill>
                   <a:srgbClr val="EAF0FF"/>
                 </a:solidFill>
-                <a:latin typeface="+mj-lt"/>
+                <a:latin typeface="Calibri"/>
               </a:rPr>
               <a:t>01 – Raqamli tibbiyot inqilobi</a:t>
             </a:r>
@@ -4362,15 +4365,15 @@
       </p:sp>
       <p:sp>
         <p:nvSpPr>
-          <p:cNvPr id="363" name="r363"/>
-          <p:cNvSpPr>
-            <a:spLocks noGrp="1"/>
-          </p:cNvSpPr>
-          <p:nvPr/>
-        </p:nvSpPr>
-        <p:spPr>
-          <a:xfrm>
-            <a:off x="216000" y="1094400"/>
+          <p:cNvPr id="6" name="r6"/>
+          <p:cNvSpPr>
+            <a:spLocks noGrp="1"/>
+          </p:cNvSpPr>
+          <p:nvPr/>
+        </p:nvSpPr>
+        <p:spPr>
+          <a:xfrm>
+            <a:off x="216000" y="1101600"/>
             <a:ext cx="57600" cy="57600"/>
           </a:xfrm>
           <a:prstGeom prst="rect">
@@ -4391,14 +4394,14 @@
       </p:sp>
       <p:sp>
         <p:nvSpPr>
-          <p:cNvPr id="364" name="t364"/>
-          <p:cNvSpPr txBox="1"/>
-          <p:nvPr/>
-        </p:nvSpPr>
-        <p:spPr>
-          <a:xfrm>
-            <a:off x="341999" y="1015200"/>
-            <a:ext cx="5274001" cy="270000"/>
+          <p:cNvPr id="7" name="t7"/>
+          <p:cNvSpPr txBox="1"/>
+          <p:nvPr/>
+        </p:nvSpPr>
+        <p:spPr>
+          <a:xfrm>
+            <a:off x="341999" y="1022400"/>
+            <a:ext cx="5274001" cy="280800"/>
           </a:xfrm>
           <a:prstGeom prst="rect">
             <a:avLst/>
@@ -4418,7 +4421,7 @@
                 <a:solidFill>
                   <a:srgbClr val="EAF0FF"/>
                 </a:solidFill>
-                <a:latin typeface="+mj-lt"/>
+                <a:latin typeface="Calibri"/>
               </a:rPr>
               <a:t>02 – VR/AR: tushuncha va texnologiya</a:t>
             </a:r>
@@ -4427,15 +4430,15 @@
       </p:sp>
       <p:sp>
         <p:nvSpPr>
-          <p:cNvPr id="365" name="r365"/>
-          <p:cNvSpPr>
-            <a:spLocks noGrp="1"/>
-          </p:cNvSpPr>
-          <p:nvPr/>
-        </p:nvSpPr>
-        <p:spPr>
-          <a:xfrm>
-            <a:off x="216000" y="1389600"/>
+          <p:cNvPr id="8" name="r8"/>
+          <p:cNvSpPr>
+            <a:spLocks noGrp="1"/>
+          </p:cNvSpPr>
+          <p:nvPr/>
+        </p:nvSpPr>
+        <p:spPr>
+          <a:xfrm>
+            <a:off x="216000" y="1404000"/>
             <a:ext cx="57600" cy="57600"/>
           </a:xfrm>
           <a:prstGeom prst="rect">
@@ -4456,14 +4459,14 @@
       </p:sp>
       <p:sp>
         <p:nvSpPr>
-          <p:cNvPr id="366" name="t366"/>
-          <p:cNvSpPr txBox="1"/>
-          <p:nvPr/>
-        </p:nvSpPr>
-        <p:spPr>
-          <a:xfrm>
-            <a:off x="341999" y="1310400"/>
-            <a:ext cx="5274001" cy="270000"/>
+          <p:cNvPr id="9" name="t9"/>
+          <p:cNvSpPr txBox="1"/>
+          <p:nvPr/>
+        </p:nvSpPr>
+        <p:spPr>
+          <a:xfrm>
+            <a:off x="341999" y="1324800"/>
+            <a:ext cx="5274001" cy="280800"/>
           </a:xfrm>
           <a:prstGeom prst="rect">
             <a:avLst/>
@@ -4483,7 +4486,7 @@
                 <a:solidFill>
                   <a:srgbClr val="EAF0FF"/>
                 </a:solidFill>
-                <a:latin typeface="+mj-lt"/>
+                <a:latin typeface="Calibri"/>
               </a:rPr>
               <a:t>03 – VR/AR klinik amaliyotda</a:t>
             </a:r>
@@ -4492,15 +4495,15 @@
       </p:sp>
       <p:sp>
         <p:nvSpPr>
-          <p:cNvPr id="367" name="r367"/>
-          <p:cNvSpPr>
-            <a:spLocks noGrp="1"/>
-          </p:cNvSpPr>
-          <p:nvPr/>
-        </p:nvSpPr>
-        <p:spPr>
-          <a:xfrm>
-            <a:off x="216000" y="1684800"/>
+          <p:cNvPr id="10" name="r10"/>
+          <p:cNvSpPr>
+            <a:spLocks noGrp="1"/>
+          </p:cNvSpPr>
+          <p:nvPr/>
+        </p:nvSpPr>
+        <p:spPr>
+          <a:xfrm>
+            <a:off x="216000" y="1706400"/>
             <a:ext cx="57600" cy="57600"/>
           </a:xfrm>
           <a:prstGeom prst="rect">
@@ -4521,14 +4524,14 @@
       </p:sp>
       <p:sp>
         <p:nvSpPr>
-          <p:cNvPr id="368" name="t368"/>
-          <p:cNvSpPr txBox="1"/>
-          <p:nvPr/>
-        </p:nvSpPr>
-        <p:spPr>
-          <a:xfrm>
-            <a:off x="341999" y="1605600"/>
-            <a:ext cx="5274001" cy="270000"/>
+          <p:cNvPr id="11" name="t11"/>
+          <p:cNvSpPr txBox="1"/>
+          <p:nvPr/>
+        </p:nvSpPr>
+        <p:spPr>
+          <a:xfrm>
+            <a:off x="341999" y="1627200"/>
+            <a:ext cx="5274001" cy="280800"/>
           </a:xfrm>
           <a:prstGeom prst="rect">
             <a:avLst/>
@@ -4548,7 +4551,7 @@
                 <a:solidFill>
                   <a:srgbClr val="EAF0FF"/>
                 </a:solidFill>
-                <a:latin typeface="+mj-lt"/>
+                <a:latin typeface="Calibri"/>
               </a:rPr>
               <a:t>04 – Sun'iy intellekt (AI) asoslari</a:t>
             </a:r>
@@ -4557,7 +4560,7 @@
       </p:sp>
       <p:sp>
         <p:nvSpPr>
-          <p:cNvPr id="369" name="r369"/>
+          <p:cNvPr id="12" name="r12"/>
           <p:cNvSpPr>
             <a:spLocks noGrp="1"/>
           </p:cNvSpPr>
@@ -4586,14 +4589,14 @@
       </p:sp>
       <p:sp>
         <p:nvSpPr>
-          <p:cNvPr id="370" name="t370"/>
+          <p:cNvPr id="13" name="t13"/>
           <p:cNvSpPr txBox="1"/>
           <p:nvPr/>
         </p:nvSpPr>
         <p:spPr>
           <a:xfrm>
             <a:off x="6245999" y="720000"/>
-            <a:ext cx="5634001" cy="270000"/>
+            <a:ext cx="5634001" cy="280800"/>
           </a:xfrm>
           <a:prstGeom prst="rect">
             <a:avLst/>
@@ -4613,7 +4616,7 @@
                 <a:solidFill>
                   <a:srgbClr val="EAF0FF"/>
                 </a:solidFill>
-                <a:latin typeface="+mj-lt"/>
+                <a:latin typeface="Calibri"/>
               </a:rPr>
               <a:t>05 – AI tashxis va davolashda</a:t>
             </a:r>
@@ -4622,15 +4625,15 @@
       </p:sp>
       <p:sp>
         <p:nvSpPr>
-          <p:cNvPr id="371" name="r371"/>
-          <p:cNvSpPr>
-            <a:spLocks noGrp="1"/>
-          </p:cNvSpPr>
-          <p:nvPr/>
-        </p:nvSpPr>
-        <p:spPr>
-          <a:xfrm>
-            <a:off x="6120000" y="1094400"/>
+          <p:cNvPr id="14" name="r14"/>
+          <p:cNvSpPr>
+            <a:spLocks noGrp="1"/>
+          </p:cNvSpPr>
+          <p:nvPr/>
+        </p:nvSpPr>
+        <p:spPr>
+          <a:xfrm>
+            <a:off x="6120000" y="1101600"/>
             <a:ext cx="57600" cy="57600"/>
           </a:xfrm>
           <a:prstGeom prst="rect">
@@ -4651,14 +4654,14 @@
       </p:sp>
       <p:sp>
         <p:nvSpPr>
-          <p:cNvPr id="372" name="t372"/>
-          <p:cNvSpPr txBox="1"/>
-          <p:nvPr/>
-        </p:nvSpPr>
-        <p:spPr>
-          <a:xfrm>
-            <a:off x="6245999" y="1015200"/>
-            <a:ext cx="5634001" cy="270000"/>
+          <p:cNvPr id="15" name="t15"/>
+          <p:cNvSpPr txBox="1"/>
+          <p:nvPr/>
+        </p:nvSpPr>
+        <p:spPr>
+          <a:xfrm>
+            <a:off x="6245999" y="1022400"/>
+            <a:ext cx="5634001" cy="280800"/>
           </a:xfrm>
           <a:prstGeom prst="rect">
             <a:avLst/>
@@ -4678,7 +4681,7 @@
                 <a:solidFill>
                   <a:srgbClr val="EAF0FF"/>
                 </a:solidFill>
-                <a:latin typeface="+mj-lt"/>
+                <a:latin typeface="Calibri"/>
               </a:rPr>
               <a:t>06 – Telemeditsina imkoniyatlari</a:t>
             </a:r>
@@ -4687,15 +4690,15 @@
       </p:sp>
       <p:sp>
         <p:nvSpPr>
-          <p:cNvPr id="373" name="r373"/>
-          <p:cNvSpPr>
-            <a:spLocks noGrp="1"/>
-          </p:cNvSpPr>
-          <p:nvPr/>
-        </p:nvSpPr>
-        <p:spPr>
-          <a:xfrm>
-            <a:off x="6120000" y="1389600"/>
+          <p:cNvPr id="16" name="r16"/>
+          <p:cNvSpPr>
+            <a:spLocks noGrp="1"/>
+          </p:cNvSpPr>
+          <p:nvPr/>
+        </p:nvSpPr>
+        <p:spPr>
+          <a:xfrm>
+            <a:off x="6120000" y="1404000"/>
             <a:ext cx="57600" cy="57600"/>
           </a:xfrm>
           <a:prstGeom prst="rect">
@@ -4716,14 +4719,14 @@
       </p:sp>
       <p:sp>
         <p:nvSpPr>
-          <p:cNvPr id="374" name="t374"/>
-          <p:cNvSpPr txBox="1"/>
-          <p:nvPr/>
-        </p:nvSpPr>
-        <p:spPr>
-          <a:xfrm>
-            <a:off x="6245999" y="1310400"/>
-            <a:ext cx="5634001" cy="270000"/>
+          <p:cNvPr id="17" name="t17"/>
+          <p:cNvSpPr txBox="1"/>
+          <p:nvPr/>
+        </p:nvSpPr>
+        <p:spPr>
+          <a:xfrm>
+            <a:off x="6245999" y="1324800"/>
+            <a:ext cx="5634001" cy="280800"/>
           </a:xfrm>
           <a:prstGeom prst="rect">
             <a:avLst/>
@@ -4743,7 +4746,7 @@
                 <a:solidFill>
                   <a:srgbClr val="EAF0FF"/>
                 </a:solidFill>
-                <a:latin typeface="+mj-lt"/>
+                <a:latin typeface="Calibri"/>
               </a:rPr>
               <a:t>07 – Telereabilitatsiya</a:t>
             </a:r>
@@ -4752,15 +4755,15 @@
       </p:sp>
       <p:sp>
         <p:nvSpPr>
-          <p:cNvPr id="375" name="r375"/>
-          <p:cNvSpPr>
-            <a:spLocks noGrp="1"/>
-          </p:cNvSpPr>
-          <p:nvPr/>
-        </p:nvSpPr>
-        <p:spPr>
-          <a:xfrm>
-            <a:off x="6120000" y="1684800"/>
+          <p:cNvPr id="18" name="r18"/>
+          <p:cNvSpPr>
+            <a:spLocks noGrp="1"/>
+          </p:cNvSpPr>
+          <p:nvPr/>
+        </p:nvSpPr>
+        <p:spPr>
+          <a:xfrm>
+            <a:off x="6120000" y="1706400"/>
             <a:ext cx="57600" cy="57600"/>
           </a:xfrm>
           <a:prstGeom prst="rect">
@@ -4781,14 +4784,14 @@
       </p:sp>
       <p:sp>
         <p:nvSpPr>
-          <p:cNvPr id="376" name="t376"/>
-          <p:cNvSpPr txBox="1"/>
-          <p:nvPr/>
-        </p:nvSpPr>
-        <p:spPr>
-          <a:xfrm>
-            <a:off x="6245999" y="1605600"/>
-            <a:ext cx="5634001" cy="270000"/>
+          <p:cNvPr id="19" name="t19"/>
+          <p:cNvSpPr txBox="1"/>
+          <p:nvPr/>
+        </p:nvSpPr>
+        <p:spPr>
+          <a:xfrm>
+            <a:off x="6245999" y="1627200"/>
+            <a:ext cx="5634001" cy="280800"/>
           </a:xfrm>
           <a:prstGeom prst="rect">
             <a:avLst/>
@@ -4808,7 +4811,7 @@
                 <a:solidFill>
                   <a:srgbClr val="EAF0FF"/>
                 </a:solidFill>
-                <a:latin typeface="+mj-lt"/>
+                <a:latin typeface="Calibri"/>
               </a:rPr>
               <a:t>08 – Afzalliklar, chaqiriqlar, istiqbol</a:t>
             </a:r>
@@ -4836,7 +4839,7 @@
     </p:bg>
     <p:spTree>
       <p:nvGrpSpPr>
-        <p:cNvPr id="1" name=""/>
+        <p:cNvPr id="1" name="slide"/>
         <p:cNvGrpSpPr/>
         <p:nvPr/>
       </p:nvGrpSpPr>
@@ -4850,7 +4853,7 @@
       </p:grpSpPr>
       <p:sp>
         <p:nvSpPr>
-          <p:cNvPr id="377" name="r377"/>
+          <p:cNvPr id="2" name="r2"/>
           <p:cNvSpPr>
             <a:spLocks noGrp="1"/>
           </p:cNvSpPr>
@@ -4879,7 +4882,7 @@
       </p:sp>
       <p:sp>
         <p:nvSpPr>
-          <p:cNvPr id="378" name="t378"/>
+          <p:cNvPr id="3" name="t3"/>
           <p:cNvSpPr txBox="1"/>
           <p:nvPr/>
         </p:nvSpPr>
@@ -4906,7 +4909,7 @@
                 <a:solidFill>
                   <a:srgbClr val="FFFFFF"/>
                 </a:solidFill>
-                <a:latin typeface="+mj-lt"/>
+                <a:latin typeface="Calibri"/>
               </a:rPr>
               <a:t>01 · RAQAMLI TIBBIYOT INQILOBI</a:t>
             </a:r>
@@ -4915,7 +4918,7 @@
       </p:sp>
       <p:sp>
         <p:nvSpPr>
-          <p:cNvPr id="379" name="r379"/>
+          <p:cNvPr id="4" name="r4"/>
           <p:cNvSpPr>
             <a:spLocks noGrp="1"/>
           </p:cNvSpPr>
@@ -4944,7 +4947,7 @@
       </p:sp>
       <p:sp>
         <p:nvSpPr>
-          <p:cNvPr id="380" name="t380"/>
+          <p:cNvPr id="5" name="t5"/>
           <p:cNvSpPr txBox="1"/>
           <p:nvPr/>
         </p:nvSpPr>
@@ -4971,7 +4974,7 @@
                 <a:solidFill>
                   <a:srgbClr val="EAF0FF"/>
                 </a:solidFill>
-                <a:latin typeface="+mj-lt"/>
+                <a:latin typeface="Calibri"/>
               </a:rPr>
               <a:t>Tibbiyot an'anaviy modeldan ma'lumotlarga asoslangan,</a:t>
             </a:r>
@@ -4983,7 +4986,7 @@
                 <a:solidFill>
                   <a:srgbClr val="EAF0FF"/>
                 </a:solidFill>
-                <a:latin typeface="+mj-lt"/>
+                <a:latin typeface="Calibri"/>
               </a:rPr>
               <a:t>bemorga yo'naltirilgan va masofadan boshqariladigan</a:t>
             </a:r>
@@ -4995,7 +4998,7 @@
                 <a:solidFill>
                   <a:srgbClr val="EAF0FF"/>
                 </a:solidFill>
-                <a:latin typeface="+mj-lt"/>
+                <a:latin typeface="Calibri"/>
               </a:rPr>
               <a:t>tizimga o'tmoqda. VR/AR, AI va telemeditsina — uch ustun.</a:t>
             </a:r>
@@ -5004,7 +5007,7 @@
       </p:sp>
       <p:sp>
         <p:nvSpPr>
-          <p:cNvPr id="381" name="t381"/>
+          <p:cNvPr id="6" name="t6"/>
           <p:cNvSpPr txBox="1"/>
           <p:nvPr/>
         </p:nvSpPr>
@@ -5031,7 +5034,7 @@
                 <a:solidFill>
                   <a:srgbClr val="22E6FF"/>
                 </a:solidFill>
-                <a:latin typeface="+mj-lt"/>
+                <a:latin typeface="Calibri"/>
               </a:rPr>
               <a:t>Aniqlik  ·  Profilaktika  ·  Masofaviy g'amxo'rlik</a:t>
             </a:r>
@@ -5040,7 +5043,7 @@
       </p:sp>
       <p:sp>
         <p:nvSpPr>
-          <p:cNvPr id="382" name="r382"/>
+          <p:cNvPr id="7" name="r7"/>
           <p:cNvSpPr>
             <a:spLocks noGrp="1"/>
           </p:cNvSpPr>
@@ -5069,7 +5072,7 @@
       </p:sp>
       <p:sp>
         <p:nvSpPr>
-          <p:cNvPr id="383" name="t383"/>
+          <p:cNvPr id="8" name="t8"/>
           <p:cNvSpPr txBox="1"/>
           <p:nvPr/>
         </p:nvSpPr>
@@ -5096,7 +5099,7 @@
                 <a:solidFill>
                   <a:srgbClr val="FFFFFF"/>
                 </a:solidFill>
-                <a:latin typeface="+mj-lt"/>
+                <a:latin typeface="Calibri"/>
               </a:rPr>
               <a:t>Nega aynan hozir?</a:t>
             </a:r>
@@ -5105,15 +5108,15 @@
       </p:sp>
       <p:sp>
         <p:nvSpPr>
-          <p:cNvPr id="384" name="r384"/>
-          <p:cNvSpPr>
-            <a:spLocks noGrp="1"/>
-          </p:cNvSpPr>
-          <p:nvPr/>
-        </p:nvSpPr>
-        <p:spPr>
-          <a:xfrm>
-            <a:off x="6623999" y="1303200"/>
+          <p:cNvPr id="9" name="r9"/>
+          <p:cNvSpPr>
+            <a:spLocks noGrp="1"/>
+          </p:cNvSpPr>
+          <p:nvPr/>
+        </p:nvSpPr>
+        <p:spPr>
+          <a:xfrm>
+            <a:off x="6623999" y="1339200"/>
             <a:ext cx="57600" cy="57600"/>
           </a:xfrm>
           <a:prstGeom prst="rect">
@@ -5134,14 +5137,14 @@
       </p:sp>
       <p:sp>
         <p:nvSpPr>
-          <p:cNvPr id="385" name="t385"/>
-          <p:cNvSpPr txBox="1"/>
-          <p:nvPr/>
-        </p:nvSpPr>
-        <p:spPr>
-          <a:xfrm>
-            <a:off x="6749998" y="1224000"/>
-            <a:ext cx="4914001" cy="270000"/>
+          <p:cNvPr id="10" name="t10"/>
+          <p:cNvSpPr txBox="1"/>
+          <p:nvPr/>
+        </p:nvSpPr>
+        <p:spPr>
+          <a:xfrm>
+            <a:off x="6749998" y="1260000"/>
+            <a:ext cx="4914001" cy="280800"/>
           </a:xfrm>
           <a:prstGeom prst="rect">
             <a:avLst/>
@@ -5161,7 +5164,7 @@
                 <a:solidFill>
                   <a:srgbClr val="EAF0FF"/>
                 </a:solidFill>
-                <a:latin typeface="+mj-lt"/>
+                <a:latin typeface="Calibri"/>
               </a:rPr>
               <a:t>Hisoblash quvvati va bulutli xizmatlar</a:t>
             </a:r>
@@ -5170,15 +5173,15 @@
       </p:sp>
       <p:sp>
         <p:nvSpPr>
-          <p:cNvPr id="386" name="r386"/>
-          <p:cNvSpPr>
-            <a:spLocks noGrp="1"/>
-          </p:cNvSpPr>
-          <p:nvPr/>
-        </p:nvSpPr>
-        <p:spPr>
-          <a:xfrm>
-            <a:off x="6623999" y="1598400"/>
+          <p:cNvPr id="11" name="r11"/>
+          <p:cNvSpPr>
+            <a:spLocks noGrp="1"/>
+          </p:cNvSpPr>
+          <p:nvPr/>
+        </p:nvSpPr>
+        <p:spPr>
+          <a:xfrm>
+            <a:off x="6623999" y="1641600"/>
             <a:ext cx="57600" cy="57600"/>
           </a:xfrm>
           <a:prstGeom prst="rect">
@@ -5199,14 +5202,14 @@
       </p:sp>
       <p:sp>
         <p:nvSpPr>
-          <p:cNvPr id="387" name="t387"/>
-          <p:cNvSpPr txBox="1"/>
-          <p:nvPr/>
-        </p:nvSpPr>
-        <p:spPr>
-          <a:xfrm>
-            <a:off x="6749998" y="1519200"/>
-            <a:ext cx="4914001" cy="270000"/>
+          <p:cNvPr id="12" name="t12"/>
+          <p:cNvSpPr txBox="1"/>
+          <p:nvPr/>
+        </p:nvSpPr>
+        <p:spPr>
+          <a:xfrm>
+            <a:off x="6749998" y="1562400"/>
+            <a:ext cx="4914001" cy="280800"/>
           </a:xfrm>
           <a:prstGeom prst="rect">
             <a:avLst/>
@@ -5226,7 +5229,7 @@
                 <a:solidFill>
                   <a:srgbClr val="EAF0FF"/>
                 </a:solidFill>
-                <a:latin typeface="+mj-lt"/>
+                <a:latin typeface="Calibri"/>
               </a:rPr>
               <a:t>Katta tibbiy ma'lumotlar (Big Data)</a:t>
             </a:r>
@@ -5235,15 +5238,15 @@
       </p:sp>
       <p:sp>
         <p:nvSpPr>
-          <p:cNvPr id="388" name="r388"/>
-          <p:cNvSpPr>
-            <a:spLocks noGrp="1"/>
-          </p:cNvSpPr>
-          <p:nvPr/>
-        </p:nvSpPr>
-        <p:spPr>
-          <a:xfrm>
-            <a:off x="6623999" y="1893600"/>
+          <p:cNvPr id="13" name="r13"/>
+          <p:cNvSpPr>
+            <a:spLocks noGrp="1"/>
+          </p:cNvSpPr>
+          <p:nvPr/>
+        </p:nvSpPr>
+        <p:spPr>
+          <a:xfrm>
+            <a:off x="6623999" y="1944000"/>
             <a:ext cx="57600" cy="57600"/>
           </a:xfrm>
           <a:prstGeom prst="rect">
@@ -5264,14 +5267,14 @@
       </p:sp>
       <p:sp>
         <p:nvSpPr>
-          <p:cNvPr id="389" name="t389"/>
-          <p:cNvSpPr txBox="1"/>
-          <p:nvPr/>
-        </p:nvSpPr>
-        <p:spPr>
-          <a:xfrm>
-            <a:off x="6749998" y="1814400"/>
-            <a:ext cx="4914001" cy="270000"/>
+          <p:cNvPr id="14" name="t14"/>
+          <p:cNvSpPr txBox="1"/>
+          <p:nvPr/>
+        </p:nvSpPr>
+        <p:spPr>
+          <a:xfrm>
+            <a:off x="6749998" y="1864800"/>
+            <a:ext cx="4914001" cy="280800"/>
           </a:xfrm>
           <a:prstGeom prst="rect">
             <a:avLst/>
@@ -5291,7 +5294,7 @@
                 <a:solidFill>
                   <a:srgbClr val="EAF0FF"/>
                 </a:solidFill>
-                <a:latin typeface="+mj-lt"/>
+                <a:latin typeface="Calibri"/>
               </a:rPr>
               <a:t>5G va kiyiladigan qurilmalar</a:t>
             </a:r>
@@ -5300,15 +5303,15 @@
       </p:sp>
       <p:sp>
         <p:nvSpPr>
-          <p:cNvPr id="390" name="r390"/>
-          <p:cNvSpPr>
-            <a:spLocks noGrp="1"/>
-          </p:cNvSpPr>
-          <p:nvPr/>
-        </p:nvSpPr>
-        <p:spPr>
-          <a:xfrm>
-            <a:off x="6623999" y="2188800"/>
+          <p:cNvPr id="15" name="r15"/>
+          <p:cNvSpPr>
+            <a:spLocks noGrp="1"/>
+          </p:cNvSpPr>
+          <p:nvPr/>
+        </p:nvSpPr>
+        <p:spPr>
+          <a:xfrm>
+            <a:off x="6623999" y="2246400"/>
             <a:ext cx="57600" cy="57600"/>
           </a:xfrm>
           <a:prstGeom prst="rect">
@@ -5329,14 +5332,14 @@
       </p:sp>
       <p:sp>
         <p:nvSpPr>
-          <p:cNvPr id="391" name="t391"/>
-          <p:cNvSpPr txBox="1"/>
-          <p:nvPr/>
-        </p:nvSpPr>
-        <p:spPr>
-          <a:xfrm>
-            <a:off x="6749998" y="2109600"/>
-            <a:ext cx="4914001" cy="270000"/>
+          <p:cNvPr id="16" name="t16"/>
+          <p:cNvSpPr txBox="1"/>
+          <p:nvPr/>
+        </p:nvSpPr>
+        <p:spPr>
+          <a:xfrm>
+            <a:off x="6749998" y="2167200"/>
+            <a:ext cx="4914001" cy="280800"/>
           </a:xfrm>
           <a:prstGeom prst="rect">
             <a:avLst/>
@@ -5356,7 +5359,7 @@
                 <a:solidFill>
                   <a:srgbClr val="EAF0FF"/>
                 </a:solidFill>
-                <a:latin typeface="+mj-lt"/>
+                <a:latin typeface="Calibri"/>
               </a:rPr>
               <a:t>Pandemiyadan keyingi raqamli talab</a:t>
             </a:r>
@@ -5384,7 +5387,7 @@
     </p:bg>
     <p:spTree>
       <p:nvGrpSpPr>
-        <p:cNvPr id="1" name=""/>
+        <p:cNvPr id="1" name="slide"/>
         <p:cNvGrpSpPr/>
         <p:nvPr/>
       </p:nvGrpSpPr>
@@ -5398,7 +5401,7 @@
       </p:grpSpPr>
       <p:sp>
         <p:nvSpPr>
-          <p:cNvPr id="392" name="r392"/>
+          <p:cNvPr id="2" name="r2"/>
           <p:cNvSpPr>
             <a:spLocks noGrp="1"/>
           </p:cNvSpPr>
@@ -5427,7 +5430,7 @@
       </p:sp>
       <p:sp>
         <p:nvSpPr>
-          <p:cNvPr id="393" name="t393"/>
+          <p:cNvPr id="3" name="t3"/>
           <p:cNvSpPr txBox="1"/>
           <p:nvPr/>
         </p:nvSpPr>
@@ -5454,7 +5457,7 @@
                 <a:solidFill>
                   <a:srgbClr val="FFFFFF"/>
                 </a:solidFill>
-                <a:latin typeface="+mj-lt"/>
+                <a:latin typeface="Calibri"/>
               </a:rPr>
               <a:t>02 · VIRTUAL VA KENGAYTIRILGAN REALLIK</a:t>
             </a:r>
@@ -5463,7 +5466,7 @@
       </p:sp>
       <p:sp>
         <p:nvSpPr>
-          <p:cNvPr id="394" name="r394"/>
+          <p:cNvPr id="4" name="r4"/>
           <p:cNvSpPr>
             <a:spLocks noGrp="1"/>
           </p:cNvSpPr>
@@ -5492,7 +5495,7 @@
       </p:sp>
       <p:sp>
         <p:nvSpPr>
-          <p:cNvPr id="395" name="r395"/>
+          <p:cNvPr id="5" name="r5"/>
           <p:cNvSpPr>
             <a:spLocks noGrp="1"/>
           </p:cNvSpPr>
@@ -5521,7 +5524,7 @@
       </p:sp>
       <p:sp>
         <p:nvSpPr>
-          <p:cNvPr id="396" name="t396"/>
+          <p:cNvPr id="6" name="t6"/>
           <p:cNvSpPr txBox="1"/>
           <p:nvPr/>
         </p:nvSpPr>
@@ -5548,7 +5551,7 @@
                 <a:solidFill>
                   <a:srgbClr val="FFFFFF"/>
                 </a:solidFill>
-                <a:latin typeface="+mj-lt"/>
+                <a:latin typeface="Calibri"/>
               </a:rPr>
               <a:t>VR — Virtual reallik</a:t>
             </a:r>
@@ -5557,14 +5560,14 @@
       </p:sp>
       <p:sp>
         <p:nvSpPr>
-          <p:cNvPr id="397" name="t397"/>
-          <p:cNvSpPr txBox="1"/>
-          <p:nvPr/>
-        </p:nvSpPr>
-        <p:spPr>
-          <a:xfrm>
-            <a:off x="288000" y="1188000"/>
-            <a:ext cx="3600000" cy="558000"/>
+          <p:cNvPr id="7" name="t7"/>
+          <p:cNvSpPr txBox="1"/>
+          <p:nvPr/>
+        </p:nvSpPr>
+        <p:spPr>
+          <a:xfrm>
+            <a:off x="288000" y="1206000"/>
+            <a:ext cx="3600000" cy="540000"/>
           </a:xfrm>
           <a:prstGeom prst="rect">
             <a:avLst/>
@@ -5584,16 +5587,16 @@
                 <a:solidFill>
                   <a:srgbClr val="9AA6D6"/>
                 </a:solidFill>
-                <a:latin typeface="+mj-lt"/>
-              </a:rPr>
-              <a:t>Foydalanuvchini to'liq raqamli muhitga botiradi. Trening va simulyatsiya uchun ideal.</a:t>
-            </a:r>
-          </a:p>
-        </p:txBody>
-      </p:sp>
-      <p:sp>
-        <p:nvSpPr>
-          <p:cNvPr id="398" name="r398"/>
+                <a:latin typeface="Calibri"/>
+              </a:rPr>
+              <a:t>Foydalanuvchini to'liq raqamli muhitga botiradi. Trening uchun ideal.</a:t>
+            </a:r>
+          </a:p>
+        </p:txBody>
+      </p:sp>
+      <p:sp>
+        <p:nvSpPr>
+          <p:cNvPr id="8" name="r8"/>
           <p:cNvSpPr>
             <a:spLocks noGrp="1"/>
           </p:cNvSpPr>
@@ -5622,7 +5625,7 @@
       </p:sp>
       <p:sp>
         <p:nvSpPr>
-          <p:cNvPr id="399" name="r399"/>
+          <p:cNvPr id="9" name="r9"/>
           <p:cNvSpPr>
             <a:spLocks noGrp="1"/>
           </p:cNvSpPr>
@@ -5651,7 +5654,7 @@
       </p:sp>
       <p:sp>
         <p:nvSpPr>
-          <p:cNvPr id="400" name="t400"/>
+          <p:cNvPr id="10" name="t10"/>
           <p:cNvSpPr txBox="1"/>
           <p:nvPr/>
         </p:nvSpPr>
@@ -5678,7 +5681,7 @@
                 <a:solidFill>
                   <a:srgbClr val="FFFFFF"/>
                 </a:solidFill>
-                <a:latin typeface="+mj-lt"/>
+                <a:latin typeface="Calibri"/>
               </a:rPr>
               <a:t>AR — Kengaytirilgan reallik</a:t>
             </a:r>
@@ -5687,14 +5690,14 @@
       </p:sp>
       <p:sp>
         <p:nvSpPr>
-          <p:cNvPr id="401" name="t401"/>
-          <p:cNvSpPr txBox="1"/>
-          <p:nvPr/>
-        </p:nvSpPr>
-        <p:spPr>
-          <a:xfrm>
-            <a:off x="4284000" y="1188000"/>
-            <a:ext cx="3600000" cy="558000"/>
+          <p:cNvPr id="11" name="t11"/>
+          <p:cNvSpPr txBox="1"/>
+          <p:nvPr/>
+        </p:nvSpPr>
+        <p:spPr>
+          <a:xfrm>
+            <a:off x="4284000" y="1206000"/>
+            <a:ext cx="3600000" cy="540000"/>
           </a:xfrm>
           <a:prstGeom prst="rect">
             <a:avLst/>
@@ -5714,16 +5717,16 @@
                 <a:solidFill>
                   <a:srgbClr val="9AA6D6"/>
                 </a:solidFill>
-                <a:latin typeface="+mj-lt"/>
-              </a:rPr>
-              <a:t>Real dunyo ustiga raqamli ma'lumot qo'shadi — masalan operatsiya paytida.</a:t>
-            </a:r>
-          </a:p>
-        </p:txBody>
-      </p:sp>
-      <p:sp>
-        <p:nvSpPr>
-          <p:cNvPr id="402" name="r402"/>
+                <a:latin typeface="Calibri"/>
+              </a:rPr>
+              <a:t>Real dunyo ustiga raqamli ma'lumot qo'shadi — operatsiyada.</a:t>
+            </a:r>
+          </a:p>
+        </p:txBody>
+      </p:sp>
+      <p:sp>
+        <p:nvSpPr>
+          <p:cNvPr id="12" name="r12"/>
           <p:cNvSpPr>
             <a:spLocks noGrp="1"/>
           </p:cNvSpPr>
@@ -5752,7 +5755,7 @@
       </p:sp>
       <p:sp>
         <p:nvSpPr>
-          <p:cNvPr id="403" name="r403"/>
+          <p:cNvPr id="13" name="r13"/>
           <p:cNvSpPr>
             <a:spLocks noGrp="1"/>
           </p:cNvSpPr>
@@ -5781,7 +5784,7 @@
       </p:sp>
       <p:sp>
         <p:nvSpPr>
-          <p:cNvPr id="404" name="t404"/>
+          <p:cNvPr id="14" name="t14"/>
           <p:cNvSpPr txBox="1"/>
           <p:nvPr/>
         </p:nvSpPr>
@@ -5808,7 +5811,7 @@
                 <a:solidFill>
                   <a:srgbClr val="FFFFFF"/>
                 </a:solidFill>
-                <a:latin typeface="+mj-lt"/>
+                <a:latin typeface="Calibri"/>
               </a:rPr>
               <a:t>MR — Aralash reallik</a:t>
             </a:r>
@@ -5817,14 +5820,14 @@
       </p:sp>
       <p:sp>
         <p:nvSpPr>
-          <p:cNvPr id="405" name="t405"/>
-          <p:cNvSpPr txBox="1"/>
-          <p:nvPr/>
-        </p:nvSpPr>
-        <p:spPr>
-          <a:xfrm>
-            <a:off x="8280000" y="1188000"/>
-            <a:ext cx="3600000" cy="558000"/>
+          <p:cNvPr id="15" name="t15"/>
+          <p:cNvSpPr txBox="1"/>
+          <p:nvPr/>
+        </p:nvSpPr>
+        <p:spPr>
+          <a:xfrm>
+            <a:off x="8280000" y="1206000"/>
+            <a:ext cx="3600000" cy="540000"/>
           </a:xfrm>
           <a:prstGeom prst="rect">
             <a:avLst/>
@@ -5844,16 +5847,16 @@
                 <a:solidFill>
                   <a:srgbClr val="9AA6D6"/>
                 </a:solidFill>
-                <a:latin typeface="+mj-lt"/>
-              </a:rPr>
-              <a:t>VR va AR sintezi: virtual ob'ektlar real muhit bilan o'zaro ta'sirlashadi.</a:t>
-            </a:r>
-          </a:p>
-        </p:txBody>
-      </p:sp>
-      <p:sp>
-        <p:nvSpPr>
-          <p:cNvPr id="406" name="r406"/>
+                <a:latin typeface="Calibri"/>
+              </a:rPr>
+              <a:t>VR va AR sintezi: virtual ob'ektlar real muhit bilan ta'sirlashadi.</a:t>
+            </a:r>
+          </a:p>
+        </p:txBody>
+      </p:sp>
+      <p:sp>
+        <p:nvSpPr>
+          <p:cNvPr id="16" name="r16"/>
           <p:cNvSpPr>
             <a:spLocks noGrp="1"/>
           </p:cNvSpPr>
@@ -5882,7 +5885,7 @@
       </p:sp>
       <p:sp>
         <p:nvSpPr>
-          <p:cNvPr id="407" name="t407"/>
+          <p:cNvPr id="17" name="t17"/>
           <p:cNvSpPr txBox="1"/>
           <p:nvPr/>
         </p:nvSpPr>
@@ -5905,11 +5908,11 @@
           <a:p>
             <a:pPr algn="ctr" indent="0" marL="0"/>
             <a:r>
-              <a:rPr lang="uz-UZ" sz="2200" b="1" dirty="0" smtClean="0">
+              <a:rPr lang="uz-UZ" sz="2000" b="1" dirty="0" smtClean="0">
                 <a:solidFill>
                   <a:srgbClr val="22E6FF"/>
                 </a:solidFill>
-                <a:latin typeface="+mj-lt"/>
+                <a:latin typeface="Calibri"/>
               </a:rPr>
               <a:t>3D</a:t>
             </a:r>
@@ -5918,7 +5921,7 @@
       </p:sp>
       <p:sp>
         <p:nvSpPr>
-          <p:cNvPr id="408" name="t408"/>
+          <p:cNvPr id="18" name="t18"/>
           <p:cNvSpPr txBox="1"/>
           <p:nvPr/>
         </p:nvSpPr>
@@ -5945,7 +5948,7 @@
                 <a:solidFill>
                   <a:srgbClr val="9AA6D6"/>
                 </a:solidFill>
-                <a:latin typeface="+mj-lt"/>
+                <a:latin typeface="Calibri"/>
               </a:rPr>
               <a:t>Anatomiyani hajmli o'rganish</a:t>
             </a:r>
@@ -5954,7 +5957,7 @@
       </p:sp>
       <p:sp>
         <p:nvSpPr>
-          <p:cNvPr id="409" name="r409"/>
+          <p:cNvPr id="19" name="r19"/>
           <p:cNvSpPr>
             <a:spLocks noGrp="1"/>
           </p:cNvSpPr>
@@ -5983,7 +5986,7 @@
       </p:sp>
       <p:sp>
         <p:nvSpPr>
-          <p:cNvPr id="410" name="t410"/>
+          <p:cNvPr id="20" name="t20"/>
           <p:cNvSpPr txBox="1"/>
           <p:nvPr/>
         </p:nvSpPr>
@@ -6006,11 +6009,11 @@
           <a:p>
             <a:pPr algn="ctr" indent="0" marL="0"/>
             <a:r>
-              <a:rPr lang="uz-UZ" sz="2200" b="1" dirty="0" smtClean="0">
+              <a:rPr lang="uz-UZ" sz="2000" b="1" dirty="0" smtClean="0">
                 <a:solidFill>
                   <a:srgbClr val="22E6FF"/>
                 </a:solidFill>
-                <a:latin typeface="+mj-lt"/>
+                <a:latin typeface="Calibri"/>
               </a:rPr>
               <a:t>80%</a:t>
             </a:r>
@@ -6019,7 +6022,7 @@
       </p:sp>
       <p:sp>
         <p:nvSpPr>
-          <p:cNvPr id="411" name="t411"/>
+          <p:cNvPr id="21" name="t21"/>
           <p:cNvSpPr txBox="1"/>
           <p:nvPr/>
         </p:nvSpPr>
@@ -6046,7 +6049,7 @@
                 <a:solidFill>
                   <a:srgbClr val="9AA6D6"/>
                 </a:solidFill>
-                <a:latin typeface="+mj-lt"/>
+                <a:latin typeface="Calibri"/>
               </a:rPr>
               <a:t>Bilimni eslab qolish</a:t>
             </a:r>
@@ -6055,7 +6058,7 @@
       </p:sp>
       <p:sp>
         <p:nvSpPr>
-          <p:cNvPr id="412" name="r412"/>
+          <p:cNvPr id="22" name="r22"/>
           <p:cNvSpPr>
             <a:spLocks noGrp="1"/>
           </p:cNvSpPr>
@@ -6084,7 +6087,7 @@
       </p:sp>
       <p:sp>
         <p:nvSpPr>
-          <p:cNvPr id="413" name="t413"/>
+          <p:cNvPr id="23" name="t23"/>
           <p:cNvSpPr txBox="1"/>
           <p:nvPr/>
         </p:nvSpPr>
@@ -6107,11 +6110,11 @@
           <a:p>
             <a:pPr algn="ctr" indent="0" marL="0"/>
             <a:r>
-              <a:rPr lang="uz-UZ" sz="2200" b="1" dirty="0" smtClean="0">
+              <a:rPr lang="uz-UZ" sz="2000" b="1" dirty="0" smtClean="0">
                 <a:solidFill>
                   <a:srgbClr val="22E6FF"/>
                 </a:solidFill>
-                <a:latin typeface="+mj-lt"/>
+                <a:latin typeface="Calibri"/>
               </a:rPr>
               <a:t>0 risk</a:t>
             </a:r>
@@ -6120,7 +6123,7 @@
       </p:sp>
       <p:sp>
         <p:nvSpPr>
-          <p:cNvPr id="414" name="t414"/>
+          <p:cNvPr id="24" name="t24"/>
           <p:cNvSpPr txBox="1"/>
           <p:nvPr/>
         </p:nvSpPr>
@@ -6147,7 +6150,7 @@
                 <a:solidFill>
                   <a:srgbClr val="9AA6D6"/>
                 </a:solidFill>
-                <a:latin typeface="+mj-lt"/>
+                <a:latin typeface="Calibri"/>
               </a:rPr>
               <a:t>Bemorsiz xavfsiz mashq</a:t>
             </a:r>
@@ -6175,7 +6178,7 @@
     </p:bg>
     <p:spTree>
       <p:nvGrpSpPr>
-        <p:cNvPr id="1" name=""/>
+        <p:cNvPr id="1" name="slide"/>
         <p:cNvGrpSpPr/>
         <p:nvPr/>
       </p:nvGrpSpPr>
@@ -6189,7 +6192,7 @@
       </p:grpSpPr>
       <p:sp>
         <p:nvSpPr>
-          <p:cNvPr id="415" name="r415"/>
+          <p:cNvPr id="2" name="r2"/>
           <p:cNvSpPr>
             <a:spLocks noGrp="1"/>
           </p:cNvSpPr>
@@ -6218,7 +6221,7 @@
       </p:sp>
       <p:sp>
         <p:nvSpPr>
-          <p:cNvPr id="416" name="t416"/>
+          <p:cNvPr id="3" name="t3"/>
           <p:cNvSpPr txBox="1"/>
           <p:nvPr/>
         </p:nvSpPr>
@@ -6245,7 +6248,7 @@
                 <a:solidFill>
                   <a:srgbClr val="FFFFFF"/>
                 </a:solidFill>
-                <a:latin typeface="+mj-lt"/>
+                <a:latin typeface="Calibri"/>
               </a:rPr>
               <a:t>03 · VR/AR KLINIK AMALIYOTDA</a:t>
             </a:r>
@@ -6254,7 +6257,7 @@
       </p:sp>
       <p:sp>
         <p:nvSpPr>
-          <p:cNvPr id="417" name="r417"/>
+          <p:cNvPr id="4" name="r4"/>
           <p:cNvSpPr>
             <a:spLocks noGrp="1"/>
           </p:cNvSpPr>
@@ -6283,7 +6286,7 @@
       </p:sp>
       <p:sp>
         <p:nvSpPr>
-          <p:cNvPr id="418" name="r418"/>
+          <p:cNvPr id="5" name="r5"/>
           <p:cNvSpPr>
             <a:spLocks noGrp="1"/>
           </p:cNvSpPr>
@@ -6312,13 +6315,13 @@
       </p:sp>
       <p:sp>
         <p:nvSpPr>
-          <p:cNvPr id="419" name="t419"/>
-          <p:cNvSpPr txBox="1"/>
-          <p:nvPr/>
-        </p:nvSpPr>
-        <p:spPr>
-          <a:xfrm>
-            <a:off x="288000" y="892800"/>
+          <p:cNvPr id="6" name="t6"/>
+          <p:cNvSpPr txBox="1"/>
+          <p:nvPr/>
+        </p:nvSpPr>
+        <p:spPr>
+          <a:xfrm>
+            <a:off x="288000" y="885600"/>
             <a:ext cx="5400000" cy="306000"/>
           </a:xfrm>
           <a:prstGeom prst="rect">
@@ -6337,9 +6340,9 @@
             <a:r>
               <a:rPr lang="uz-UZ" sz="1400" b="1" dirty="0" smtClean="0">
                 <a:solidFill>
-                  <a:srgbClr val="06262A"/>
-                </a:solidFill>
-                <a:latin typeface="+mj-lt"/>
+                  <a:srgbClr val="FFFFFF"/>
+                </a:solidFill>
+                <a:latin typeface="Calibri"/>
               </a:rPr>
               <a:t>Xirurgik trening va rejalashtirish</a:t>
             </a:r>
@@ -6348,13 +6351,13 @@
       </p:sp>
       <p:sp>
         <p:nvSpPr>
-          <p:cNvPr id="420" name="t420"/>
-          <p:cNvSpPr txBox="1"/>
-          <p:nvPr/>
-        </p:nvSpPr>
-        <p:spPr>
-          <a:xfrm>
-            <a:off x="288000" y="1188000"/>
+          <p:cNvPr id="7" name="t7"/>
+          <p:cNvSpPr txBox="1"/>
+          <p:nvPr/>
+        </p:nvSpPr>
+        <p:spPr>
+          <a:xfrm>
+            <a:off x="288000" y="1206000"/>
             <a:ext cx="5400000" cy="648000"/>
           </a:xfrm>
           <a:prstGeom prst="rect">
@@ -6373,9 +6376,9 @@
             <a:r>
               <a:rPr lang="uz-UZ" sz="1300" b="0" dirty="0" smtClean="0">
                 <a:solidFill>
-                  <a:srgbClr val="5E7D80"/>
-                </a:solidFill>
-                <a:latin typeface="+mj-lt"/>
+                  <a:srgbClr val="9AA6D6"/>
+                </a:solidFill>
+                <a:latin typeface="Calibri"/>
               </a:rPr>
               <a:t>Murakkab operatsiyalarni avval virtual mashq qilish, 3D rejalashtirish.</a:t>
             </a:r>
@@ -6384,7 +6387,7 @@
       </p:sp>
       <p:sp>
         <p:nvSpPr>
-          <p:cNvPr id="421" name="r421"/>
+          <p:cNvPr id="8" name="r8"/>
           <p:cNvSpPr>
             <a:spLocks noGrp="1"/>
           </p:cNvSpPr>
@@ -6413,7 +6416,7 @@
       </p:sp>
       <p:sp>
         <p:nvSpPr>
-          <p:cNvPr id="422" name="r422"/>
+          <p:cNvPr id="9" name="r9"/>
           <p:cNvSpPr>
             <a:spLocks noGrp="1"/>
           </p:cNvSpPr>
@@ -6442,13 +6445,13 @@
       </p:sp>
       <p:sp>
         <p:nvSpPr>
-          <p:cNvPr id="423" name="t423"/>
-          <p:cNvSpPr txBox="1"/>
-          <p:nvPr/>
-        </p:nvSpPr>
-        <p:spPr>
-          <a:xfrm>
-            <a:off x="6300000" y="892800"/>
+          <p:cNvPr id="10" name="t10"/>
+          <p:cNvSpPr txBox="1"/>
+          <p:nvPr/>
+        </p:nvSpPr>
+        <p:spPr>
+          <a:xfrm>
+            <a:off x="6300000" y="885600"/>
             <a:ext cx="5400000" cy="306000"/>
           </a:xfrm>
           <a:prstGeom prst="rect">
@@ -6467,9 +6470,9 @@
             <a:r>
               <a:rPr lang="uz-UZ" sz="1400" b="1" dirty="0" smtClean="0">
                 <a:solidFill>
-                  <a:srgbClr val="06262A"/>
-                </a:solidFill>
-                <a:latin typeface="+mj-lt"/>
+                  <a:srgbClr val="FFFFFF"/>
+                </a:solidFill>
+                <a:latin typeface="Calibri"/>
               </a:rPr>
               <a:t>AR navigatsiya operatsiyada</a:t>
             </a:r>
@@ -6478,13 +6481,13 @@
       </p:sp>
       <p:sp>
         <p:nvSpPr>
-          <p:cNvPr id="424" name="t424"/>
-          <p:cNvSpPr txBox="1"/>
-          <p:nvPr/>
-        </p:nvSpPr>
-        <p:spPr>
-          <a:xfrm>
-            <a:off x="6300000" y="1188000"/>
+          <p:cNvPr id="11" name="t11"/>
+          <p:cNvSpPr txBox="1"/>
+          <p:nvPr/>
+        </p:nvSpPr>
+        <p:spPr>
+          <a:xfrm>
+            <a:off x="6300000" y="1206000"/>
             <a:ext cx="5400000" cy="648000"/>
           </a:xfrm>
           <a:prstGeom prst="rect">
@@ -6503,9 +6506,9 @@
             <a:r>
               <a:rPr lang="uz-UZ" sz="1300" b="0" dirty="0" smtClean="0">
                 <a:solidFill>
-                  <a:srgbClr val="5E7D80"/>
-                </a:solidFill>
-                <a:latin typeface="+mj-lt"/>
+                  <a:srgbClr val="9AA6D6"/>
+                </a:solidFill>
+                <a:latin typeface="Calibri"/>
               </a:rPr>
               <a:t>Jarroh ko'rish maydoniga real vaqtda anatomik ma'lumot proyeksiyasi.</a:t>
             </a:r>
@@ -6514,7 +6517,7 @@
       </p:sp>
       <p:sp>
         <p:nvSpPr>
-          <p:cNvPr id="425" name="r425"/>
+          <p:cNvPr id="12" name="r12"/>
           <p:cNvSpPr>
             <a:spLocks noGrp="1"/>
           </p:cNvSpPr>
@@ -6543,7 +6546,7 @@
       </p:sp>
       <p:sp>
         <p:nvSpPr>
-          <p:cNvPr id="426" name="r426"/>
+          <p:cNvPr id="13" name="r13"/>
           <p:cNvSpPr>
             <a:spLocks noGrp="1"/>
           </p:cNvSpPr>
@@ -6572,13 +6575,13 @@
       </p:sp>
       <p:sp>
         <p:nvSpPr>
-          <p:cNvPr id="427" name="t427"/>
-          <p:cNvSpPr txBox="1"/>
-          <p:nvPr/>
-        </p:nvSpPr>
-        <p:spPr>
-          <a:xfrm>
-            <a:off x="288000" y="2206800"/>
+          <p:cNvPr id="14" name="t14"/>
+          <p:cNvSpPr txBox="1"/>
+          <p:nvPr/>
+        </p:nvSpPr>
+        <p:spPr>
+          <a:xfrm>
+            <a:off x="288000" y="2199600"/>
             <a:ext cx="5400000" cy="306000"/>
           </a:xfrm>
           <a:prstGeom prst="rect">
@@ -6597,9 +6600,9 @@
             <a:r>
               <a:rPr lang="uz-UZ" sz="1400" b="1" dirty="0" smtClean="0">
                 <a:solidFill>
-                  <a:srgbClr val="06262A"/>
-                </a:solidFill>
-                <a:latin typeface="+mj-lt"/>
+                  <a:srgbClr val="FFFFFF"/>
+                </a:solidFill>
+                <a:latin typeface="Calibri"/>
               </a:rPr>
               <a:t>Og'riq va fobiyalarni boshqarish</a:t>
             </a:r>
@@ -6608,13 +6611,13 @@
       </p:sp>
       <p:sp>
         <p:nvSpPr>
-          <p:cNvPr id="428" name="t428"/>
-          <p:cNvSpPr txBox="1"/>
-          <p:nvPr/>
-        </p:nvSpPr>
-        <p:spPr>
-          <a:xfrm>
-            <a:off x="288000" y="2502000"/>
+          <p:cNvPr id="15" name="t15"/>
+          <p:cNvSpPr txBox="1"/>
+          <p:nvPr/>
+        </p:nvSpPr>
+        <p:spPr>
+          <a:xfrm>
+            <a:off x="288000" y="2520000"/>
             <a:ext cx="5400000" cy="648000"/>
           </a:xfrm>
           <a:prstGeom prst="rect">
@@ -6633,9 +6636,9 @@
             <a:r>
               <a:rPr lang="uz-UZ" sz="1300" b="0" dirty="0" smtClean="0">
                 <a:solidFill>
-                  <a:srgbClr val="5E7D80"/>
-                </a:solidFill>
-                <a:latin typeface="+mj-lt"/>
+                  <a:srgbClr val="9AA6D6"/>
+                </a:solidFill>
+                <a:latin typeface="Calibri"/>
               </a:rPr>
               <a:t>VR-distraksiya og'riqni kamaytiradi, qo'rquv terapiyasida qo'llanadi.</a:t>
             </a:r>
@@ -6644,7 +6647,7 @@
       </p:sp>
       <p:sp>
         <p:nvSpPr>
-          <p:cNvPr id="429" name="r429"/>
+          <p:cNvPr id="16" name="r16"/>
           <p:cNvSpPr>
             <a:spLocks noGrp="1"/>
           </p:cNvSpPr>
@@ -6673,7 +6676,7 @@
       </p:sp>
       <p:sp>
         <p:nvSpPr>
-          <p:cNvPr id="430" name="r430"/>
+          <p:cNvPr id="17" name="r17"/>
           <p:cNvSpPr>
             <a:spLocks noGrp="1"/>
           </p:cNvSpPr>
@@ -6702,13 +6705,13 @@
       </p:sp>
       <p:sp>
         <p:nvSpPr>
-          <p:cNvPr id="431" name="t431"/>
-          <p:cNvSpPr txBox="1"/>
-          <p:nvPr/>
-        </p:nvSpPr>
-        <p:spPr>
-          <a:xfrm>
-            <a:off x="6300000" y="2206800"/>
+          <p:cNvPr id="18" name="t18"/>
+          <p:cNvSpPr txBox="1"/>
+          <p:nvPr/>
+        </p:nvSpPr>
+        <p:spPr>
+          <a:xfrm>
+            <a:off x="6300000" y="2199600"/>
             <a:ext cx="5400000" cy="306000"/>
           </a:xfrm>
           <a:prstGeom prst="rect">
@@ -6727,9 +6730,9 @@
             <a:r>
               <a:rPr lang="uz-UZ" sz="1400" b="1" dirty="0" smtClean="0">
                 <a:solidFill>
-                  <a:srgbClr val="06262A"/>
-                </a:solidFill>
-                <a:latin typeface="+mj-lt"/>
+                  <a:srgbClr val="FFFFFF"/>
+                </a:solidFill>
+                <a:latin typeface="Calibri"/>
               </a:rPr>
               <a:t>Reabilitatsiya va ta'lim</a:t>
             </a:r>
@@ -6738,13 +6741,13 @@
       </p:sp>
       <p:sp>
         <p:nvSpPr>
-          <p:cNvPr id="432" name="t432"/>
-          <p:cNvSpPr txBox="1"/>
-          <p:nvPr/>
-        </p:nvSpPr>
-        <p:spPr>
-          <a:xfrm>
-            <a:off x="6300000" y="2502000"/>
+          <p:cNvPr id="19" name="t19"/>
+          <p:cNvSpPr txBox="1"/>
+          <p:nvPr/>
+        </p:nvSpPr>
+        <p:spPr>
+          <a:xfrm>
+            <a:off x="6300000" y="2520000"/>
             <a:ext cx="5400000" cy="648000"/>
           </a:xfrm>
           <a:prstGeom prst="rect">
@@ -6763,11 +6766,11 @@
             <a:r>
               <a:rPr lang="uz-UZ" sz="1300" b="0" dirty="0" smtClean="0">
                 <a:solidFill>
-                  <a:srgbClr val="5E7D80"/>
-                </a:solidFill>
-                <a:latin typeface="+mj-lt"/>
-              </a:rPr>
-              <a:t>Insultdan keyingi tiklanish uchun o'yinlashtirilgan mashqlar, simulyatorlar.</a:t>
+                  <a:srgbClr val="9AA6D6"/>
+                </a:solidFill>
+                <a:latin typeface="Calibri"/>
+              </a:rPr>
+              <a:t>Insultdan keyingi tiklanish uchun o'yinlashtirilgan mashqlar.</a:t>
             </a:r>
           </a:p>
         </p:txBody>
@@ -6793,7 +6796,7 @@
     </p:bg>
     <p:spTree>
       <p:nvGrpSpPr>
-        <p:cNvPr id="1" name=""/>
+        <p:cNvPr id="1" name="slide"/>
         <p:cNvGrpSpPr/>
         <p:nvPr/>
       </p:nvGrpSpPr>
@@ -6807,7 +6810,7 @@
       </p:grpSpPr>
       <p:sp>
         <p:nvSpPr>
-          <p:cNvPr id="433" name="r433"/>
+          <p:cNvPr id="2" name="r2"/>
           <p:cNvSpPr>
             <a:spLocks noGrp="1"/>
           </p:cNvSpPr>
@@ -6836,7 +6839,7 @@
       </p:sp>
       <p:sp>
         <p:nvSpPr>
-          <p:cNvPr id="434" name="t434"/>
+          <p:cNvPr id="3" name="t3"/>
           <p:cNvSpPr txBox="1"/>
           <p:nvPr/>
         </p:nvSpPr>
@@ -6863,7 +6866,7 @@
                 <a:solidFill>
                   <a:srgbClr val="FFFFFF"/>
                 </a:solidFill>
-                <a:latin typeface="+mj-lt"/>
+                <a:latin typeface="Calibri"/>
               </a:rPr>
               <a:t>04 · SUN'IY INTELLEKT (AI) ASOSLARI</a:t>
             </a:r>
@@ -6872,7 +6875,7 @@
       </p:sp>
       <p:sp>
         <p:nvSpPr>
-          <p:cNvPr id="435" name="r435"/>
+          <p:cNvPr id="4" name="r4"/>
           <p:cNvSpPr>
             <a:spLocks noGrp="1"/>
           </p:cNvSpPr>
@@ -6901,7 +6904,7 @@
       </p:sp>
       <p:sp>
         <p:nvSpPr>
-          <p:cNvPr id="436" name="t436"/>
+          <p:cNvPr id="5" name="t5"/>
           <p:cNvSpPr txBox="1"/>
           <p:nvPr/>
         </p:nvSpPr>
@@ -6928,7 +6931,7 @@
                 <a:solidFill>
                   <a:srgbClr val="EAF0FF"/>
                 </a:solidFill>
-                <a:latin typeface="+mj-lt"/>
+                <a:latin typeface="Calibri"/>
               </a:rPr>
               <a:t>AI — kompyuter tizimlarining katta ma'lumotlardan</a:t>
             </a:r>
@@ -6940,7 +6943,7 @@
                 <a:solidFill>
                   <a:srgbClr val="EAF0FF"/>
                 </a:solidFill>
-                <a:latin typeface="+mj-lt"/>
+                <a:latin typeface="Calibri"/>
               </a:rPr>
               <a:t>o'rganish, naqshlarni topish va qaror qabul qilish</a:t>
             </a:r>
@@ -6952,7 +6955,7 @@
                 <a:solidFill>
                   <a:srgbClr val="EAF0FF"/>
                 </a:solidFill>
-                <a:latin typeface="+mj-lt"/>
+                <a:latin typeface="Calibri"/>
               </a:rPr>
               <a:t>qobiliyatidir. Tibbiyotda ML, DL va NLP qo'llanadi.</a:t>
             </a:r>
@@ -6961,7 +6964,7 @@
       </p:sp>
       <p:sp>
         <p:nvSpPr>
-          <p:cNvPr id="437" name="r437"/>
+          <p:cNvPr id="6" name="r6"/>
           <p:cNvSpPr>
             <a:spLocks noGrp="1"/>
           </p:cNvSpPr>
@@ -6990,14 +6993,14 @@
       </p:sp>
       <p:sp>
         <p:nvSpPr>
-          <p:cNvPr id="438" name="t438"/>
+          <p:cNvPr id="7" name="t7"/>
           <p:cNvSpPr txBox="1"/>
           <p:nvPr/>
         </p:nvSpPr>
         <p:spPr>
           <a:xfrm>
             <a:off x="521999" y="1728000"/>
-            <a:ext cx="5454001" cy="270000"/>
+            <a:ext cx="5454001" cy="280800"/>
           </a:xfrm>
           <a:prstGeom prst="rect">
             <a:avLst/>
@@ -7017,7 +7020,7 @@
                 <a:solidFill>
                   <a:srgbClr val="EAF0FF"/>
                 </a:solidFill>
-                <a:latin typeface="+mj-lt"/>
+                <a:latin typeface="Calibri"/>
               </a:rPr>
               <a:t>ML — Mashinali o'qitish: ma'lumotdan qonuniyat topish</a:t>
             </a:r>
@@ -7026,15 +7029,15 @@
       </p:sp>
       <p:sp>
         <p:nvSpPr>
-          <p:cNvPr id="439" name="r439"/>
-          <p:cNvSpPr>
-            <a:spLocks noGrp="1"/>
-          </p:cNvSpPr>
-          <p:nvPr/>
-        </p:nvSpPr>
-        <p:spPr>
-          <a:xfrm>
-            <a:off x="396000" y="2102400"/>
+          <p:cNvPr id="8" name="r8"/>
+          <p:cNvSpPr>
+            <a:spLocks noGrp="1"/>
+          </p:cNvSpPr>
+          <p:nvPr/>
+        </p:nvSpPr>
+        <p:spPr>
+          <a:xfrm>
+            <a:off x="396000" y="2109600"/>
             <a:ext cx="57600" cy="57600"/>
           </a:xfrm>
           <a:prstGeom prst="rect">
@@ -7055,14 +7058,14 @@
       </p:sp>
       <p:sp>
         <p:nvSpPr>
-          <p:cNvPr id="440" name="t440"/>
-          <p:cNvSpPr txBox="1"/>
-          <p:nvPr/>
-        </p:nvSpPr>
-        <p:spPr>
-          <a:xfrm>
-            <a:off x="521999" y="2023200"/>
-            <a:ext cx="5454001" cy="270000"/>
+          <p:cNvPr id="9" name="t9"/>
+          <p:cNvSpPr txBox="1"/>
+          <p:nvPr/>
+        </p:nvSpPr>
+        <p:spPr>
+          <a:xfrm>
+            <a:off x="521999" y="2030400"/>
+            <a:ext cx="5454001" cy="280800"/>
           </a:xfrm>
           <a:prstGeom prst="rect">
             <a:avLst/>
@@ -7082,7 +7085,7 @@
                 <a:solidFill>
                   <a:srgbClr val="EAF0FF"/>
                 </a:solidFill>
-                <a:latin typeface="+mj-lt"/>
+                <a:latin typeface="Calibri"/>
               </a:rPr>
               <a:t>DL — Chuqur o'qitish: tasvir va signallarni tahlil</a:t>
             </a:r>
@@ -7091,15 +7094,15 @@
       </p:sp>
       <p:sp>
         <p:nvSpPr>
-          <p:cNvPr id="441" name="r441"/>
-          <p:cNvSpPr>
-            <a:spLocks noGrp="1"/>
-          </p:cNvSpPr>
-          <p:nvPr/>
-        </p:nvSpPr>
-        <p:spPr>
-          <a:xfrm>
-            <a:off x="396000" y="2397600"/>
+          <p:cNvPr id="10" name="r10"/>
+          <p:cNvSpPr>
+            <a:spLocks noGrp="1"/>
+          </p:cNvSpPr>
+          <p:nvPr/>
+        </p:nvSpPr>
+        <p:spPr>
+          <a:xfrm>
+            <a:off x="396000" y="2412000"/>
             <a:ext cx="57600" cy="57600"/>
           </a:xfrm>
           <a:prstGeom prst="rect">
@@ -7120,14 +7123,14 @@
       </p:sp>
       <p:sp>
         <p:nvSpPr>
-          <p:cNvPr id="442" name="t442"/>
-          <p:cNvSpPr txBox="1"/>
-          <p:nvPr/>
-        </p:nvSpPr>
-        <p:spPr>
-          <a:xfrm>
-            <a:off x="521999" y="2318400"/>
-            <a:ext cx="5454001" cy="270000"/>
+          <p:cNvPr id="11" name="t11"/>
+          <p:cNvSpPr txBox="1"/>
+          <p:nvPr/>
+        </p:nvSpPr>
+        <p:spPr>
+          <a:xfrm>
+            <a:off x="521999" y="2332800"/>
+            <a:ext cx="5454001" cy="280800"/>
           </a:xfrm>
           <a:prstGeom prst="rect">
             <a:avLst/>
@@ -7147,7 +7150,7 @@
                 <a:solidFill>
                   <a:srgbClr val="EAF0FF"/>
                 </a:solidFill>
-                <a:latin typeface="+mj-lt"/>
+                <a:latin typeface="Calibri"/>
               </a:rPr>
               <a:t>NLP — Tabiiy til: tibbiy hujjatlarni avtomatik tahlil</a:t>
             </a:r>
@@ -7156,7 +7159,7 @@
       </p:sp>
       <p:sp>
         <p:nvSpPr>
-          <p:cNvPr id="443" name="r443"/>
+          <p:cNvPr id="12" name="r12"/>
           <p:cNvSpPr>
             <a:spLocks noGrp="1"/>
           </p:cNvSpPr>
@@ -7185,7 +7188,7 @@
       </p:sp>
       <p:sp>
         <p:nvSpPr>
-          <p:cNvPr id="444" name="t444"/>
+          <p:cNvPr id="13" name="t13"/>
           <p:cNvSpPr txBox="1"/>
           <p:nvPr/>
         </p:nvSpPr>
@@ -7212,7 +7215,7 @@
                 <a:solidFill>
                   <a:srgbClr val="FFFFFF"/>
                 </a:solidFill>
-                <a:latin typeface="+mj-lt"/>
+                <a:latin typeface="Calibri"/>
               </a:rPr>
               <a:t>AI nimani uddalaydi?</a:t>
             </a:r>
@@ -7221,15 +7224,15 @@
       </p:sp>
       <p:sp>
         <p:nvSpPr>
-          <p:cNvPr id="445" name="r445"/>
-          <p:cNvSpPr>
-            <a:spLocks noGrp="1"/>
-          </p:cNvSpPr>
-          <p:nvPr/>
-        </p:nvSpPr>
-        <p:spPr>
-          <a:xfrm>
-            <a:off x="6623999" y="1303200"/>
+          <p:cNvPr id="14" name="r14"/>
+          <p:cNvSpPr>
+            <a:spLocks noGrp="1"/>
+          </p:cNvSpPr>
+          <p:nvPr/>
+        </p:nvSpPr>
+        <p:spPr>
+          <a:xfrm>
+            <a:off x="6623999" y="1339200"/>
             <a:ext cx="57600" cy="57600"/>
           </a:xfrm>
           <a:prstGeom prst="rect">
@@ -7250,14 +7253,14 @@
       </p:sp>
       <p:sp>
         <p:nvSpPr>
-          <p:cNvPr id="446" name="t446"/>
-          <p:cNvSpPr txBox="1"/>
-          <p:nvPr/>
-        </p:nvSpPr>
-        <p:spPr>
-          <a:xfrm>
-            <a:off x="6749998" y="1224000"/>
-            <a:ext cx="4914001" cy="270000"/>
+          <p:cNvPr id="15" name="t15"/>
+          <p:cNvSpPr txBox="1"/>
+          <p:nvPr/>
+        </p:nvSpPr>
+        <p:spPr>
+          <a:xfrm>
+            <a:off x="6749998" y="1260000"/>
+            <a:ext cx="4914001" cy="280800"/>
           </a:xfrm>
           <a:prstGeom prst="rect">
             <a:avLst/>
@@ -7277,7 +7280,7 @@
                 <a:solidFill>
                   <a:srgbClr val="EAF0FF"/>
                 </a:solidFill>
-                <a:latin typeface="+mj-lt"/>
+                <a:latin typeface="Calibri"/>
               </a:rPr>
               <a:t>Tibbiy tasvirlarni tahlil qilish</a:t>
             </a:r>
@@ -7286,15 +7289,15 @@
       </p:sp>
       <p:sp>
         <p:nvSpPr>
-          <p:cNvPr id="447" name="r447"/>
-          <p:cNvSpPr>
-            <a:spLocks noGrp="1"/>
-          </p:cNvSpPr>
-          <p:nvPr/>
-        </p:nvSpPr>
-        <p:spPr>
-          <a:xfrm>
-            <a:off x="6623999" y="1598400"/>
+          <p:cNvPr id="16" name="r16"/>
+          <p:cNvSpPr>
+            <a:spLocks noGrp="1"/>
+          </p:cNvSpPr>
+          <p:nvPr/>
+        </p:nvSpPr>
+        <p:spPr>
+          <a:xfrm>
+            <a:off x="6623999" y="1641600"/>
             <a:ext cx="57600" cy="57600"/>
           </a:xfrm>
           <a:prstGeom prst="rect">
@@ -7315,14 +7318,14 @@
       </p:sp>
       <p:sp>
         <p:nvSpPr>
-          <p:cNvPr id="448" name="t448"/>
-          <p:cNvSpPr txBox="1"/>
-          <p:nvPr/>
-        </p:nvSpPr>
-        <p:spPr>
-          <a:xfrm>
-            <a:off x="6749998" y="1519200"/>
-            <a:ext cx="4914001" cy="270000"/>
+          <p:cNvPr id="17" name="t17"/>
+          <p:cNvSpPr txBox="1"/>
+          <p:nvPr/>
+        </p:nvSpPr>
+        <p:spPr>
+          <a:xfrm>
+            <a:off x="6749998" y="1562400"/>
+            <a:ext cx="4914001" cy="280800"/>
           </a:xfrm>
           <a:prstGeom prst="rect">
             <a:avLst/>
@@ -7342,7 +7345,7 @@
                 <a:solidFill>
                   <a:srgbClr val="EAF0FF"/>
                 </a:solidFill>
-                <a:latin typeface="+mj-lt"/>
+                <a:latin typeface="Calibri"/>
               </a:rPr>
               <a:t>Xavf-xatarni bashorat qilish</a:t>
             </a:r>
@@ -7351,15 +7354,15 @@
       </p:sp>
       <p:sp>
         <p:nvSpPr>
-          <p:cNvPr id="449" name="r449"/>
-          <p:cNvSpPr>
-            <a:spLocks noGrp="1"/>
-          </p:cNvSpPr>
-          <p:nvPr/>
-        </p:nvSpPr>
-        <p:spPr>
-          <a:xfrm>
-            <a:off x="6623999" y="1893600"/>
+          <p:cNvPr id="18" name="r18"/>
+          <p:cNvSpPr>
+            <a:spLocks noGrp="1"/>
+          </p:cNvSpPr>
+          <p:nvPr/>
+        </p:nvSpPr>
+        <p:spPr>
+          <a:xfrm>
+            <a:off x="6623999" y="1944000"/>
             <a:ext cx="57600" cy="57600"/>
           </a:xfrm>
           <a:prstGeom prst="rect">
@@ -7380,14 +7383,14 @@
       </p:sp>
       <p:sp>
         <p:nvSpPr>
-          <p:cNvPr id="450" name="t450"/>
-          <p:cNvSpPr txBox="1"/>
-          <p:nvPr/>
-        </p:nvSpPr>
-        <p:spPr>
-          <a:xfrm>
-            <a:off x="6749998" y="1814400"/>
-            <a:ext cx="4914001" cy="270000"/>
+          <p:cNvPr id="19" name="t19"/>
+          <p:cNvSpPr txBox="1"/>
+          <p:nvPr/>
+        </p:nvSpPr>
+        <p:spPr>
+          <a:xfrm>
+            <a:off x="6749998" y="1864800"/>
+            <a:ext cx="4914001" cy="280800"/>
           </a:xfrm>
           <a:prstGeom prst="rect">
             <a:avLst/>
@@ -7407,7 +7410,7 @@
                 <a:solidFill>
                   <a:srgbClr val="EAF0FF"/>
                 </a:solidFill>
-                <a:latin typeface="+mj-lt"/>
+                <a:latin typeface="Calibri"/>
               </a:rPr>
               <a:t>Hujjatlarni avtomatlashtirish</a:t>
             </a:r>
@@ -7416,15 +7419,15 @@
       </p:sp>
       <p:sp>
         <p:nvSpPr>
-          <p:cNvPr id="451" name="r451"/>
-          <p:cNvSpPr>
-            <a:spLocks noGrp="1"/>
-          </p:cNvSpPr>
-          <p:nvPr/>
-        </p:nvSpPr>
-        <p:spPr>
-          <a:xfrm>
-            <a:off x="6623999" y="2188800"/>
+          <p:cNvPr id="20" name="r20"/>
+          <p:cNvSpPr>
+            <a:spLocks noGrp="1"/>
+          </p:cNvSpPr>
+          <p:nvPr/>
+        </p:nvSpPr>
+        <p:spPr>
+          <a:xfrm>
+            <a:off x="6623999" y="2246400"/>
             <a:ext cx="57600" cy="57600"/>
           </a:xfrm>
           <a:prstGeom prst="rect">
@@ -7445,14 +7448,14 @@
       </p:sp>
       <p:sp>
         <p:nvSpPr>
-          <p:cNvPr id="452" name="t452"/>
-          <p:cNvSpPr txBox="1"/>
-          <p:nvPr/>
-        </p:nvSpPr>
-        <p:spPr>
-          <a:xfrm>
-            <a:off x="6749998" y="2109600"/>
-            <a:ext cx="4914001" cy="270000"/>
+          <p:cNvPr id="21" name="t21"/>
+          <p:cNvSpPr txBox="1"/>
+          <p:nvPr/>
+        </p:nvSpPr>
+        <p:spPr>
+          <a:xfrm>
+            <a:off x="6749998" y="2167200"/>
+            <a:ext cx="4914001" cy="280800"/>
           </a:xfrm>
           <a:prstGeom prst="rect">
             <a:avLst/>
@@ -7472,7 +7475,7 @@
                 <a:solidFill>
                   <a:srgbClr val="EAF0FF"/>
                 </a:solidFill>
-                <a:latin typeface="+mj-lt"/>
+                <a:latin typeface="Calibri"/>
               </a:rPr>
               <a:t>Shifokorga qaror qo'llab-quvvatlash</a:t>
             </a:r>
@@ -7500,7 +7503,7 @@
     </p:bg>
     <p:spTree>
       <p:nvGrpSpPr>
-        <p:cNvPr id="1" name=""/>
+        <p:cNvPr id="1" name="slide"/>
         <p:cNvGrpSpPr/>
         <p:nvPr/>
       </p:nvGrpSpPr>
@@ -7514,7 +7517,7 @@
       </p:grpSpPr>
       <p:sp>
         <p:nvSpPr>
-          <p:cNvPr id="453" name="r453"/>
+          <p:cNvPr id="2" name="r2"/>
           <p:cNvSpPr>
             <a:spLocks noGrp="1"/>
           </p:cNvSpPr>
@@ -7543,7 +7546,7 @@
       </p:sp>
       <p:sp>
         <p:nvSpPr>
-          <p:cNvPr id="454" name="t454"/>
+          <p:cNvPr id="3" name="t3"/>
           <p:cNvSpPr txBox="1"/>
           <p:nvPr/>
         </p:nvSpPr>
@@ -7570,7 +7573,7 @@
                 <a:solidFill>
                   <a:srgbClr val="FFFFFF"/>
                 </a:solidFill>
-                <a:latin typeface="+mj-lt"/>
+                <a:latin typeface="Calibri"/>
               </a:rPr>
               <a:t>05 · AI TASHXIS VA DAVOLASHDA</a:t>
             </a:r>
@@ -7579,7 +7582,7 @@
       </p:sp>
       <p:sp>
         <p:nvSpPr>
-          <p:cNvPr id="455" name="r455"/>
+          <p:cNvPr id="4" name="r4"/>
           <p:cNvSpPr>
             <a:spLocks noGrp="1"/>
           </p:cNvSpPr>
@@ -7588,7 +7591,7 @@
         <p:spPr>
           <a:xfrm>
             <a:off x="180000" y="720000"/>
-            <a:ext cx="3780000" cy="1044000"/>
+            <a:ext cx="3780000" cy="1026000"/>
           </a:xfrm>
           <a:prstGeom prst="rect">
             <a:avLst/>
@@ -7608,7 +7611,7 @@
       </p:sp>
       <p:sp>
         <p:nvSpPr>
-          <p:cNvPr id="456" name="r456"/>
+          <p:cNvPr id="5" name="r5"/>
           <p:cNvSpPr>
             <a:spLocks noGrp="1"/>
           </p:cNvSpPr>
@@ -7637,7 +7640,7 @@
       </p:sp>
       <p:sp>
         <p:nvSpPr>
-          <p:cNvPr id="457" name="t457"/>
+          <p:cNvPr id="6" name="t6"/>
           <p:cNvSpPr txBox="1"/>
           <p:nvPr/>
         </p:nvSpPr>
@@ -7664,7 +7667,7 @@
                 <a:solidFill>
                   <a:srgbClr val="FFFFFF"/>
                 </a:solidFill>
-                <a:latin typeface="+mj-lt"/>
+                <a:latin typeface="Calibri"/>
               </a:rPr>
               <a:t>Tibbiy tasvir tahlili</a:t>
             </a:r>
@@ -7673,14 +7676,14 @@
       </p:sp>
       <p:sp>
         <p:nvSpPr>
-          <p:cNvPr id="458" name="t458"/>
+          <p:cNvPr id="7" name="t7"/>
           <p:cNvSpPr txBox="1"/>
           <p:nvPr/>
         </p:nvSpPr>
         <p:spPr>
           <a:xfrm>
             <a:off x="288000" y="1188000"/>
-            <a:ext cx="3600000" cy="522000"/>
+            <a:ext cx="3600000" cy="503999"/>
           </a:xfrm>
           <a:prstGeom prst="rect">
             <a:avLst/>
@@ -7700,16 +7703,16 @@
                 <a:solidFill>
                   <a:srgbClr val="9AA6D6"/>
                 </a:solidFill>
-                <a:latin typeface="+mj-lt"/>
-              </a:rPr>
-              <a:t>Rentgen, KT, MRT va gistologiyada patologiyani aniqlash.</a:t>
-            </a:r>
-          </a:p>
-        </p:txBody>
-      </p:sp>
-      <p:sp>
-        <p:nvSpPr>
-          <p:cNvPr id="459" name="r459"/>
+                <a:latin typeface="Calibri"/>
+              </a:rPr>
+              <a:t>Rentgen, KT, MRT, gistologiyada patologiyani aniqlash.</a:t>
+            </a:r>
+          </a:p>
+        </p:txBody>
+      </p:sp>
+      <p:sp>
+        <p:nvSpPr>
+          <p:cNvPr id="8" name="r8"/>
           <p:cNvSpPr>
             <a:spLocks noGrp="1"/>
           </p:cNvSpPr>
@@ -7718,7 +7721,7 @@
         <p:spPr>
           <a:xfrm>
             <a:off x="4176000" y="720000"/>
-            <a:ext cx="3780000" cy="1044000"/>
+            <a:ext cx="3780000" cy="1026000"/>
           </a:xfrm>
           <a:prstGeom prst="rect">
             <a:avLst/>
@@ -7738,7 +7741,7 @@
       </p:sp>
       <p:sp>
         <p:nvSpPr>
-          <p:cNvPr id="460" name="r460"/>
+          <p:cNvPr id="9" name="r9"/>
           <p:cNvSpPr>
             <a:spLocks noGrp="1"/>
           </p:cNvSpPr>
@@ -7767,7 +7770,7 @@
       </p:sp>
       <p:sp>
         <p:nvSpPr>
-          <p:cNvPr id="461" name="t461"/>
+          <p:cNvPr id="10" name="t10"/>
           <p:cNvSpPr txBox="1"/>
           <p:nvPr/>
         </p:nvSpPr>
@@ -7794,7 +7797,7 @@
                 <a:solidFill>
                   <a:srgbClr val="FFFFFF"/>
                 </a:solidFill>
-                <a:latin typeface="+mj-lt"/>
+                <a:latin typeface="Calibri"/>
               </a:rPr>
               <a:t>Bashoratli tahlil</a:t>
             </a:r>
@@ -7803,14 +7806,14 @@
       </p:sp>
       <p:sp>
         <p:nvSpPr>
-          <p:cNvPr id="462" name="t462"/>
+          <p:cNvPr id="11" name="t11"/>
           <p:cNvSpPr txBox="1"/>
           <p:nvPr/>
         </p:nvSpPr>
         <p:spPr>
           <a:xfrm>
             <a:off x="4284000" y="1188000"/>
-            <a:ext cx="3600000" cy="522000"/>
+            <a:ext cx="3600000" cy="503999"/>
           </a:xfrm>
           <a:prstGeom prst="rect">
             <a:avLst/>
@@ -7830,7 +7833,7 @@
                 <a:solidFill>
                   <a:srgbClr val="9AA6D6"/>
                 </a:solidFill>
-                <a:latin typeface="+mj-lt"/>
+                <a:latin typeface="Calibri"/>
               </a:rPr>
               <a:t>Asoratlar va kasallik xavfini erta bashorat qilish.</a:t>
             </a:r>
@@ -7839,7 +7842,7 @@
       </p:sp>
       <p:sp>
         <p:nvSpPr>
-          <p:cNvPr id="463" name="r463"/>
+          <p:cNvPr id="12" name="r12"/>
           <p:cNvSpPr>
             <a:spLocks noGrp="1"/>
           </p:cNvSpPr>
@@ -7848,7 +7851,7 @@
         <p:spPr>
           <a:xfrm>
             <a:off x="8172000" y="720000"/>
-            <a:ext cx="3780000" cy="1044000"/>
+            <a:ext cx="3780000" cy="1026000"/>
           </a:xfrm>
           <a:prstGeom prst="rect">
             <a:avLst/>
@@ -7868,7 +7871,7 @@
       </p:sp>
       <p:sp>
         <p:nvSpPr>
-          <p:cNvPr id="464" name="r464"/>
+          <p:cNvPr id="13" name="r13"/>
           <p:cNvSpPr>
             <a:spLocks noGrp="1"/>
           </p:cNvSpPr>
@@ -7897,7 +7900,7 @@
       </p:sp>
       <p:sp>
         <p:nvSpPr>
-          <p:cNvPr id="465" name="t465"/>
+          <p:cNvPr id="14" name="t14"/>
           <p:cNvSpPr txBox="1"/>
           <p:nvPr/>
         </p:nvSpPr>
@@ -7924,7 +7927,7 @@
                 <a:solidFill>
                   <a:srgbClr val="FFFFFF"/>
                 </a:solidFill>
-                <a:latin typeface="+mj-lt"/>
+                <a:latin typeface="Calibri"/>
               </a:rPr>
               <a:t>Shaxsiy davolash</a:t>
             </a:r>
@@ -7933,14 +7936,14 @@
       </p:sp>
       <p:sp>
         <p:nvSpPr>
-          <p:cNvPr id="466" name="t466"/>
+          <p:cNvPr id="15" name="t15"/>
           <p:cNvSpPr txBox="1"/>
           <p:nvPr/>
         </p:nvSpPr>
         <p:spPr>
           <a:xfrm>
             <a:off x="8280000" y="1188000"/>
-            <a:ext cx="3600000" cy="522000"/>
+            <a:ext cx="3600000" cy="503999"/>
           </a:xfrm>
           <a:prstGeom prst="rect">
             <a:avLst/>
@@ -7960,7 +7963,7 @@
                 <a:solidFill>
                   <a:srgbClr val="9AA6D6"/>
                 </a:solidFill>
-                <a:latin typeface="+mj-lt"/>
+                <a:latin typeface="Calibri"/>
               </a:rPr>
               <a:t>Har bir bemorga moslangan davo rejasi.</a:t>
             </a:r>
@@ -7969,16 +7972,16 @@
       </p:sp>
       <p:sp>
         <p:nvSpPr>
-          <p:cNvPr id="467" name="r467"/>
-          <p:cNvSpPr>
-            <a:spLocks noGrp="1"/>
-          </p:cNvSpPr>
-          <p:nvPr/>
-        </p:nvSpPr>
-        <p:spPr>
-          <a:xfrm>
-            <a:off x="180000" y="1872000"/>
-            <a:ext cx="3780000" cy="1044000"/>
+          <p:cNvPr id="16" name="r16"/>
+          <p:cNvSpPr>
+            <a:spLocks noGrp="1"/>
+          </p:cNvSpPr>
+          <p:nvPr/>
+        </p:nvSpPr>
+        <p:spPr>
+          <a:xfrm>
+            <a:off x="180000" y="1854000"/>
+            <a:ext cx="3780000" cy="1026000"/>
           </a:xfrm>
           <a:prstGeom prst="rect">
             <a:avLst/>
@@ -7998,15 +8001,15 @@
       </p:sp>
       <p:sp>
         <p:nvSpPr>
-          <p:cNvPr id="468" name="r468"/>
-          <p:cNvSpPr>
-            <a:spLocks noGrp="1"/>
-          </p:cNvSpPr>
-          <p:nvPr/>
-        </p:nvSpPr>
-        <p:spPr>
-          <a:xfrm>
-            <a:off x="180000" y="1872000"/>
+          <p:cNvPr id="17" name="r17"/>
+          <p:cNvSpPr>
+            <a:spLocks noGrp="1"/>
+          </p:cNvSpPr>
+          <p:nvPr/>
+        </p:nvSpPr>
+        <p:spPr>
+          <a:xfrm>
+            <a:off x="180000" y="1854000"/>
             <a:ext cx="3780000" cy="90000"/>
           </a:xfrm>
           <a:prstGeom prst="rect">
@@ -8027,13 +8030,13 @@
       </p:sp>
       <p:sp>
         <p:nvSpPr>
-          <p:cNvPr id="469" name="t469"/>
-          <p:cNvSpPr txBox="1"/>
-          <p:nvPr/>
-        </p:nvSpPr>
-        <p:spPr>
-          <a:xfrm>
-            <a:off x="288000" y="2034000"/>
+          <p:cNvPr id="18" name="t18"/>
+          <p:cNvSpPr txBox="1"/>
+          <p:nvPr/>
+        </p:nvSpPr>
+        <p:spPr>
+          <a:xfrm>
+            <a:off x="288000" y="2016000"/>
             <a:ext cx="3600000" cy="306000"/>
           </a:xfrm>
           <a:prstGeom prst="rect">
@@ -8054,7 +8057,7 @@
                 <a:solidFill>
                   <a:srgbClr val="FFFFFF"/>
                 </a:solidFill>
-                <a:latin typeface="+mj-lt"/>
+                <a:latin typeface="Calibri"/>
               </a:rPr>
               <a:t>Dori kashfiyoti</a:t>
             </a:r>
@@ -8063,14 +8066,14 @@
       </p:sp>
       <p:sp>
         <p:nvSpPr>
-          <p:cNvPr id="470" name="t470"/>
-          <p:cNvSpPr txBox="1"/>
-          <p:nvPr/>
-        </p:nvSpPr>
-        <p:spPr>
-          <a:xfrm>
-            <a:off x="288000" y="2340000"/>
-            <a:ext cx="3600000" cy="522000"/>
+          <p:cNvPr id="19" name="t19"/>
+          <p:cNvSpPr txBox="1"/>
+          <p:nvPr/>
+        </p:nvSpPr>
+        <p:spPr>
+          <a:xfrm>
+            <a:off x="288000" y="2322000"/>
+            <a:ext cx="3600000" cy="503999"/>
           </a:xfrm>
           <a:prstGeom prst="rect">
             <a:avLst/>
@@ -8090,7 +8093,7 @@
                 <a:solidFill>
                   <a:srgbClr val="9AA6D6"/>
                 </a:solidFill>
-                <a:latin typeface="+mj-lt"/>
+                <a:latin typeface="Calibri"/>
               </a:rPr>
               <a:t>Yangi molekulalarni tezroq topish va sinash.</a:t>
             </a:r>
@@ -8099,16 +8102,16 @@
       </p:sp>
       <p:sp>
         <p:nvSpPr>
-          <p:cNvPr id="471" name="r471"/>
-          <p:cNvSpPr>
-            <a:spLocks noGrp="1"/>
-          </p:cNvSpPr>
-          <p:nvPr/>
-        </p:nvSpPr>
-        <p:spPr>
-          <a:xfrm>
-            <a:off x="4176000" y="1872000"/>
-            <a:ext cx="3780000" cy="1044000"/>
+          <p:cNvPr id="20" name="r20"/>
+          <p:cNvSpPr>
+            <a:spLocks noGrp="1"/>
+          </p:cNvSpPr>
+          <p:nvPr/>
+        </p:nvSpPr>
+        <p:spPr>
+          <a:xfrm>
+            <a:off x="4176000" y="1854000"/>
+            <a:ext cx="3780000" cy="1026000"/>
           </a:xfrm>
           <a:prstGeom prst="rect">
             <a:avLst/>
@@ -8128,15 +8131,15 @@
       </p:sp>
       <p:sp>
         <p:nvSpPr>
-          <p:cNvPr id="472" name="r472"/>
-          <p:cNvSpPr>
-            <a:spLocks noGrp="1"/>
-          </p:cNvSpPr>
-          <p:nvPr/>
-        </p:nvSpPr>
-        <p:spPr>
-          <a:xfrm>
-            <a:off x="4176000" y="1872000"/>
+          <p:cNvPr id="21" name="r21"/>
+          <p:cNvSpPr>
+            <a:spLocks noGrp="1"/>
+          </p:cNvSpPr>
+          <p:nvPr/>
+        </p:nvSpPr>
+        <p:spPr>
+          <a:xfrm>
+            <a:off x="4176000" y="1854000"/>
             <a:ext cx="3780000" cy="90000"/>
           </a:xfrm>
           <a:prstGeom prst="rect">
@@ -8157,13 +8160,13 @@
       </p:sp>
       <p:sp>
         <p:nvSpPr>
-          <p:cNvPr id="473" name="t473"/>
-          <p:cNvSpPr txBox="1"/>
-          <p:nvPr/>
-        </p:nvSpPr>
-        <p:spPr>
-          <a:xfrm>
-            <a:off x="4284000" y="2034000"/>
+          <p:cNvPr id="22" name="t22"/>
+          <p:cNvSpPr txBox="1"/>
+          <p:nvPr/>
+        </p:nvSpPr>
+        <p:spPr>
+          <a:xfrm>
+            <a:off x="4284000" y="2016000"/>
             <a:ext cx="3600000" cy="306000"/>
           </a:xfrm>
           <a:prstGeom prst="rect">
@@ -8184,7 +8187,7 @@
                 <a:solidFill>
                   <a:srgbClr val="FFFFFF"/>
                 </a:solidFill>
-                <a:latin typeface="+mj-lt"/>
+                <a:latin typeface="Calibri"/>
               </a:rPr>
               <a:t>Virtual yordamchilar</a:t>
             </a:r>
@@ -8193,14 +8196,14 @@
       </p:sp>
       <p:sp>
         <p:nvSpPr>
-          <p:cNvPr id="474" name="t474"/>
-          <p:cNvSpPr txBox="1"/>
-          <p:nvPr/>
-        </p:nvSpPr>
-        <p:spPr>
-          <a:xfrm>
-            <a:off x="4284000" y="2340000"/>
-            <a:ext cx="3600000" cy="522000"/>
+          <p:cNvPr id="23" name="t23"/>
+          <p:cNvSpPr txBox="1"/>
+          <p:nvPr/>
+        </p:nvSpPr>
+        <p:spPr>
+          <a:xfrm>
+            <a:off x="4284000" y="2322000"/>
+            <a:ext cx="3600000" cy="503999"/>
           </a:xfrm>
           <a:prstGeom prst="rect">
             <a:avLst/>
@@ -8220,7 +8223,7 @@
                 <a:solidFill>
                   <a:srgbClr val="9AA6D6"/>
                 </a:solidFill>
-                <a:latin typeface="+mj-lt"/>
+                <a:latin typeface="Calibri"/>
               </a:rPr>
               <a:t>Chatbotlar bemor savollariga javob beradi, triaj qiladi.</a:t>
             </a:r>
@@ -8229,16 +8232,16 @@
       </p:sp>
       <p:sp>
         <p:nvSpPr>
-          <p:cNvPr id="475" name="r475"/>
-          <p:cNvSpPr>
-            <a:spLocks noGrp="1"/>
-          </p:cNvSpPr>
-          <p:nvPr/>
-        </p:nvSpPr>
-        <p:spPr>
-          <a:xfrm>
-            <a:off x="8172000" y="1872000"/>
-            <a:ext cx="3780000" cy="1044000"/>
+          <p:cNvPr id="24" name="r24"/>
+          <p:cNvSpPr>
+            <a:spLocks noGrp="1"/>
+          </p:cNvSpPr>
+          <p:nvPr/>
+        </p:nvSpPr>
+        <p:spPr>
+          <a:xfrm>
+            <a:off x="8172000" y="1854000"/>
+            <a:ext cx="3780000" cy="1026000"/>
           </a:xfrm>
           <a:prstGeom prst="rect">
             <a:avLst/>
@@ -8258,15 +8261,15 @@
       </p:sp>
       <p:sp>
         <p:nvSpPr>
-          <p:cNvPr id="476" name="r476"/>
-          <p:cNvSpPr>
-            <a:spLocks noGrp="1"/>
-          </p:cNvSpPr>
-          <p:nvPr/>
-        </p:nvSpPr>
-        <p:spPr>
-          <a:xfrm>
-            <a:off x="8172000" y="1872000"/>
+          <p:cNvPr id="25" name="r25"/>
+          <p:cNvSpPr>
+            <a:spLocks noGrp="1"/>
+          </p:cNvSpPr>
+          <p:nvPr/>
+        </p:nvSpPr>
+        <p:spPr>
+          <a:xfrm>
+            <a:off x="8172000" y="1854000"/>
             <a:ext cx="3780000" cy="90000"/>
           </a:xfrm>
           <a:prstGeom prst="rect">
@@ -8287,13 +8290,13 @@
       </p:sp>
       <p:sp>
         <p:nvSpPr>
-          <p:cNvPr id="477" name="t477"/>
-          <p:cNvSpPr txBox="1"/>
-          <p:nvPr/>
-        </p:nvSpPr>
-        <p:spPr>
-          <a:xfrm>
-            <a:off x="8280000" y="2034000"/>
+          <p:cNvPr id="26" name="t26"/>
+          <p:cNvSpPr txBox="1"/>
+          <p:nvPr/>
+        </p:nvSpPr>
+        <p:spPr>
+          <a:xfrm>
+            <a:off x="8280000" y="2016000"/>
             <a:ext cx="3600000" cy="306000"/>
           </a:xfrm>
           <a:prstGeom prst="rect">
@@ -8314,7 +8317,7 @@
                 <a:solidFill>
                   <a:srgbClr val="FFFFFF"/>
                 </a:solidFill>
-                <a:latin typeface="+mj-lt"/>
+                <a:latin typeface="Calibri"/>
               </a:rPr>
               <a:t>Ish jarayonini optimallashtirish</a:t>
             </a:r>
@@ -8323,14 +8326,14 @@
       </p:sp>
       <p:sp>
         <p:nvSpPr>
-          <p:cNvPr id="478" name="t478"/>
-          <p:cNvSpPr txBox="1"/>
-          <p:nvPr/>
-        </p:nvSpPr>
-        <p:spPr>
-          <a:xfrm>
-            <a:off x="8280000" y="2340000"/>
-            <a:ext cx="3600000" cy="522000"/>
+          <p:cNvPr id="27" name="t27"/>
+          <p:cNvSpPr txBox="1"/>
+          <p:nvPr/>
+        </p:nvSpPr>
+        <p:spPr>
+          <a:xfrm>
+            <a:off x="8280000" y="2322000"/>
+            <a:ext cx="3600000" cy="503999"/>
           </a:xfrm>
           <a:prstGeom prst="rect">
             <a:avLst/>
@@ -8350,7 +8353,7 @@
                 <a:solidFill>
                   <a:srgbClr val="9AA6D6"/>
                 </a:solidFill>
-                <a:latin typeface="+mj-lt"/>
+                <a:latin typeface="Calibri"/>
               </a:rPr>
               <a:t>Navbat, resurs va hujjatlarni avtomatlashtirish.</a:t>
             </a:r>
@@ -8378,7 +8381,7 @@
     </p:bg>
     <p:spTree>
       <p:nvGrpSpPr>
-        <p:cNvPr id="1" name=""/>
+        <p:cNvPr id="1" name="slide"/>
         <p:cNvGrpSpPr/>
         <p:nvPr/>
       </p:nvGrpSpPr>
@@ -8392,7 +8395,7 @@
       </p:grpSpPr>
       <p:sp>
         <p:nvSpPr>
-          <p:cNvPr id="479" name="r479"/>
+          <p:cNvPr id="2" name="r2"/>
           <p:cNvSpPr>
             <a:spLocks noGrp="1"/>
           </p:cNvSpPr>
@@ -8421,7 +8424,7 @@
       </p:sp>
       <p:sp>
         <p:nvSpPr>
-          <p:cNvPr id="480" name="t480"/>
+          <p:cNvPr id="3" name="t3"/>
           <p:cNvSpPr txBox="1"/>
           <p:nvPr/>
         </p:nvSpPr>
@@ -8448,7 +8451,7 @@
                 <a:solidFill>
                   <a:srgbClr val="FFFFFF"/>
                 </a:solidFill>
-                <a:latin typeface="+mj-lt"/>
+                <a:latin typeface="Calibri"/>
               </a:rPr>
               <a:t>06 · TELEMEDITSINA IMKONIYATLARI</a:t>
             </a:r>
@@ -8457,7 +8460,7 @@
       </p:sp>
       <p:sp>
         <p:nvSpPr>
-          <p:cNvPr id="481" name="r481"/>
+          <p:cNvPr id="4" name="r4"/>
           <p:cNvSpPr>
             <a:spLocks noGrp="1"/>
           </p:cNvSpPr>
@@ -8486,7 +8489,7 @@
       </p:sp>
       <p:sp>
         <p:nvSpPr>
-          <p:cNvPr id="482" name="t482"/>
+          <p:cNvPr id="5" name="t5"/>
           <p:cNvSpPr txBox="1"/>
           <p:nvPr/>
         </p:nvSpPr>
@@ -8513,7 +8516,7 @@
                 <a:solidFill>
                   <a:srgbClr val="EAF0FF"/>
                 </a:solidFill>
-                <a:latin typeface="+mj-lt"/>
+                <a:latin typeface="Calibri"/>
               </a:rPr>
               <a:t>Telemeditsina — axborot-kommunikatsiya texnologiyalari</a:t>
             </a:r>
@@ -8525,7 +8528,7 @@
                 <a:solidFill>
                   <a:srgbClr val="EAF0FF"/>
                 </a:solidFill>
-                <a:latin typeface="+mj-lt"/>
+                <a:latin typeface="Calibri"/>
               </a:rPr>
               <a:t>orqali masofadan tibbiy xizmat ko'rsatish. Masofa va</a:t>
             </a:r>
@@ -8537,7 +8540,7 @@
                 <a:solidFill>
                   <a:srgbClr val="EAF0FF"/>
                 </a:solidFill>
-                <a:latin typeface="+mj-lt"/>
+                <a:latin typeface="Calibri"/>
               </a:rPr>
               <a:t>resurs to'siqlarini bartaraf etadi.</a:t>
             </a:r>
@@ -8546,7 +8549,7 @@
       </p:sp>
       <p:sp>
         <p:nvSpPr>
-          <p:cNvPr id="483" name="r483"/>
+          <p:cNvPr id="6" name="r6"/>
           <p:cNvSpPr>
             <a:spLocks noGrp="1"/>
           </p:cNvSpPr>
@@ -8575,14 +8578,14 @@
       </p:sp>
       <p:sp>
         <p:nvSpPr>
-          <p:cNvPr id="484" name="t484"/>
+          <p:cNvPr id="7" name="t7"/>
           <p:cNvSpPr txBox="1"/>
           <p:nvPr/>
         </p:nvSpPr>
         <p:spPr>
           <a:xfrm>
             <a:off x="521999" y="1728000"/>
-            <a:ext cx="5454001" cy="270000"/>
+            <a:ext cx="5454001" cy="280800"/>
           </a:xfrm>
           <a:prstGeom prst="rect">
             <a:avLst/>
@@ -8602,7 +8605,7 @@
                 <a:solidFill>
                   <a:srgbClr val="EAF0FF"/>
                 </a:solidFill>
-                <a:latin typeface="+mj-lt"/>
+                <a:latin typeface="Calibri"/>
               </a:rPr>
               <a:t>Telekonsultatsiya — masofaviy shifokor qabuli</a:t>
             </a:r>
@@ -8611,15 +8614,15 @@
       </p:sp>
       <p:sp>
         <p:nvSpPr>
-          <p:cNvPr id="485" name="r485"/>
-          <p:cNvSpPr>
-            <a:spLocks noGrp="1"/>
-          </p:cNvSpPr>
-          <p:nvPr/>
-        </p:nvSpPr>
-        <p:spPr>
-          <a:xfrm>
-            <a:off x="396000" y="2102400"/>
+          <p:cNvPr id="8" name="r8"/>
+          <p:cNvSpPr>
+            <a:spLocks noGrp="1"/>
+          </p:cNvSpPr>
+          <p:nvPr/>
+        </p:nvSpPr>
+        <p:spPr>
+          <a:xfrm>
+            <a:off x="396000" y="2109600"/>
             <a:ext cx="57600" cy="57600"/>
           </a:xfrm>
           <a:prstGeom prst="rect">
@@ -8640,14 +8643,14 @@
       </p:sp>
       <p:sp>
         <p:nvSpPr>
-          <p:cNvPr id="486" name="t486"/>
-          <p:cNvSpPr txBox="1"/>
-          <p:nvPr/>
-        </p:nvSpPr>
-        <p:spPr>
-          <a:xfrm>
-            <a:off x="521999" y="2023200"/>
-            <a:ext cx="5454001" cy="270000"/>
+          <p:cNvPr id="9" name="t9"/>
+          <p:cNvSpPr txBox="1"/>
+          <p:nvPr/>
+        </p:nvSpPr>
+        <p:spPr>
+          <a:xfrm>
+            <a:off x="521999" y="2030400"/>
+            <a:ext cx="5454001" cy="280800"/>
           </a:xfrm>
           <a:prstGeom prst="rect">
             <a:avLst/>
@@ -8667,7 +8670,7 @@
                 <a:solidFill>
                   <a:srgbClr val="EAF0FF"/>
                 </a:solidFill>
-                <a:latin typeface="+mj-lt"/>
+                <a:latin typeface="Calibri"/>
               </a:rPr>
               <a:t>Telemonitoring — surunkali kasalliklarni masofadan kuzatish</a:t>
             </a:r>
@@ -8676,15 +8679,15 @@
       </p:sp>
       <p:sp>
         <p:nvSpPr>
-          <p:cNvPr id="487" name="r487"/>
-          <p:cNvSpPr>
-            <a:spLocks noGrp="1"/>
-          </p:cNvSpPr>
-          <p:nvPr/>
-        </p:nvSpPr>
-        <p:spPr>
-          <a:xfrm>
-            <a:off x="396000" y="2397600"/>
+          <p:cNvPr id="10" name="r10"/>
+          <p:cNvSpPr>
+            <a:spLocks noGrp="1"/>
+          </p:cNvSpPr>
+          <p:nvPr/>
+        </p:nvSpPr>
+        <p:spPr>
+          <a:xfrm>
+            <a:off x="396000" y="2412000"/>
             <a:ext cx="57600" cy="57600"/>
           </a:xfrm>
           <a:prstGeom prst="rect">
@@ -8705,14 +8708,14 @@
       </p:sp>
       <p:sp>
         <p:nvSpPr>
-          <p:cNvPr id="488" name="t488"/>
-          <p:cNvSpPr txBox="1"/>
-          <p:nvPr/>
-        </p:nvSpPr>
-        <p:spPr>
-          <a:xfrm>
-            <a:off x="521999" y="2318400"/>
-            <a:ext cx="5454001" cy="270000"/>
+          <p:cNvPr id="11" name="t11"/>
+          <p:cNvSpPr txBox="1"/>
+          <p:nvPr/>
+        </p:nvSpPr>
+        <p:spPr>
+          <a:xfrm>
+            <a:off x="521999" y="2332800"/>
+            <a:ext cx="5454001" cy="280800"/>
           </a:xfrm>
           <a:prstGeom prst="rect">
             <a:avLst/>
@@ -8732,7 +8735,7 @@
                 <a:solidFill>
                   <a:srgbClr val="EAF0FF"/>
                 </a:solidFill>
-                <a:latin typeface="+mj-lt"/>
+                <a:latin typeface="Calibri"/>
               </a:rPr>
               <a:t>Tel-radiologiya / patologiya — tasvirlarni masofaviy tahlil</a:t>
             </a:r>
@@ -8741,7 +8744,7 @@
       </p:sp>
       <p:sp>
         <p:nvSpPr>
-          <p:cNvPr id="489" name="r489"/>
+          <p:cNvPr id="12" name="r12"/>
           <p:cNvSpPr>
             <a:spLocks noGrp="1"/>
           </p:cNvSpPr>
@@ -8770,7 +8773,7 @@
       </p:sp>
       <p:sp>
         <p:nvSpPr>
-          <p:cNvPr id="490" name="t490"/>
+          <p:cNvPr id="13" name="t13"/>
           <p:cNvSpPr txBox="1"/>
           <p:nvPr/>
         </p:nvSpPr>
@@ -8797,7 +8800,7 @@
                 <a:solidFill>
                   <a:srgbClr val="FFFFFF"/>
                 </a:solidFill>
-                <a:latin typeface="+mj-lt"/>
+                <a:latin typeface="Calibri"/>
               </a:rPr>
               <a:t>Kimga foydali?</a:t>
             </a:r>
@@ -8806,15 +8809,15 @@
       </p:sp>
       <p:sp>
         <p:nvSpPr>
-          <p:cNvPr id="491" name="r491"/>
-          <p:cNvSpPr>
-            <a:spLocks noGrp="1"/>
-          </p:cNvSpPr>
-          <p:nvPr/>
-        </p:nvSpPr>
-        <p:spPr>
-          <a:xfrm>
-            <a:off x="6623999" y="1303200"/>
+          <p:cNvPr id="14" name="r14"/>
+          <p:cNvSpPr>
+            <a:spLocks noGrp="1"/>
+          </p:cNvSpPr>
+          <p:nvPr/>
+        </p:nvSpPr>
+        <p:spPr>
+          <a:xfrm>
+            <a:off x="6623999" y="1339200"/>
             <a:ext cx="57600" cy="57600"/>
           </a:xfrm>
           <a:prstGeom prst="rect">
@@ -8835,14 +8838,14 @@
       </p:sp>
       <p:sp>
         <p:nvSpPr>
-          <p:cNvPr id="492" name="t492"/>
-          <p:cNvSpPr txBox="1"/>
-          <p:nvPr/>
-        </p:nvSpPr>
-        <p:spPr>
-          <a:xfrm>
-            <a:off x="6749998" y="1224000"/>
-            <a:ext cx="4914001" cy="270000"/>
+          <p:cNvPr id="15" name="t15"/>
+          <p:cNvSpPr txBox="1"/>
+          <p:nvPr/>
+        </p:nvSpPr>
+        <p:spPr>
+          <a:xfrm>
+            <a:off x="6749998" y="1260000"/>
+            <a:ext cx="4914001" cy="280800"/>
           </a:xfrm>
           <a:prstGeom prst="rect">
             <a:avLst/>
@@ -8862,7 +8865,7 @@
                 <a:solidFill>
                   <a:srgbClr val="EAF0FF"/>
                 </a:solidFill>
-                <a:latin typeface="+mj-lt"/>
+                <a:latin typeface="Calibri"/>
               </a:rPr>
               <a:t>Olis va qishloq hududlari aholisi</a:t>
             </a:r>
@@ -8871,15 +8874,15 @@
       </p:sp>
       <p:sp>
         <p:nvSpPr>
-          <p:cNvPr id="493" name="r493"/>
-          <p:cNvSpPr>
-            <a:spLocks noGrp="1"/>
-          </p:cNvSpPr>
-          <p:nvPr/>
-        </p:nvSpPr>
-        <p:spPr>
-          <a:xfrm>
-            <a:off x="6623999" y="1598400"/>
+          <p:cNvPr id="16" name="r16"/>
+          <p:cNvSpPr>
+            <a:spLocks noGrp="1"/>
+          </p:cNvSpPr>
+          <p:nvPr/>
+        </p:nvSpPr>
+        <p:spPr>
+          <a:xfrm>
+            <a:off x="6623999" y="1641600"/>
             <a:ext cx="57600" cy="57600"/>
           </a:xfrm>
           <a:prstGeom prst="rect">
@@ -8900,14 +8903,14 @@
       </p:sp>
       <p:sp>
         <p:nvSpPr>
-          <p:cNvPr id="494" name="t494"/>
-          <p:cNvSpPr txBox="1"/>
-          <p:nvPr/>
-        </p:nvSpPr>
-        <p:spPr>
-          <a:xfrm>
-            <a:off x="6749998" y="1519200"/>
-            <a:ext cx="4914001" cy="270000"/>
+          <p:cNvPr id="17" name="t17"/>
+          <p:cNvSpPr txBox="1"/>
+          <p:nvPr/>
+        </p:nvSpPr>
+        <p:spPr>
+          <a:xfrm>
+            <a:off x="6749998" y="1562400"/>
+            <a:ext cx="4914001" cy="280800"/>
           </a:xfrm>
           <a:prstGeom prst="rect">
             <a:avLst/>
@@ -8927,7 +8930,7 @@
                 <a:solidFill>
                   <a:srgbClr val="EAF0FF"/>
                 </a:solidFill>
-                <a:latin typeface="+mj-lt"/>
+                <a:latin typeface="Calibri"/>
               </a:rPr>
               <a:t>Harakati cheklangan bemorlar</a:t>
             </a:r>
@@ -8936,15 +8939,15 @@
       </p:sp>
       <p:sp>
         <p:nvSpPr>
-          <p:cNvPr id="495" name="r495"/>
-          <p:cNvSpPr>
-            <a:spLocks noGrp="1"/>
-          </p:cNvSpPr>
-          <p:nvPr/>
-        </p:nvSpPr>
-        <p:spPr>
-          <a:xfrm>
-            <a:off x="6623999" y="1893600"/>
+          <p:cNvPr id="18" name="r18"/>
+          <p:cNvSpPr>
+            <a:spLocks noGrp="1"/>
+          </p:cNvSpPr>
+          <p:nvPr/>
+        </p:nvSpPr>
+        <p:spPr>
+          <a:xfrm>
+            <a:off x="6623999" y="1944000"/>
             <a:ext cx="57600" cy="57600"/>
           </a:xfrm>
           <a:prstGeom prst="rect">
@@ -8965,14 +8968,14 @@
       </p:sp>
       <p:sp>
         <p:nvSpPr>
-          <p:cNvPr id="496" name="t496"/>
-          <p:cNvSpPr txBox="1"/>
-          <p:nvPr/>
-        </p:nvSpPr>
-        <p:spPr>
-          <a:xfrm>
-            <a:off x="6749998" y="1814400"/>
-            <a:ext cx="4914001" cy="270000"/>
+          <p:cNvPr id="19" name="t19"/>
+          <p:cNvSpPr txBox="1"/>
+          <p:nvPr/>
+        </p:nvSpPr>
+        <p:spPr>
+          <a:xfrm>
+            <a:off x="6749998" y="1864800"/>
+            <a:ext cx="4914001" cy="280800"/>
           </a:xfrm>
           <a:prstGeom prst="rect">
             <a:avLst/>
@@ -8992,7 +8995,7 @@
                 <a:solidFill>
                   <a:srgbClr val="EAF0FF"/>
                 </a:solidFill>
-                <a:latin typeface="+mj-lt"/>
+                <a:latin typeface="Calibri"/>
               </a:rPr>
               <a:t>Surunkali kasallarni kuzatish</a:t>
             </a:r>
@@ -9001,15 +9004,15 @@
       </p:sp>
       <p:sp>
         <p:nvSpPr>
-          <p:cNvPr id="497" name="r497"/>
-          <p:cNvSpPr>
-            <a:spLocks noGrp="1"/>
-          </p:cNvSpPr>
-          <p:nvPr/>
-        </p:nvSpPr>
-        <p:spPr>
-          <a:xfrm>
-            <a:off x="6623999" y="2188800"/>
+          <p:cNvPr id="20" name="r20"/>
+          <p:cNvSpPr>
+            <a:spLocks noGrp="1"/>
+          </p:cNvSpPr>
+          <p:nvPr/>
+        </p:nvSpPr>
+        <p:spPr>
+          <a:xfrm>
+            <a:off x="6623999" y="2246400"/>
             <a:ext cx="57600" cy="57600"/>
           </a:xfrm>
           <a:prstGeom prst="rect">
@@ -9030,14 +9033,14 @@
       </p:sp>
       <p:sp>
         <p:nvSpPr>
-          <p:cNvPr id="498" name="t498"/>
-          <p:cNvSpPr txBox="1"/>
-          <p:nvPr/>
-        </p:nvSpPr>
-        <p:spPr>
-          <a:xfrm>
-            <a:off x="6749998" y="2109600"/>
-            <a:ext cx="4914001" cy="270000"/>
+          <p:cNvPr id="21" name="t21"/>
+          <p:cNvSpPr txBox="1"/>
+          <p:nvPr/>
+        </p:nvSpPr>
+        <p:spPr>
+          <a:xfrm>
+            <a:off x="6749998" y="2167200"/>
+            <a:ext cx="4914001" cy="280800"/>
           </a:xfrm>
           <a:prstGeom prst="rect">
             <a:avLst/>
@@ -9057,7 +9060,7 @@
                 <a:solidFill>
                   <a:srgbClr val="EAF0FF"/>
                 </a:solidFill>
-                <a:latin typeface="+mj-lt"/>
+                <a:latin typeface="Calibri"/>
               </a:rPr>
               <a:t>Mutaxassislar yetishmaydigan markazlar</a:t>
             </a:r>
@@ -9085,7 +9088,7 @@
     </p:bg>
     <p:spTree>
       <p:nvGrpSpPr>
-        <p:cNvPr id="1" name=""/>
+        <p:cNvPr id="1" name="slide"/>
         <p:cNvGrpSpPr/>
         <p:nvPr/>
       </p:nvGrpSpPr>
@@ -9099,7 +9102,7 @@
       </p:grpSpPr>
       <p:sp>
         <p:nvSpPr>
-          <p:cNvPr id="499" name="r499"/>
+          <p:cNvPr id="2" name="r2"/>
           <p:cNvSpPr>
             <a:spLocks noGrp="1"/>
           </p:cNvSpPr>
@@ -9128,7 +9131,7 @@
       </p:sp>
       <p:sp>
         <p:nvSpPr>
-          <p:cNvPr id="500" name="t500"/>
+          <p:cNvPr id="3" name="t3"/>
           <p:cNvSpPr txBox="1"/>
           <p:nvPr/>
         </p:nvSpPr>
@@ -9155,7 +9158,7 @@
                 <a:solidFill>
                   <a:srgbClr val="FFFFFF"/>
                 </a:solidFill>
-                <a:latin typeface="+mj-lt"/>
+                <a:latin typeface="Calibri"/>
               </a:rPr>
               <a:t>07 · MASOFAVIY REABILITATSIYA</a:t>
             </a:r>
@@ -9164,7 +9167,7 @@
       </p:sp>
       <p:sp>
         <p:nvSpPr>
-          <p:cNvPr id="501" name="t501"/>
+          <p:cNvPr id="4" name="t4"/>
           <p:cNvSpPr txBox="1"/>
           <p:nvPr/>
         </p:nvSpPr>
@@ -9191,7 +9194,7 @@
                 <a:solidFill>
                   <a:srgbClr val="9AA6D6"/>
                 </a:solidFill>
-                <a:latin typeface="+mj-lt"/>
+                <a:latin typeface="Calibri"/>
               </a:rPr>
               <a:t>Telereabilitatsiya bemorga uy sharoitida, mutaxassis nazorati ostida tiklanish imkonini beradi.</a:t>
             </a:r>
@@ -9200,7 +9203,7 @@
       </p:sp>
       <p:sp>
         <p:nvSpPr>
-          <p:cNvPr id="502" name="r502"/>
+          <p:cNvPr id="5" name="r5"/>
           <p:cNvSpPr>
             <a:spLocks noGrp="1"/>
           </p:cNvSpPr>
@@ -9229,7 +9232,7 @@
       </p:sp>
       <p:sp>
         <p:nvSpPr>
-          <p:cNvPr id="503" name="r503"/>
+          <p:cNvPr id="6" name="r6"/>
           <p:cNvSpPr>
             <a:spLocks noGrp="1"/>
           </p:cNvSpPr>
@@ -9258,7 +9261,7 @@
       </p:sp>
       <p:sp>
         <p:nvSpPr>
-          <p:cNvPr id="504" name="t504"/>
+          <p:cNvPr id="7" name="t7"/>
           <p:cNvSpPr txBox="1"/>
           <p:nvPr/>
         </p:nvSpPr>
@@ -9285,7 +9288,7 @@
                 <a:solidFill>
                   <a:srgbClr val="FFFFFF"/>
                 </a:solidFill>
-                <a:latin typeface="+mj-lt"/>
+                <a:latin typeface="Calibri"/>
               </a:rPr>
               <a:t>Video-mashg'ulotlar</a:t>
             </a:r>
@@ -9294,14 +9297,14 @@
       </p:sp>
       <p:sp>
         <p:nvSpPr>
-          <p:cNvPr id="505" name="t505"/>
-          <p:cNvSpPr txBox="1"/>
-          <p:nvPr/>
-        </p:nvSpPr>
-        <p:spPr>
-          <a:xfrm>
-            <a:off x="288000" y="1548000"/>
-            <a:ext cx="3600000" cy="558000"/>
+          <p:cNvPr id="8" name="t8"/>
+          <p:cNvSpPr txBox="1"/>
+          <p:nvPr/>
+        </p:nvSpPr>
+        <p:spPr>
+          <a:xfrm>
+            <a:off x="288000" y="1566000"/>
+            <a:ext cx="3600000" cy="540000"/>
           </a:xfrm>
           <a:prstGeom prst="rect">
             <a:avLst/>
@@ -9321,7 +9324,7 @@
                 <a:solidFill>
                   <a:srgbClr val="9AA6D6"/>
                 </a:solidFill>
-                <a:latin typeface="+mj-lt"/>
+                <a:latin typeface="Calibri"/>
               </a:rPr>
               <a:t>Mashqlarni real vaqtda nazorat qilish va to'g'rilash.</a:t>
             </a:r>
@@ -9330,7 +9333,7 @@
       </p:sp>
       <p:sp>
         <p:nvSpPr>
-          <p:cNvPr id="506" name="r506"/>
+          <p:cNvPr id="9" name="r9"/>
           <p:cNvSpPr>
             <a:spLocks noGrp="1"/>
           </p:cNvSpPr>
@@ -9359,7 +9362,7 @@
       </p:sp>
       <p:sp>
         <p:nvSpPr>
-          <p:cNvPr id="507" name="r507"/>
+          <p:cNvPr id="10" name="r10"/>
           <p:cNvSpPr>
             <a:spLocks noGrp="1"/>
           </p:cNvSpPr>
@@ -9388,7 +9391,7 @@
       </p:sp>
       <p:sp>
         <p:nvSpPr>
-          <p:cNvPr id="508" name="t508"/>
+          <p:cNvPr id="11" name="t11"/>
           <p:cNvSpPr txBox="1"/>
           <p:nvPr/>
         </p:nvSpPr>
@@ -9415,7 +9418,7 @@
                 <a:solidFill>
                   <a:srgbClr val="FFFFFF"/>
                 </a:solidFill>
-                <a:latin typeface="+mj-lt"/>
+                <a:latin typeface="Calibri"/>
               </a:rPr>
               <a:t>Sensorlar va kiyiladigan qurilmalar</a:t>
             </a:r>
@@ -9424,14 +9427,14 @@
       </p:sp>
       <p:sp>
         <p:nvSpPr>
-          <p:cNvPr id="509" name="t509"/>
-          <p:cNvSpPr txBox="1"/>
-          <p:nvPr/>
-        </p:nvSpPr>
-        <p:spPr>
-          <a:xfrm>
-            <a:off x="4284000" y="1548000"/>
-            <a:ext cx="3600000" cy="558000"/>
+          <p:cNvPr id="12" name="t12"/>
+          <p:cNvSpPr txBox="1"/>
+          <p:nvPr/>
+        </p:nvSpPr>
+        <p:spPr>
+          <a:xfrm>
+            <a:off x="4284000" y="1566000"/>
+            <a:ext cx="3600000" cy="540000"/>
           </a:xfrm>
           <a:prstGeom prst="rect">
             <a:avLst/>
@@ -9451,7 +9454,7 @@
                 <a:solidFill>
                   <a:srgbClr val="9AA6D6"/>
                 </a:solidFill>
-                <a:latin typeface="+mj-lt"/>
+                <a:latin typeface="Calibri"/>
               </a:rPr>
               <a:t>Harakat, yurish va fiziologik ko'rsatkichlarni o'lchash.</a:t>
             </a:r>
@@ -9460,7 +9463,7 @@
       </p:sp>
       <p:sp>
         <p:nvSpPr>
-          <p:cNvPr id="510" name="r510"/>
+          <p:cNvPr id="13" name="r13"/>
           <p:cNvSpPr>
             <a:spLocks noGrp="1"/>
           </p:cNvSpPr>
@@ -9489,7 +9492,7 @@
       </p:sp>
       <p:sp>
         <p:nvSpPr>
-          <p:cNvPr id="511" name="r511"/>
+          <p:cNvPr id="14" name="r14"/>
           <p:cNvSpPr>
             <a:spLocks noGrp="1"/>
           </p:cNvSpPr>
@@ -9518,7 +9521,7 @@
       </p:sp>
       <p:sp>
         <p:nvSpPr>
-          <p:cNvPr id="512" name="t512"/>
+          <p:cNvPr id="15" name="t15"/>
           <p:cNvSpPr txBox="1"/>
           <p:nvPr/>
         </p:nvSpPr>
@@ -9545,7 +9548,7 @@
                 <a:solidFill>
                   <a:srgbClr val="FFFFFF"/>
                 </a:solidFill>
-                <a:latin typeface="+mj-lt"/>
+                <a:latin typeface="Calibri"/>
               </a:rPr>
               <a:t>VR + AI birikmasi</a:t>
             </a:r>
@@ -9554,14 +9557,14 @@
       </p:sp>
       <p:sp>
         <p:nvSpPr>
-          <p:cNvPr id="513" name="t513"/>
-          <p:cNvSpPr txBox="1"/>
-          <p:nvPr/>
-        </p:nvSpPr>
-        <p:spPr>
-          <a:xfrm>
-            <a:off x="8280000" y="1548000"/>
-            <a:ext cx="3600000" cy="558000"/>
+          <p:cNvPr id="16" name="t16"/>
+          <p:cNvSpPr txBox="1"/>
+          <p:nvPr/>
+        </p:nvSpPr>
+        <p:spPr>
+          <a:xfrm>
+            <a:off x="8280000" y="1566000"/>
+            <a:ext cx="3600000" cy="540000"/>
           </a:xfrm>
           <a:prstGeom prst="rect">
             <a:avLst/>
@@ -9581,7 +9584,7 @@
                 <a:solidFill>
                   <a:srgbClr val="9AA6D6"/>
                 </a:solidFill>
-                <a:latin typeface="+mj-lt"/>
+                <a:latin typeface="Calibri"/>
               </a:rPr>
               <a:t>O'yinlashtirilgan, motivatsion va moslashuvchan reabilitatsiya.</a:t>
             </a:r>
@@ -9590,7 +9593,7 @@
       </p:sp>
       <p:sp>
         <p:nvSpPr>
-          <p:cNvPr id="514" name="r514"/>
+          <p:cNvPr id="17" name="r17"/>
           <p:cNvSpPr>
             <a:spLocks noGrp="1"/>
           </p:cNvSpPr>
@@ -9619,7 +9622,7 @@
       </p:sp>
       <p:sp>
         <p:nvSpPr>
-          <p:cNvPr id="515" name="t515"/>
+          <p:cNvPr id="18" name="t18"/>
           <p:cNvSpPr txBox="1"/>
           <p:nvPr/>
         </p:nvSpPr>
@@ -9642,11 +9645,11 @@
           <a:p>
             <a:pPr algn="ctr" indent="0" marL="0"/>
             <a:r>
-              <a:rPr lang="uz-UZ" sz="2200" b="1" dirty="0" smtClean="0">
+              <a:rPr lang="uz-UZ" sz="2000" b="1" dirty="0" smtClean="0">
                 <a:solidFill>
                   <a:srgbClr val="22E6FF"/>
                 </a:solidFill>
-                <a:latin typeface="+mj-lt"/>
+                <a:latin typeface="Calibri"/>
               </a:rPr>
               <a:t>Adherens yaxshilanadi</a:t>
             </a:r>
@@ -9655,7 +9658,7 @@
       </p:sp>
       <p:sp>
         <p:nvSpPr>
-          <p:cNvPr id="516" name="t516"/>
+          <p:cNvPr id="19" name="t19"/>
           <p:cNvSpPr txBox="1"/>
           <p:nvPr/>
         </p:nvSpPr>
@@ -9682,7 +9685,7 @@
                 <a:solidFill>
                   <a:srgbClr val="9AA6D6"/>
                 </a:solidFill>
-                <a:latin typeface="+mj-lt"/>
+                <a:latin typeface="Calibri"/>
               </a:rPr>
               <a:t>Dasturga rioya qilish ortadi</a:t>
             </a:r>
@@ -9691,7 +9694,7 @@
       </p:sp>
       <p:sp>
         <p:nvSpPr>
-          <p:cNvPr id="517" name="r517"/>
+          <p:cNvPr id="20" name="r20"/>
           <p:cNvSpPr>
             <a:spLocks noGrp="1"/>
           </p:cNvSpPr>
@@ -9720,7 +9723,7 @@
       </p:sp>
       <p:sp>
         <p:nvSpPr>
-          <p:cNvPr id="518" name="t518"/>
+          <p:cNvPr id="21" name="t21"/>
           <p:cNvSpPr txBox="1"/>
           <p:nvPr/>
         </p:nvSpPr>
@@ -9743,11 +9746,11 @@
           <a:p>
             <a:pPr algn="ctr" indent="0" marL="0"/>
             <a:r>
-              <a:rPr lang="uz-UZ" sz="2200" b="1" dirty="0" smtClean="0">
+              <a:rPr lang="uz-UZ" sz="2000" b="1" dirty="0" smtClean="0">
                 <a:solidFill>
                   <a:srgbClr val="22E6FF"/>
                 </a:solidFill>
-                <a:latin typeface="+mj-lt"/>
+                <a:latin typeface="Calibri"/>
               </a:rPr>
               <a:t>Xarajat kamayadi</a:t>
             </a:r>
@@ -9756,7 +9759,7 @@
       </p:sp>
       <p:sp>
         <p:nvSpPr>
-          <p:cNvPr id="519" name="t519"/>
+          <p:cNvPr id="22" name="t22"/>
           <p:cNvSpPr txBox="1"/>
           <p:nvPr/>
         </p:nvSpPr>
@@ -9783,7 +9786,7 @@
                 <a:solidFill>
                   <a:srgbClr val="9AA6D6"/>
                 </a:solidFill>
-                <a:latin typeface="+mj-lt"/>
+                <a:latin typeface="Calibri"/>
               </a:rPr>
               <a:t>Qatnov va kasalxona xarajatlari</a:t>
             </a:r>
@@ -9860,83 +9863,96 @@
           <a:gsLst>
             <a:gs pos="0">
               <a:schemeClr val="phClr">
-                <a:lumMod val="110000"/>
-                <a:satMod val="105000"/>
-                <a:tint val="67000"/>
+                <a:tint val="50000"/>
+                <a:satMod val="300000"/>
               </a:schemeClr>
             </a:gs>
-            <a:gs pos="50000">
+            <a:gs pos="35000">
               <a:schemeClr val="phClr">
-                <a:lumMod val="105000"/>
-                <a:satMod val="103000"/>
-                <a:tint val="73000"/>
+                <a:tint val="37000"/>
+                <a:satMod val="300000"/>
               </a:schemeClr>
             </a:gs>
             <a:gs pos="100000">
               <a:schemeClr val="phClr">
-                <a:lumMod val="105000"/>
-                <a:satMod val="109000"/>
-                <a:tint val="81000"/>
+                <a:tint val="15000"/>
+                <a:satMod val="350000"/>
               </a:schemeClr>
             </a:gs>
           </a:gsLst>
-          <a:lin ang="5400000" scaled="0"/>
+          <a:lin ang="16200000" scaled="1"/>
         </a:gradFill>
         <a:gradFill rotWithShape="1">
           <a:gsLst>
             <a:gs pos="0">
               <a:schemeClr val="phClr">
-                <a:satMod val="103000"/>
-                <a:lumMod val="102000"/>
-                <a:tint val="94000"/>
+                <a:shade val="51000"/>
+                <a:satMod val="130000"/>
+              </a:schemeClr>
+            </a:gs>
+            <a:gs pos="80000">
+              <a:schemeClr val="phClr">
+                <a:shade val="93000"/>
+                <a:satMod val="130000"/>
               </a:schemeClr>
             </a:gs>
             <a:gs pos="100000">
               <a:schemeClr val="phClr">
-                <a:lumMod val="99000"/>
-                <a:satMod val="120000"/>
-                <a:shade val="78000"/>
+                <a:shade val="94000"/>
+                <a:satMod val="135000"/>
               </a:schemeClr>
             </a:gs>
           </a:gsLst>
-          <a:lin ang="5400000" scaled="0"/>
+          <a:lin ang="16200000" scaled="0"/>
         </a:gradFill>
       </a:fillStyleLst>
       <a:lnStyleLst>
-        <a:ln w="6350" cap="flat" cmpd="sng" algn="ctr">
+        <a:ln w="9525" cap="flat" cmpd="sng" algn="ctr">
+          <a:solidFill>
+            <a:schemeClr val="phClr">
+              <a:shade val="95000"/>
+              <a:satMod val="105000"/>
+            </a:schemeClr>
+          </a:solidFill>
+          <a:prstDash val="solid"/>
+        </a:ln>
+        <a:ln w="25400" cap="flat" cmpd="sng" algn="ctr">
           <a:solidFill>
             <a:schemeClr val="phClr"/>
           </a:solidFill>
           <a:prstDash val="solid"/>
-          <a:miter lim="800000"/>
         </a:ln>
-        <a:ln w="12700" cap="flat" cmpd="sng" algn="ctr">
+        <a:ln w="38100" cap="flat" cmpd="sng" algn="ctr">
           <a:solidFill>
             <a:schemeClr val="phClr"/>
           </a:solidFill>
           <a:prstDash val="solid"/>
-          <a:miter lim="800000"/>
-        </a:ln>
-        <a:ln w="19050" cap="flat" cmpd="sng" algn="ctr">
-          <a:solidFill>
-            <a:schemeClr val="phClr"/>
-          </a:solidFill>
-          <a:prstDash val="solid"/>
-          <a:miter lim="800000"/>
         </a:ln>
       </a:lnStyleLst>
       <a:effectStyleLst>
         <a:effectStyle>
-          <a:effectLst/>
-        </a:effectStyle>
-        <a:effectStyle>
-          <a:effectLst/>
+          <a:effectLst>
+            <a:outerShdw blurRad="40000" dist="20000" dir="5400000" rotWithShape="0">
+              <a:srgbClr val="000000">
+                <a:alpha val="38000"/>
+              </a:srgbClr>
+            </a:outerShdw>
+          </a:effectLst>
         </a:effectStyle>
         <a:effectStyle>
           <a:effectLst>
-            <a:outerShdw blurRad="57150" dist="19050" dir="5400000" algn="ctr" rotWithShape="0">
+            <a:outerShdw blurRad="40000" dist="23000" dir="5400000" rotWithShape="0">
               <a:srgbClr val="000000">
-                <a:alpha val="63000"/>
+                <a:alpha val="35000"/>
+              </a:srgbClr>
+            </a:outerShdw>
+          </a:effectLst>
+        </a:effectStyle>
+        <a:effectStyle>
+          <a:effectLst>
+            <a:outerShdw blurRad="40000" dist="23000" dir="5400000" rotWithShape="0">
+              <a:srgbClr val="000000">
+                <a:alpha val="35000"/>
               </a:srgbClr>
             </a:outerShdw>
           </a:effectLst>
@@ -9946,32 +9962,50 @@
         <a:solidFill>
           <a:schemeClr val="phClr"/>
         </a:solidFill>
-        <a:solidFill>
-          <a:schemeClr val="phClr">
-            <a:tint val="95000"/>
-            <a:satMod val="170000"/>
-          </a:schemeClr>
-        </a:solidFill>
         <a:gradFill rotWithShape="1">
           <a:gsLst>
             <a:gs pos="0">
               <a:schemeClr val="phClr">
-                <a:tint val="93000"/>
-                <a:satMod val="150000"/>
-                <a:shade val="98000"/>
-                <a:lumMod val="102000"/>
+                <a:tint val="40000"/>
+                <a:satMod val="350000"/>
+              </a:schemeClr>
+            </a:gs>
+            <a:gs pos="40000">
+              <a:schemeClr val="phClr">
+                <a:tint val="45000"/>
+                <a:shade val="99000"/>
+                <a:satMod val="350000"/>
               </a:schemeClr>
             </a:gs>
             <a:gs pos="100000">
               <a:schemeClr val="phClr">
-                <a:tint val="98000"/>
-                <a:lumMod val="103000"/>
-                <a:satMod val="120000"/>
-                <a:shade val="94000"/>
+                <a:shade val="20000"/>
+                <a:satMod val="255000"/>
               </a:schemeClr>
             </a:gs>
           </a:gsLst>
-          <a:lin ang="16200000" scaled="0"/>
+          <a:path path="circle">
+            <a:fillToRect l="50000" t="-80000" r="50000" b="180000"/>
+          </a:path>
+        </a:gradFill>
+        <a:gradFill rotWithShape="1">
+          <a:gsLst>
+            <a:gs pos="0">
+              <a:schemeClr val="phClr">
+                <a:tint val="80000"/>
+                <a:satMod val="300000"/>
+              </a:schemeClr>
+            </a:gs>
+            <a:gs pos="100000">
+              <a:schemeClr val="phClr">
+                <a:shade val="30000"/>
+                <a:satMod val="200000"/>
+              </a:schemeClr>
+            </a:gs>
+          </a:gsLst>
+          <a:path path="circle">
+            <a:fillToRect l="50000" t="50000" r="50000" b="50000"/>
+          </a:path>
         </a:gradFill>
       </a:bgFillStyleLst>
     </a:fmtScheme>
